--- a/output/jul23_final_presentation.pptx
+++ b/output/jul23_final_presentation.pptx
@@ -9863,7 +9863,7 @@
                 </a:solidFill>
                 <a:latin typeface="Segoe UI Semibold"/>
               </a:rPr>
-              <a:t>0.138</a:t>
+              <a:t>0.139</a:t>
             </a:r>
           </a:p>
           <a:p>

--- a/output/jul23_final_presentation.pptx
+++ b/output/jul23_final_presentation.pptx
@@ -3803,7 +3803,7 @@
                 </a:solidFill>
                 <a:latin typeface="Segoe UI Semibold"/>
               </a:rPr>
-              <a:t>Real committed data, running locally, no mock content.</a:t>
+              <a:t>Real local data on the presentation laptop, no mock content.</a:t>
             </a:r>
           </a:p>
         </p:txBody>
@@ -4937,7 +4937,7 @@
                 </a:solidFill>
                 <a:latin typeface="Segoe UI"/>
               </a:rPr>
-              <a:t>Timing collapses 56 to 75 percent while loudness holds, 28 pieces, three corpora, 2000-shuffle null.</a:t>
+              <a:t>Timing collapses 56 to 75 percent while loudness holds; 28/28 pieces decrease (paired p = 3.73 x 10^-9).</a:t>
             </a:r>
           </a:p>
         </p:txBody>
@@ -5013,7 +5013,7 @@
                 </a:solidFill>
                 <a:latin typeface="Segoe UI"/>
               </a:rPr>
-              <a:t>An operational metric that separates human from synthetic choir networks.</a:t>
+              <a:t>Limited evidence in two human pieces and none of 20 synthetic pieces.</a:t>
             </a:r>
           </a:p>
         </p:txBody>
@@ -5165,7 +5165,7 @@
                 </a:solidFill>
                 <a:latin typeface="Segoe UI"/>
               </a:rPr>
-              <a:t>One command, 44 tests, cluster-validated protocol, every claim traceable to a committed artifact.</a:t>
+              <a:t>One command, 48 tests, cluster-validated protocol, every report claim traceable to a committed artifact.</a:t>
             </a:r>
           </a:p>
         </p:txBody>
@@ -5629,7 +5629,7 @@
                 </a:solidFill>
                 <a:latin typeface="Segoe UI"/>
               </a:rPr>
-              <a:t>Final seminar report due Jul 31; draft v1 complete since Jun 30.</a:t>
+              <a:t>Final report ready as Markdown and a 10-page PDF.</a:t>
             </a:r>
           </a:p>
         </p:txBody>
@@ -5926,7 +5926,7 @@
                 </a:solidFill>
                 <a:latin typeface="Segoe UI"/>
               </a:rPr>
-              <a:t>`make reproduce` rebuilds summary results from committed artifacts.</a:t>
+              <a:t>`make reproduce` rebuilds report results and PDF from committed artifacts.</a:t>
             </a:r>
           </a:p>
         </p:txBody>
@@ -7836,7 +7836,7 @@
                 </a:solidFill>
                 <a:latin typeface="Segoe UI"/>
               </a:rPr>
-              <a:t>Every coordination number is tested against a circular-shift null that preserves each stream's own autocorrelation.</a:t>
+              <a:t>Envelope and influence-network results use a circular-shift null that preserves each stream's own autocorrelation.</a:t>
             </a:r>
           </a:p>
           <a:p>
@@ -7906,7 +7906,7 @@
                 </a:solidFill>
                 <a:latin typeface="Segoe UI Semibold"/>
               </a:rPr>
-              <a:t>Known ground truth by construction, paired within piece, with a defensible null.</a:t>
+              <a:t>Known degradation by construction; each piece is its own control.</a:t>
             </a:r>
           </a:p>
         </p:txBody>
@@ -8224,7 +8224,7 @@
                 </a:solidFill>
                 <a:latin typeface="Segoe UI Semibold"/>
               </a:rPr>
-              <a:t>44 tests</a:t>
+              <a:t>48 tests</a:t>
             </a:r>
           </a:p>
           <a:p>
@@ -8240,7 +8240,7 @@
                 </a:solidFill>
                 <a:latin typeface="Segoe UI"/>
               </a:rPr>
-              <a:t>Audio, video, network, latency, entanglement, and the H3 experiment run in the automated suite.</a:t>
+              <a:t>Audio, video, network, latency, entanglement, H3, and report generation run in the automated suite.</a:t>
             </a:r>
           </a:p>
         </p:txBody>
@@ -8900,7 +8900,7 @@
                 </a:solidFill>
                 <a:latin typeface="Segoe UI"/>
               </a:rPr>
-              <a:t>Corpus, 28 pieces</a:t>
+              <a:t>Corpus; 28/28 decrease</a:t>
             </a:r>
           </a:p>
         </p:txBody>
@@ -8978,7 +8978,7 @@
                 </a:solidFill>
                 <a:latin typeface="Segoe UI Semibold"/>
               </a:rPr>
-              <a:t>Onset synchrony collapses clean to Zoom-class; envelope coupling stays flat (Dagstuhl -0.4%).</a:t>
+              <a:t>All 28 pieces decrease (paired p = 3.73 x 10^-9); envelope coupling stays flat.</a:t>
             </a:r>
           </a:p>
         </p:txBody>
@@ -9622,7 +9622,7 @@
                 </a:solidFill>
                 <a:latin typeface="Segoe UI Semibold"/>
               </a:rPr>
-              <a:t>H2: weak but real leadership structure</a:t>
+              <a:t>H2: limited leadership evidence</a:t>
             </a:r>
           </a:p>
         </p:txBody>
@@ -9795,7 +9795,7 @@
                 </a:solidFill>
                 <a:latin typeface="Segoe UI Semibold"/>
               </a:rPr>
-              <a:t>0.154</a:t>
+              <a:t>0.162</a:t>
             </a:r>
           </a:p>
           <a:p>
@@ -9863,7 +9863,7 @@
                 </a:solidFill>
                 <a:latin typeface="Segoe UI Semibold"/>
               </a:rPr>
-              <a:t>0.139</a:t>
+              <a:t>0.155</a:t>
             </a:r>
           </a:p>
           <a:p>
@@ -9931,7 +9931,7 @@
                 </a:solidFill>
                 <a:latin typeface="Segoe UI Semibold"/>
               </a:rPr>
-              <a:t>3/5 - 2/3</a:t>
+              <a:t>1/5 - 1/3</a:t>
             </a:r>
           </a:p>
           <a:p>
@@ -9999,7 +9999,7 @@
                 </a:solidFill>
                 <a:latin typeface="Segoe UI Semibold"/>
               </a:rPr>
-              <a:t>2/20</a:t>
+              <a:t>0/20</a:t>
             </a:r>
           </a:p>
           <a:p>
@@ -10011,7 +10011,7 @@
                 </a:solidFill>
                 <a:latin typeface="Segoe UI"/>
               </a:rPr>
-              <a:t>ChoralSynth (chance)</a:t>
+              <a:t>ChoralSynth significant</a:t>
             </a:r>
           </a:p>
         </p:txBody>
@@ -10089,7 +10089,7 @@
                 </a:solidFill>
                 <a:latin typeface="Segoe UI Semibold"/>
               </a:rPr>
-              <a:t>Leadership appears in human choirs, not synthetic renderings: a human coordination signal, not an artifact.</a:t>
+              <a:t>Limited support: two human pieces are centralized; no synthetic piece is.</a:t>
             </a:r>
           </a:p>
         </p:txBody>

--- a/output/jul23_final_presentation.pptx
+++ b/output/jul23_final_presentation.pptx
@@ -20,6 +20,10 @@
     <p:sldId id="268" r:id="rId19"/>
     <p:sldId id="269" r:id="rId20"/>
     <p:sldId id="270" r:id="rId21"/>
+    <p:sldId id="271" r:id="rId22"/>
+    <p:sldId id="272" r:id="rId23"/>
+    <p:sldId id="273" r:id="rId24"/>
+    <p:sldId id="274" r:id="rId25"/>
   </p:sldIdLst>
   <p:sldSz cx="12191695" cy="6858000" type="screen4x3"/>
   <p:notesSz cx="6858000" cy="9144000"/>
@@ -3119,7 +3123,7 @@
         <p:spPr>
           <a:xfrm>
             <a:off x="502920" y="1417320"/>
-            <a:ext cx="11185855" cy="822960"/>
+            <a:ext cx="11185855" cy="1097280"/>
           </a:xfrm>
           <a:prstGeom prst="rect">
             <a:avLst/>
@@ -3138,13 +3142,13 @@
               </a:lnSpc>
             </a:pPr>
             <a:r>
-              <a:rPr sz="4800" b="1">
+              <a:rPr sz="4400" b="1">
                 <a:solidFill>
                   <a:srgbClr val="FDFBF5"/>
                 </a:solidFill>
                 <a:latin typeface="Segoe UI"/>
               </a:rPr>
-              <a:t>Final Presentation</a:t>
+              <a:t>Measuring Coordination in Online Choirs</a:t>
             </a:r>
           </a:p>
         </p:txBody>
@@ -3157,8 +3161,8 @@
         </p:nvSpPr>
         <p:spPr>
           <a:xfrm>
-            <a:off x="502920" y="2423160"/>
-            <a:ext cx="11185855" cy="640080"/>
+            <a:off x="502920" y="2697480"/>
+            <a:ext cx="11185855" cy="502920"/>
           </a:xfrm>
           <a:prstGeom prst="rect">
             <a:avLst/>
@@ -3177,7 +3181,7 @@
               </a:lnSpc>
             </a:pPr>
             <a:r>
-              <a:rPr sz="2600" b="0">
+              <a:rPr sz="2500" b="0">
                 <a:solidFill>
                   <a:srgbClr val="E6C670"/>
                 </a:solidFill>
@@ -3196,8 +3200,8 @@
         </p:nvSpPr>
         <p:spPr>
           <a:xfrm>
-            <a:off x="502920" y="3429000"/>
-            <a:ext cx="11185855" cy="411480"/>
+            <a:off x="502920" y="3794760"/>
+            <a:ext cx="11185855" cy="365760"/>
           </a:xfrm>
           <a:prstGeom prst="rect">
             <a:avLst/>
@@ -3216,13 +3220,13 @@
               </a:lnSpc>
             </a:pPr>
             <a:r>
-              <a:rPr sz="1500" b="0">
-                <a:solidFill>
-                  <a:srgbClr val="CBD9DD"/>
+              <a:rPr sz="1600" b="1">
+                <a:solidFill>
+                  <a:srgbClr val="FDFBF5"/>
                 </a:solidFill>
                 <a:latin typeface="Segoe UI"/>
               </a:rPr>
-              <a:t>SNA-OSN-M Summer 2026  -  Uni Bamberg x Uni Koeln x HSLU</a:t>
+              <a:t>Zuraiz - Hammad Anwar - Hassan Ahmed - Kumaran Vasu</a:t>
             </a:r>
           </a:p>
         </p:txBody>
@@ -3235,7 +3239,7 @@
         </p:nvSpPr>
         <p:spPr>
           <a:xfrm>
-            <a:off x="502920" y="4251960"/>
+            <a:off x="502920" y="4434840"/>
             <a:ext cx="11185855" cy="365760"/>
           </a:xfrm>
           <a:prstGeom prst="rect">
@@ -3255,13 +3259,13 @@
               </a:lnSpc>
             </a:pPr>
             <a:r>
-              <a:rPr sz="1600" b="1">
-                <a:solidFill>
-                  <a:srgbClr val="FDFBF5"/>
+              <a:rPr sz="1400" b="0">
+                <a:solidFill>
+                  <a:srgbClr val="CBD9DD"/>
                 </a:solidFill>
                 <a:latin typeface="Segoe UI"/>
               </a:rPr>
-              <a:t>Team: Zuraiz - Hammad Anwar - Hassan Ahmed - Kumaran Vasu</a:t>
+              <a:t>Supervisors: Prof. Janine Hacker - Prof. Peter Gloor</a:t>
             </a:r>
           </a:p>
         </p:txBody>
@@ -3274,46 +3278,7 @@
         </p:nvSpPr>
         <p:spPr>
           <a:xfrm>
-            <a:off x="502920" y="4892040"/>
-            <a:ext cx="11185855" cy="365760"/>
-          </a:xfrm>
-          <a:prstGeom prst="rect">
-            <a:avLst/>
-          </a:prstGeom>
-          <a:noFill/>
-        </p:spPr>
-        <p:txBody>
-          <a:bodyPr wrap="square" anchor="t" lIns="27432" rIns="27432" tIns="18288" bIns="18288">
-            <a:spAutoFit/>
-          </a:bodyPr>
-          <a:lstStyle/>
-          <a:p>
-            <a:pPr algn="ctr" latinLnBrk="0">
-              <a:lnSpc>
-                <a:spcPct val="100000"/>
-              </a:lnSpc>
-            </a:pPr>
-            <a:r>
-              <a:rPr sz="1300" b="0">
-                <a:solidFill>
-                  <a:srgbClr val="CBD9DD"/>
-                </a:solidFill>
-                <a:latin typeface="Segoe UI"/>
-              </a:rPr>
-              <a:t>Supervisors: Prof. Janine Hacker - Prof. Peter Gloor</a:t>
-            </a:r>
-          </a:p>
-        </p:txBody>
-      </p:sp>
-      <p:sp>
-        <p:nvSpPr>
-          <p:cNvPr id="7" name="TextBox 6"/>
-          <p:cNvSpPr txBox="1"/>
-          <p:nvPr/>
-        </p:nvSpPr>
-        <p:spPr>
-          <a:xfrm>
-            <a:off x="502920" y="5715000"/>
+            <a:off x="502920" y="5166360"/>
             <a:ext cx="11185855" cy="365760"/>
           </a:xfrm>
           <a:prstGeom prst="rect">
@@ -3404,7 +3369,7 @@
                 </a:solidFill>
                 <a:latin typeface="Segoe UI Semibold"/>
               </a:rPr>
-              <a:t>DEMO</a:t>
+              <a:t>RESULT</a:t>
             </a:r>
           </a:p>
         </p:txBody>
@@ -3443,7 +3408,7 @@
                 </a:solidFill>
                 <a:latin typeface="Segoe UI Semibold"/>
               </a:rPr>
-              <a:t>Live: E(t) on real recordings (60 seconds)</a:t>
+              <a:t>Why the measurement revision matters</a:t>
             </a:r>
           </a:p>
         </p:txBody>
@@ -3482,7 +3447,7 @@
                 </a:solidFill>
                 <a:latin typeface="Segoe UI"/>
               </a:rPr>
-              <a:t>10 / 15</a:t>
+              <a:t>10 / 19</a:t>
             </a:r>
           </a:p>
         </p:txBody>
@@ -3534,8 +3499,8 @@
         </p:nvSpPr>
         <p:spPr>
           <a:xfrm>
-            <a:off x="502920" y="1463040"/>
-            <a:ext cx="11185855" cy="960120"/>
+            <a:off x="502920" y="1325880"/>
+            <a:ext cx="11185855" cy="914400"/>
           </a:xfrm>
           <a:prstGeom prst="roundRect">
             <a:avLst>
@@ -3581,7 +3546,7 @@
                 </a:solidFill>
                 <a:latin typeface="Segoe UI Semibold"/>
               </a:rPr>
-              <a:t>1. Audio/network piece</a:t>
+              <a:t>Initial null</a:t>
             </a:r>
           </a:p>
           <a:p>
@@ -3591,13 +3556,13 @@
               </a:spcAft>
             </a:pPr>
             <a:r>
-              <a:rPr sz="1400" b="0">
+              <a:rPr sz="1350" b="0">
                 <a:solidFill>
                   <a:srgbClr val="24262E"/>
                 </a:solidFill>
                 <a:latin typeface="Segoe UI"/>
               </a:rPr>
-              <a:t>Dagstuhl quartet: E(t) timeline updating with the influence graph.</a:t>
+              <a:t>Constant delay plus lag-tolerant envelope coupling showed little effect.</a:t>
             </a:r>
           </a:p>
         </p:txBody>
@@ -3610,8 +3575,8 @@
         </p:nvSpPr>
         <p:spPr>
           <a:xfrm>
-            <a:off x="502920" y="2560320"/>
-            <a:ext cx="11185855" cy="960120"/>
+            <a:off x="502920" y="2377440"/>
+            <a:ext cx="11185855" cy="914400"/>
           </a:xfrm>
           <a:prstGeom prst="roundRect">
             <a:avLst>
@@ -3657,7 +3622,7 @@
                 </a:solidFill>
                 <a:latin typeface="Segoe UI Semibold"/>
               </a:rPr>
-              <a:t>2. Video/pose piece</a:t>
+              <a:t>Control diagnosis</a:t>
             </a:r>
           </a:p>
           <a:p>
@@ -3667,13 +3632,13 @@
               </a:spcAft>
             </a:pPr>
             <a:r>
-              <a:rPr sz="1400" b="0">
+              <a:rPr sz="1350" b="0">
                 <a:solidFill>
                   <a:srgbClr val="24262E"/>
                 </a:solidFill>
                 <a:latin typeface="Segoe UI"/>
               </a:rPr>
-              <a:t>Tier-1 video playback with the live pose overlay.</a:t>
+              <a:t>The metric could absorb the lag, so it did not measure simultaneous note attacks.</a:t>
             </a:r>
           </a:p>
         </p:txBody>
@@ -3686,8 +3651,8 @@
         </p:nvSpPr>
         <p:spPr>
           <a:xfrm>
-            <a:off x="502920" y="3657600"/>
-            <a:ext cx="11185855" cy="960120"/>
+            <a:off x="502920" y="3429000"/>
+            <a:ext cx="11185855" cy="914400"/>
           </a:xfrm>
           <a:prstGeom prst="roundRect">
             <a:avLst>
@@ -3733,7 +3698,7 @@
                 </a:solidFill>
                 <a:latin typeface="Segoe UI Semibold"/>
               </a:rPr>
-              <a:t>Honesty layer</a:t>
+              <a:t>Operational revision</a:t>
             </a:r>
           </a:p>
           <a:p>
@@ -3743,13 +3708,13 @@
               </a:spcAft>
             </a:pPr>
             <a:r>
-              <a:rPr sz="1400" b="0">
+              <a:rPr sz="1350" b="0">
                 <a:solidFill>
                   <a:srgbClr val="24262E"/>
                 </a:solidFill>
                 <a:latin typeface="Segoe UI"/>
               </a:rPr>
-              <a:t>The metadata panel shows which signals each piece really has; no piece pretends to have all three.</a:t>
+              <a:t>Zero-lag onset synchrony directly measures whether singers land attacks together.</a:t>
             </a:r>
           </a:p>
         </p:txBody>
@@ -3757,6 +3722,82 @@
       <p:sp>
         <p:nvSpPr>
           <p:cNvPr id="9" name="Rounded Rectangle 8"/>
+          <p:cNvSpPr/>
+          <p:nvPr/>
+        </p:nvSpPr>
+        <p:spPr>
+          <a:xfrm>
+            <a:off x="502920" y="4480560"/>
+            <a:ext cx="11185855" cy="914400"/>
+          </a:xfrm>
+          <a:prstGeom prst="roundRect">
+            <a:avLst>
+              <a:gd name="adj" fmla="val 4000"/>
+            </a:avLst>
+          </a:prstGeom>
+          <a:solidFill>
+            <a:srgbClr val="FDFBF5"/>
+          </a:solidFill>
+          <a:ln w="12700">
+            <a:solidFill>
+              <a:srgbClr val="CBD9DD"/>
+            </a:solidFill>
+          </a:ln>
+        </p:spPr>
+        <p:style>
+          <a:lnRef idx="1">
+            <a:schemeClr val="accent1"/>
+          </a:lnRef>
+          <a:fillRef idx="3">
+            <a:schemeClr val="accent1"/>
+          </a:fillRef>
+          <a:effectRef idx="2">
+            <a:schemeClr val="accent1"/>
+          </a:effectRef>
+          <a:fontRef idx="minor">
+            <a:schemeClr val="lt1"/>
+          </a:fontRef>
+        </p:style>
+        <p:txBody>
+          <a:bodyPr rtlCol="0" anchor="t" wrap="square" lIns="201168" rIns="201168" tIns="146304"/>
+          <a:lstStyle/>
+          <a:p>
+            <a:pPr algn="l" latinLnBrk="0">
+              <a:spcAft>
+                <a:spcPts val="600"/>
+              </a:spcAft>
+            </a:pPr>
+            <a:r>
+              <a:rPr sz="1400" b="1">
+                <a:solidFill>
+                  <a:srgbClr val="0E4D5E"/>
+                </a:solidFill>
+                <a:latin typeface="Segoe UI Semibold"/>
+              </a:rPr>
+              <a:t>Dissociation</a:t>
+            </a:r>
+          </a:p>
+          <a:p>
+            <a:pPr algn="l" latinLnBrk="0">
+              <a:spcAft>
+                <a:spcPts val="400"/>
+              </a:spcAft>
+            </a:pPr>
+            <a:r>
+              <a:rPr sz="1350" b="0">
+                <a:solidFill>
+                  <a:srgbClr val="24262E"/>
+                </a:solidFill>
+                <a:latin typeface="Segoe UI"/>
+              </a:rPr>
+              <a:t>Timing falls 56% to 75%; pure envelope coupling falls roughly 6% to 14% across corpora.</a:t>
+            </a:r>
+          </a:p>
+        </p:txBody>
+      </p:sp>
+      <p:sp>
+        <p:nvSpPr>
+          <p:cNvPr id="10" name="Rounded Rectangle 9"/>
           <p:cNvSpPr/>
           <p:nvPr/>
         </p:nvSpPr>
@@ -3803,7 +3844,7 @@
                 </a:solidFill>
                 <a:latin typeface="Segoe UI Semibold"/>
               </a:rPr>
-              <a:t>Real local data on the presentation laptop, no mock content.</a:t>
+              <a:t>The hypothesis stayed fixed; the dated metric revision is part of the audit trail.</a:t>
             </a:r>
           </a:p>
         </p:txBody>
@@ -3868,7 +3909,7 @@
                 </a:solidFill>
                 <a:latin typeface="Segoe UI Semibold"/>
               </a:rPr>
-              <a:t>DEMO</a:t>
+              <a:t>RESULT</a:t>
             </a:r>
           </a:p>
         </p:txBody>
@@ -3907,7 +3948,7 @@
                 </a:solidFill>
                 <a:latin typeface="Segoe UI Semibold"/>
               </a:rPr>
-              <a:t>Fallback: dashboard on real outputs</a:t>
+              <a:t>H2: limited leadership evidence</a:t>
             </a:r>
           </a:p>
         </p:txBody>
@@ -3946,7 +3987,7 @@
                 </a:solidFill>
                 <a:latin typeface="Segoe UI"/>
               </a:rPr>
-              <a:t>11 / 15</a:t>
+              <a:t>11 / 19</a:t>
             </a:r>
           </a:p>
         </p:txBody>
@@ -3990,9 +4031,281 @@
           </a:p>
         </p:txBody>
       </p:sp>
+      <p:sp>
+        <p:nvSpPr>
+          <p:cNvPr id="6" name="Rounded Rectangle 5"/>
+          <p:cNvSpPr/>
+          <p:nvPr/>
+        </p:nvSpPr>
+        <p:spPr>
+          <a:xfrm>
+            <a:off x="502920" y="1234440"/>
+            <a:ext cx="2651760" cy="1143000"/>
+          </a:xfrm>
+          <a:prstGeom prst="roundRect">
+            <a:avLst>
+              <a:gd name="adj" fmla="val 6000"/>
+            </a:avLst>
+          </a:prstGeom>
+          <a:solidFill>
+            <a:srgbClr val="FDFBF5"/>
+          </a:solidFill>
+          <a:ln w="12700">
+            <a:solidFill>
+              <a:srgbClr val="CBD9DD"/>
+            </a:solidFill>
+          </a:ln>
+        </p:spPr>
+        <p:style>
+          <a:lnRef idx="1">
+            <a:schemeClr val="accent1"/>
+          </a:lnRef>
+          <a:fillRef idx="3">
+            <a:schemeClr val="accent1"/>
+          </a:fillRef>
+          <a:effectRef idx="2">
+            <a:schemeClr val="accent1"/>
+          </a:effectRef>
+          <a:fontRef idx="minor">
+            <a:schemeClr val="lt1"/>
+          </a:fontRef>
+        </p:style>
+        <p:txBody>
+          <a:bodyPr rtlCol="0" anchor="ctr" wrap="square"/>
+          <a:lstStyle/>
+          <a:p>
+            <a:pPr algn="ctr" latinLnBrk="0"/>
+            <a:r>
+              <a:rPr sz="2500" b="1">
+                <a:solidFill>
+                  <a:srgbClr val="0E4D5E"/>
+                </a:solidFill>
+                <a:latin typeface="Segoe UI Semibold"/>
+              </a:rPr>
+              <a:t>0.162</a:t>
+            </a:r>
+          </a:p>
+          <a:p>
+            <a:pPr algn="ctr" latinLnBrk="0"/>
+            <a:r>
+              <a:rPr sz="1150" b="0">
+                <a:solidFill>
+                  <a:srgbClr val="6E6A60"/>
+                </a:solidFill>
+                <a:latin typeface="Segoe UI"/>
+              </a:rPr>
+              <a:t>Observed mean</a:t>
+            </a:r>
+          </a:p>
+        </p:txBody>
+      </p:sp>
+      <p:sp>
+        <p:nvSpPr>
+          <p:cNvPr id="7" name="Rounded Rectangle 6"/>
+          <p:cNvSpPr/>
+          <p:nvPr/>
+        </p:nvSpPr>
+        <p:spPr>
+          <a:xfrm>
+            <a:off x="3291840" y="1234440"/>
+            <a:ext cx="2651760" cy="1143000"/>
+          </a:xfrm>
+          <a:prstGeom prst="roundRect">
+            <a:avLst>
+              <a:gd name="adj" fmla="val 6000"/>
+            </a:avLst>
+          </a:prstGeom>
+          <a:solidFill>
+            <a:srgbClr val="FDFBF5"/>
+          </a:solidFill>
+          <a:ln w="12700">
+            <a:solidFill>
+              <a:srgbClr val="CBD9DD"/>
+            </a:solidFill>
+          </a:ln>
+        </p:spPr>
+        <p:style>
+          <a:lnRef idx="1">
+            <a:schemeClr val="accent1"/>
+          </a:lnRef>
+          <a:fillRef idx="3">
+            <a:schemeClr val="accent1"/>
+          </a:fillRef>
+          <a:effectRef idx="2">
+            <a:schemeClr val="accent1"/>
+          </a:effectRef>
+          <a:fontRef idx="minor">
+            <a:schemeClr val="lt1"/>
+          </a:fontRef>
+        </p:style>
+        <p:txBody>
+          <a:bodyPr rtlCol="0" anchor="ctr" wrap="square"/>
+          <a:lstStyle/>
+          <a:p>
+            <a:pPr algn="ctr" latinLnBrk="0"/>
+            <a:r>
+              <a:rPr sz="2500" b="1">
+                <a:solidFill>
+                  <a:srgbClr val="0E4D5E"/>
+                </a:solidFill>
+                <a:latin typeface="Segoe UI Semibold"/>
+              </a:rPr>
+              <a:t>0.155</a:t>
+            </a:r>
+          </a:p>
+          <a:p>
+            <a:pPr algn="ctr" latinLnBrk="0"/>
+            <a:r>
+              <a:rPr sz="1150" b="0">
+                <a:solidFill>
+                  <a:srgbClr val="6E6A60"/>
+                </a:solidFill>
+                <a:latin typeface="Segoe UI"/>
+              </a:rPr>
+              <a:t>Matched null</a:t>
+            </a:r>
+          </a:p>
+        </p:txBody>
+      </p:sp>
+      <p:sp>
+        <p:nvSpPr>
+          <p:cNvPr id="8" name="Rounded Rectangle 7"/>
+          <p:cNvSpPr/>
+          <p:nvPr/>
+        </p:nvSpPr>
+        <p:spPr>
+          <a:xfrm>
+            <a:off x="6080760" y="1234440"/>
+            <a:ext cx="2651760" cy="1143000"/>
+          </a:xfrm>
+          <a:prstGeom prst="roundRect">
+            <a:avLst>
+              <a:gd name="adj" fmla="val 6000"/>
+            </a:avLst>
+          </a:prstGeom>
+          <a:solidFill>
+            <a:srgbClr val="FDFBF5"/>
+          </a:solidFill>
+          <a:ln w="12700">
+            <a:solidFill>
+              <a:srgbClr val="CBD9DD"/>
+            </a:solidFill>
+          </a:ln>
+        </p:spPr>
+        <p:style>
+          <a:lnRef idx="1">
+            <a:schemeClr val="accent1"/>
+          </a:lnRef>
+          <a:fillRef idx="3">
+            <a:schemeClr val="accent1"/>
+          </a:fillRef>
+          <a:effectRef idx="2">
+            <a:schemeClr val="accent1"/>
+          </a:effectRef>
+          <a:fontRef idx="minor">
+            <a:schemeClr val="lt1"/>
+          </a:fontRef>
+        </p:style>
+        <p:txBody>
+          <a:bodyPr rtlCol="0" anchor="ctr" wrap="square"/>
+          <a:lstStyle/>
+          <a:p>
+            <a:pPr algn="ctr" latinLnBrk="0"/>
+            <a:r>
+              <a:rPr sz="2500" b="1">
+                <a:solidFill>
+                  <a:srgbClr val="0E4D5E"/>
+                </a:solidFill>
+                <a:latin typeface="Segoe UI Semibold"/>
+              </a:rPr>
+              <a:t>1/5 - 1/3</a:t>
+            </a:r>
+          </a:p>
+          <a:p>
+            <a:pPr algn="ctr" latinLnBrk="0"/>
+            <a:r>
+              <a:rPr sz="1150" b="0">
+                <a:solidFill>
+                  <a:srgbClr val="6E6A60"/>
+                </a:solidFill>
+                <a:latin typeface="Segoe UI"/>
+              </a:rPr>
+              <a:t>Dagstuhl - ESMUC</a:t>
+            </a:r>
+          </a:p>
+        </p:txBody>
+      </p:sp>
+      <p:sp>
+        <p:nvSpPr>
+          <p:cNvPr id="9" name="Rounded Rectangle 8"/>
+          <p:cNvSpPr/>
+          <p:nvPr/>
+        </p:nvSpPr>
+        <p:spPr>
+          <a:xfrm>
+            <a:off x="8869680" y="1234440"/>
+            <a:ext cx="2651760" cy="1143000"/>
+          </a:xfrm>
+          <a:prstGeom prst="roundRect">
+            <a:avLst>
+              <a:gd name="adj" fmla="val 6000"/>
+            </a:avLst>
+          </a:prstGeom>
+          <a:solidFill>
+            <a:srgbClr val="FDFBF5"/>
+          </a:solidFill>
+          <a:ln w="12700">
+            <a:solidFill>
+              <a:srgbClr val="CBD9DD"/>
+            </a:solidFill>
+          </a:ln>
+        </p:spPr>
+        <p:style>
+          <a:lnRef idx="1">
+            <a:schemeClr val="accent1"/>
+          </a:lnRef>
+          <a:fillRef idx="3">
+            <a:schemeClr val="accent1"/>
+          </a:fillRef>
+          <a:effectRef idx="2">
+            <a:schemeClr val="accent1"/>
+          </a:effectRef>
+          <a:fontRef idx="minor">
+            <a:schemeClr val="lt1"/>
+          </a:fontRef>
+        </p:style>
+        <p:txBody>
+          <a:bodyPr rtlCol="0" anchor="ctr" wrap="square"/>
+          <a:lstStyle/>
+          <a:p>
+            <a:pPr algn="ctr" latinLnBrk="0"/>
+            <a:r>
+              <a:rPr sz="2500" b="1">
+                <a:solidFill>
+                  <a:srgbClr val="0E4D5E"/>
+                </a:solidFill>
+                <a:latin typeface="Segoe UI Semibold"/>
+              </a:rPr>
+              <a:t>0/20</a:t>
+            </a:r>
+          </a:p>
+          <a:p>
+            <a:pPr algn="ctr" latinLnBrk="0"/>
+            <a:r>
+              <a:rPr sz="1150" b="0">
+                <a:solidFill>
+                  <a:srgbClr val="6E6A60"/>
+                </a:solidFill>
+                <a:latin typeface="Segoe UI"/>
+              </a:rPr>
+              <a:t>ChoralSynth</a:t>
+            </a:r>
+          </a:p>
+        </p:txBody>
+      </p:sp>
       <p:pic>
         <p:nvPicPr>
-          <p:cNvPr id="6" name="Picture 5" descr="wp4_dashboard_realdata.png"/>
+          <p:cNvPr id="10" name="Picture 9" descr="wp3_flagship_LI_QuartetA_Take02_standard.png"/>
           <p:cNvPicPr>
             <a:picLocks noChangeAspect="1"/>
           </p:cNvPicPr>
@@ -4006,8 +4319,8 @@
         </p:blipFill>
         <p:spPr>
           <a:xfrm>
-            <a:off x="3678635" y="1371600"/>
-            <a:ext cx="4834425" cy="4480560"/>
+            <a:off x="4389745" y="2606040"/>
+            <a:ext cx="3412204" cy="3154680"/>
           </a:xfrm>
           <a:prstGeom prst="rect">
             <a:avLst/>
@@ -4016,7 +4329,7 @@
       </p:pic>
       <p:sp>
         <p:nvSpPr>
-          <p:cNvPr id="7" name="Rounded Rectangle 6"/>
+          <p:cNvPr id="11" name="Rounded Rectangle 10"/>
           <p:cNvSpPr/>
           <p:nvPr/>
         </p:nvSpPr>
@@ -4063,7 +4376,7 @@
                 </a:solidFill>
                 <a:latin typeface="Segoe UI Semibold"/>
               </a:rPr>
-              <a:t>Backup frame in case the live demo cannot run; same content, one frame.</a:t>
+              <a:t>Two human pieces are significant; corpus-level evidence is not significant.</a:t>
             </a:r>
           </a:p>
         </p:txBody>
@@ -4128,7 +4441,7 @@
                 </a:solidFill>
                 <a:latin typeface="Segoe UI Semibold"/>
               </a:rPr>
-              <a:t>LIMITS</a:t>
+              <a:t>RESULT</a:t>
             </a:r>
           </a:p>
         </p:txBody>
@@ -4167,7 +4480,7 @@
                 </a:solidFill>
                 <a:latin typeface="Segoe UI Semibold"/>
               </a:rPr>
-              <a:t>Limitations, stated plainly</a:t>
+              <a:t>H3: an informative exploratory null</a:t>
             </a:r>
           </a:p>
         </p:txBody>
@@ -4206,7 +4519,7 @@
                 </a:solidFill>
                 <a:latin typeface="Segoe UI"/>
               </a:rPr>
-              <a:t>12 / 15</a:t>
+              <a:t>12 / 19</a:t>
             </a:r>
           </a:p>
         </p:txBody>
@@ -4258,12 +4571,12 @@
         </p:nvSpPr>
         <p:spPr>
           <a:xfrm>
-            <a:off x="502920" y="1325880"/>
-            <a:ext cx="11185855" cy="786384"/>
+            <a:off x="502920" y="1234440"/>
+            <a:ext cx="3611880" cy="1143000"/>
           </a:xfrm>
           <a:prstGeom prst="roundRect">
             <a:avLst>
-              <a:gd name="adj" fmla="val 4000"/>
+              <a:gd name="adj" fmla="val 6000"/>
             </a:avLst>
           </a:prstGeom>
           <a:solidFill>
@@ -4290,38 +4603,30 @@
           </a:fontRef>
         </p:style>
         <p:txBody>
-          <a:bodyPr rtlCol="0" anchor="t" wrap="square" lIns="201168" rIns="201168" tIns="146304"/>
-          <a:lstStyle/>
-          <a:p>
-            <a:pPr algn="l" latinLnBrk="0">
-              <a:spcAft>
-                <a:spcPts val="600"/>
-              </a:spcAft>
-            </a:pPr>
-            <a:r>
-              <a:rPr sz="1400" b="1">
+          <a:bodyPr rtlCol="0" anchor="ctr" wrap="square"/>
+          <a:lstStyle/>
+          <a:p>
+            <a:pPr algn="ctr" latinLnBrk="0"/>
+            <a:r>
+              <a:rPr sz="2500" b="1">
                 <a:solidFill>
                   <a:srgbClr val="0E4D5E"/>
                 </a:solidFill>
                 <a:latin typeface="Segoe UI Semibold"/>
               </a:rPr>
-              <a:t>Simulated latency</a:t>
-            </a:r>
-          </a:p>
-          <a:p>
-            <a:pPr algn="l" latinLnBrk="0">
-              <a:spcAft>
-                <a:spcPts val="400"/>
-              </a:spcAft>
-            </a:pPr>
-            <a:r>
-              <a:rPr sz="1250" b="0">
-                <a:solidFill>
-                  <a:srgbClr val="24262E"/>
+              <a:t>17 / 18</a:t>
+            </a:r>
+          </a:p>
+          <a:p>
+            <a:pPr algn="ctr" latinLnBrk="0"/>
+            <a:r>
+              <a:rPr sz="1150" b="0">
+                <a:solidFill>
+                  <a:srgbClr val="6E6A60"/>
                 </a:solidFill>
                 <a:latin typeface="Segoe UI"/>
               </a:rPr>
-              <a:t>Injection models transmission, not live behavioural adaptation of singers.</a:t>
+              <a:t>videos analyzable</a:t>
             </a:r>
           </a:p>
         </p:txBody>
@@ -4334,12 +4639,12 @@
         </p:nvSpPr>
         <p:spPr>
           <a:xfrm>
-            <a:off x="502920" y="2231136"/>
-            <a:ext cx="11185855" cy="786384"/>
+            <a:off x="4251959" y="1234440"/>
+            <a:ext cx="3611880" cy="1143000"/>
           </a:xfrm>
           <a:prstGeom prst="roundRect">
             <a:avLst>
-              <a:gd name="adj" fmla="val 4000"/>
+              <a:gd name="adj" fmla="val 6000"/>
             </a:avLst>
           </a:prstGeom>
           <a:solidFill>
@@ -4366,38 +4671,30 @@
           </a:fontRef>
         </p:style>
         <p:txBody>
-          <a:bodyPr rtlCol="0" anchor="t" wrap="square" lIns="201168" rIns="201168" tIns="146304"/>
-          <a:lstStyle/>
-          <a:p>
-            <a:pPr algn="l" latinLnBrk="0">
-              <a:spcAft>
-                <a:spcPts val="600"/>
-              </a:spcAft>
-            </a:pPr>
-            <a:r>
-              <a:rPr sz="1400" b="1">
+          <a:bodyPr rtlCol="0" anchor="ctr" wrap="square"/>
+          <a:lstStyle/>
+          <a:p>
+            <a:pPr algn="ctr" latinLnBrk="0"/>
+            <a:r>
+              <a:rPr sz="2500" b="1">
                 <a:solidFill>
                   <a:srgbClr val="0E4D5E"/>
                 </a:solidFill>
                 <a:latin typeface="Segoe UI Semibold"/>
               </a:rPr>
-              <a:t>Signal split</a:t>
-            </a:r>
-          </a:p>
-          <a:p>
-            <a:pPr algn="l" latinLnBrk="0">
-              <a:spcAft>
-                <a:spcPts val="400"/>
-              </a:spcAft>
-            </a:pPr>
-            <a:r>
-              <a:rPr sz="1250" b="0">
-                <a:solidFill>
-                  <a:srgbClr val="24262E"/>
+              <a:t>1 / 17</a:t>
+            </a:r>
+          </a:p>
+          <a:p>
+            <a:pPr algn="ctr" latinLnBrk="0"/>
+            <a:r>
+              <a:rPr sz="1150" b="0">
+                <a:solidFill>
+                  <a:srgbClr val="6E6A60"/>
                 </a:solidFill>
                 <a:latin typeface="Segoe UI"/>
               </a:rPr>
-              <a:t>No piece carries audio + video + network together; full E(t) has never run with all three channels.</a:t>
+              <a:t>significant, consistent with chance</a:t>
             </a:r>
           </a:p>
         </p:txBody>
@@ -4410,12 +4707,12 @@
         </p:nvSpPr>
         <p:spPr>
           <a:xfrm>
-            <a:off x="502920" y="3136392"/>
-            <a:ext cx="11185855" cy="786384"/>
+            <a:off x="8000998" y="1234440"/>
+            <a:ext cx="3611880" cy="1143000"/>
           </a:xfrm>
           <a:prstGeom prst="roundRect">
             <a:avLst>
-              <a:gd name="adj" fmla="val 4000"/>
+              <a:gd name="adj" fmla="val 6000"/>
             </a:avLst>
           </a:prstGeom>
           <a:solidFill>
@@ -4442,52 +4739,68 @@
           </a:fontRef>
         </p:style>
         <p:txBody>
-          <a:bodyPr rtlCol="0" anchor="t" wrap="square" lIns="201168" rIns="201168" tIns="146304"/>
-          <a:lstStyle/>
-          <a:p>
-            <a:pPr algn="l" latinLnBrk="0">
-              <a:spcAft>
-                <a:spcPts val="600"/>
-              </a:spcAft>
-            </a:pPr>
-            <a:r>
-              <a:rPr sz="1400" b="1">
+          <a:bodyPr rtlCol="0" anchor="ctr" wrap="square"/>
+          <a:lstStyle/>
+          <a:p>
+            <a:pPr algn="ctr" latinLnBrk="0"/>
+            <a:r>
+              <a:rPr sz="2500" b="1">
                 <a:solidFill>
                   <a:srgbClr val="0E4D5E"/>
                 </a:solidFill>
                 <a:latin typeface="Segoe UI Semibold"/>
               </a:rPr>
-              <a:t>H3 window</a:t>
-            </a:r>
-          </a:p>
-          <a:p>
-            <a:pPr algn="l" latinLnBrk="0">
-              <a:spcAft>
-                <a:spcPts val="400"/>
-              </a:spcAft>
-            </a:pPr>
-            <a:r>
-              <a:rPr sz="1250" b="0">
-                <a:solidFill>
-                  <a:srgbClr val="24262E"/>
+              <a:t>0.068</a:t>
+            </a:r>
+          </a:p>
+          <a:p>
+            <a:pPr algn="ctr" latinLnBrk="0"/>
+            <a:r>
+              <a:rPr sz="1150" b="0">
+                <a:solidFill>
+                  <a:srgbClr val="6E6A60"/>
                 </a:solidFill>
                 <a:latin typeface="Segoe UI"/>
               </a:rPr>
-              <a:t>Pose covers one tracked stream over each video's first minute.</a:t>
-            </a:r>
-          </a:p>
-        </p:txBody>
-      </p:sp>
-      <p:sp>
-        <p:nvSpPr>
-          <p:cNvPr id="9" name="Rounded Rectangle 8"/>
+              <a:t>median maximum-lag r</a:t>
+            </a:r>
+          </a:p>
+        </p:txBody>
+      </p:sp>
+      <p:pic>
+        <p:nvPicPr>
+          <p:cNvPr id="9" name="Picture 8" descr="h3_visual_onset.png"/>
+          <p:cNvPicPr>
+            <a:picLocks noChangeAspect="1"/>
+          </p:cNvPicPr>
+          <p:nvPr/>
+        </p:nvPicPr>
+        <p:blipFill>
+          <a:blip r:embed="rId2"/>
+          <a:stretch>
+            <a:fillRect/>
+          </a:stretch>
+        </p:blipFill>
+        <p:spPr>
+          <a:xfrm>
+            <a:off x="1798865" y="2606040"/>
+            <a:ext cx="4128949" cy="3200400"/>
+          </a:xfrm>
+          <a:prstGeom prst="rect">
+            <a:avLst/>
+          </a:prstGeom>
+        </p:spPr>
+      </p:pic>
+      <p:sp>
+        <p:nvSpPr>
+          <p:cNvPr id="10" name="Rounded Rectangle 9"/>
           <p:cNvSpPr/>
           <p:nvPr/>
         </p:nvSpPr>
         <p:spPr>
           <a:xfrm>
-            <a:off x="502920" y="4041648"/>
-            <a:ext cx="11185855" cy="786384"/>
+            <a:off x="7452360" y="2697480"/>
+            <a:ext cx="4160520" cy="2926080"/>
           </a:xfrm>
           <a:prstGeom prst="roundRect">
             <a:avLst>
@@ -4533,7 +4846,7 @@
                 </a:solidFill>
                 <a:latin typeface="Segoe UI Semibold"/>
               </a:rPr>
-              <a:t>Null caveats</a:t>
+              <a:t>What was tested</a:t>
             </a:r>
           </a:p>
           <a:p>
@@ -4543,89 +4856,13 @@
               </a:spcAft>
             </a:pPr>
             <a:r>
-              <a:rPr sz="1250" b="0">
+              <a:rPr sz="1320" b="0">
                 <a:solidFill>
                   <a:srgbClr val="24262E"/>
                 </a:solidFill>
                 <a:latin typeface="Segoe UI"/>
               </a:rPr>
-              <a:t>A minority of individual grid cells are not significant; corpus-level trends carry the claims.</a:t>
-            </a:r>
-          </a:p>
-        </p:txBody>
-      </p:sp>
-      <p:sp>
-        <p:nvSpPr>
-          <p:cNvPr id="10" name="Rounded Rectangle 9"/>
-          <p:cNvSpPr/>
-          <p:nvPr/>
-        </p:nvSpPr>
-        <p:spPr>
-          <a:xfrm>
-            <a:off x="502920" y="4946904"/>
-            <a:ext cx="11185855" cy="786384"/>
-          </a:xfrm>
-          <a:prstGeom prst="roundRect">
-            <a:avLst>
-              <a:gd name="adj" fmla="val 4000"/>
-            </a:avLst>
-          </a:prstGeom>
-          <a:solidFill>
-            <a:srgbClr val="FDFBF5"/>
-          </a:solidFill>
-          <a:ln w="12700">
-            <a:solidFill>
-              <a:srgbClr val="CBD9DD"/>
-            </a:solidFill>
-          </a:ln>
-        </p:spPr>
-        <p:style>
-          <a:lnRef idx="1">
-            <a:schemeClr val="accent1"/>
-          </a:lnRef>
-          <a:fillRef idx="3">
-            <a:schemeClr val="accent1"/>
-          </a:fillRef>
-          <a:effectRef idx="2">
-            <a:schemeClr val="accent1"/>
-          </a:effectRef>
-          <a:fontRef idx="minor">
-            <a:schemeClr val="lt1"/>
-          </a:fontRef>
-        </p:style>
-        <p:txBody>
-          <a:bodyPr rtlCol="0" anchor="t" wrap="square" lIns="201168" rIns="201168" tIns="146304"/>
-          <a:lstStyle/>
-          <a:p>
-            <a:pPr algn="l" latinLnBrk="0">
-              <a:spcAft>
-                <a:spcPts val="600"/>
-              </a:spcAft>
-            </a:pPr>
-            <a:r>
-              <a:rPr sz="1400" b="1">
-                <a:solidFill>
-                  <a:srgbClr val="0E4D5E"/>
-                </a:solidFill>
-                <a:latin typeface="Segoe UI Semibold"/>
-              </a:rPr>
-              <a:t>Domain transfer</a:t>
-            </a:r>
-          </a:p>
-          <a:p>
-            <a:pPr algn="l" latinLnBrk="0">
-              <a:spcAft>
-                <a:spcPts val="400"/>
-              </a:spcAft>
-            </a:pPr>
-            <a:r>
-              <a:rPr sz="1250" b="0">
-                <a:solidFill>
-                  <a:srgbClr val="24262E"/>
-                </a:solidFill>
-                <a:latin typeface="Segoe UI"/>
-              </a:rPr>
-              <a:t>The entanglement formula was validated on email networks; this is its first music-domain test.</a:t>
+              <a:t>Maximum signed correlation within 2 s over the first 60-72 s pose window, with 1,000 circular-shift nulls. Full H3 still needs synchronized per-singer audio and video.</a:t>
             </a:r>
           </a:p>
         </p:txBody>
@@ -4679,7 +4916,7 @@
                 </a:solidFill>
                 <a:latin typeface="Segoe UI Semibold"/>
               </a:rPr>
-              <a:t>Registered, owned, and either mitigated or explicitly left as future work.</a:t>
+              <a:t>The mixed-audio substitute is null; the paired-data requirement is demonstrated.</a:t>
             </a:r>
           </a:p>
         </p:txBody>
@@ -4744,7 +4981,7 @@
                 </a:solidFill>
                 <a:latin typeface="Segoe UI Semibold"/>
               </a:rPr>
-              <a:t>CLOSE</a:t>
+              <a:t>DEMO</a:t>
             </a:r>
           </a:p>
         </p:txBody>
@@ -4783,7 +5020,7 @@
                 </a:solidFill>
                 <a:latin typeface="Segoe UI Semibold"/>
               </a:rPr>
-              <a:t>Contributions</a:t>
+              <a:t>Live dashboard demonstration - 60 seconds</a:t>
             </a:r>
           </a:p>
         </p:txBody>
@@ -4822,7 +5059,7 @@
                 </a:solidFill>
                 <a:latin typeface="Segoe UI"/>
               </a:rPr>
-              <a:t>13 / 15</a:t>
+              <a:t>13 / 19</a:t>
             </a:r>
           </a:p>
         </p:txBody>
@@ -4874,8 +5111,8 @@
         </p:nvSpPr>
         <p:spPr>
           <a:xfrm>
-            <a:off x="502920" y="1371600"/>
-            <a:ext cx="11185855" cy="896112"/>
+            <a:off x="502920" y="1508760"/>
+            <a:ext cx="11185855" cy="1005840"/>
           </a:xfrm>
           <a:prstGeom prst="roundRect">
             <a:avLst>
@@ -4921,7 +5158,7 @@
                 </a:solidFill>
                 <a:latin typeface="Segoe UI Semibold"/>
               </a:rPr>
-              <a:t>Latency signature</a:t>
+              <a:t>1. Audio and network</a:t>
             </a:r>
           </a:p>
           <a:p>
@@ -4931,13 +5168,13 @@
               </a:spcAft>
             </a:pPr>
             <a:r>
-              <a:rPr sz="1350" b="0">
+              <a:rPr sz="1400" b="0">
                 <a:solidFill>
                   <a:srgbClr val="24262E"/>
                 </a:solidFill>
                 <a:latin typeface="Segoe UI"/>
               </a:rPr>
-              <a:t>Timing collapses 56 to 75 percent while loudness holds; 28/28 pieces decrease (paired p = 3.73 x 10^-9).</a:t>
+              <a:t>Dagstuhl piece: E(t) timeline and influence graph.</a:t>
             </a:r>
           </a:p>
         </p:txBody>
@@ -4950,8 +5187,8 @@
         </p:nvSpPr>
         <p:spPr>
           <a:xfrm>
-            <a:off x="502920" y="2404871"/>
-            <a:ext cx="11185855" cy="896112"/>
+            <a:off x="502920" y="2715768"/>
+            <a:ext cx="11185855" cy="1005840"/>
           </a:xfrm>
           <a:prstGeom prst="roundRect">
             <a:avLst>
@@ -4997,7 +5234,7 @@
                 </a:solidFill>
                 <a:latin typeface="Segoe UI Semibold"/>
               </a:rPr>
-              <a:t>Leadership measure</a:t>
+              <a:t>2. Video and pose</a:t>
             </a:r>
           </a:p>
           <a:p>
@@ -5007,13 +5244,13 @@
               </a:spcAft>
             </a:pPr>
             <a:r>
-              <a:rPr sz="1350" b="0">
+              <a:rPr sz="1400" b="0">
                 <a:solidFill>
                   <a:srgbClr val="24262E"/>
                 </a:solidFill>
                 <a:latin typeface="Segoe UI"/>
               </a:rPr>
-              <a:t>Limited evidence in two human pieces and none of 20 synthetic pieces.</a:t>
+              <a:t>Tier-1 video: playback with pose overlay.</a:t>
             </a:r>
           </a:p>
         </p:txBody>
@@ -5026,8 +5263,8 @@
         </p:nvSpPr>
         <p:spPr>
           <a:xfrm>
-            <a:off x="502920" y="3438142"/>
-            <a:ext cx="11185855" cy="896112"/>
+            <a:off x="502920" y="3922776"/>
+            <a:ext cx="11185855" cy="1005840"/>
           </a:xfrm>
           <a:prstGeom prst="roundRect">
             <a:avLst>
@@ -5073,7 +5310,7 @@
                 </a:solidFill>
                 <a:latin typeface="Segoe UI Semibold"/>
               </a:rPr>
-              <a:t>Visual requirement</a:t>
+              <a:t>3. Signal availability</a:t>
             </a:r>
           </a:p>
           <a:p>
@@ -5083,13 +5320,13 @@
               </a:spcAft>
             </a:pPr>
             <a:r>
-              <a:rPr sz="1350" b="0">
+              <a:rPr sz="1400" b="0">
                 <a:solidFill>
                   <a:srgbClr val="24262E"/>
                 </a:solidFill>
                 <a:latin typeface="Segoe UI"/>
               </a:rPr>
-              <a:t>The first visual-onset experiment, honestly null: the paired-corpus requirement is demonstrated, not assumed.</a:t>
+              <a:t>Metadata shows which channels each piece actually contains.</a:t>
             </a:r>
           </a:p>
         </p:txBody>
@@ -5097,82 +5334,6 @@
       <p:sp>
         <p:nvSpPr>
           <p:cNvPr id="9" name="Rounded Rectangle 8"/>
-          <p:cNvSpPr/>
-          <p:nvPr/>
-        </p:nvSpPr>
-        <p:spPr>
-          <a:xfrm>
-            <a:off x="502920" y="4471413"/>
-            <a:ext cx="11185855" cy="896112"/>
-          </a:xfrm>
-          <a:prstGeom prst="roundRect">
-            <a:avLst>
-              <a:gd name="adj" fmla="val 4000"/>
-            </a:avLst>
-          </a:prstGeom>
-          <a:solidFill>
-            <a:srgbClr val="FDFBF5"/>
-          </a:solidFill>
-          <a:ln w="12700">
-            <a:solidFill>
-              <a:srgbClr val="CBD9DD"/>
-            </a:solidFill>
-          </a:ln>
-        </p:spPr>
-        <p:style>
-          <a:lnRef idx="1">
-            <a:schemeClr val="accent1"/>
-          </a:lnRef>
-          <a:fillRef idx="3">
-            <a:schemeClr val="accent1"/>
-          </a:fillRef>
-          <a:effectRef idx="2">
-            <a:schemeClr val="accent1"/>
-          </a:effectRef>
-          <a:fontRef idx="minor">
-            <a:schemeClr val="lt1"/>
-          </a:fontRef>
-        </p:style>
-        <p:txBody>
-          <a:bodyPr rtlCol="0" anchor="t" wrap="square" lIns="201168" rIns="201168" tIns="146304"/>
-          <a:lstStyle/>
-          <a:p>
-            <a:pPr algn="l" latinLnBrk="0">
-              <a:spcAft>
-                <a:spcPts val="600"/>
-              </a:spcAft>
-            </a:pPr>
-            <a:r>
-              <a:rPr sz="1400" b="1">
-                <a:solidFill>
-                  <a:srgbClr val="0E4D5E"/>
-                </a:solidFill>
-                <a:latin typeface="Segoe UI Semibold"/>
-              </a:rPr>
-              <a:t>Open pipeline</a:t>
-            </a:r>
-          </a:p>
-          <a:p>
-            <a:pPr algn="l" latinLnBrk="0">
-              <a:spcAft>
-                <a:spcPts val="400"/>
-              </a:spcAft>
-            </a:pPr>
-            <a:r>
-              <a:rPr sz="1350" b="0">
-                <a:solidFill>
-                  <a:srgbClr val="24262E"/>
-                </a:solidFill>
-                <a:latin typeface="Segoe UI"/>
-              </a:rPr>
-              <a:t>One command, 48 tests, cluster-validated protocol, every report claim traceable to a committed artifact.</a:t>
-            </a:r>
-          </a:p>
-        </p:txBody>
-      </p:sp>
-      <p:sp>
-        <p:nvSpPr>
-          <p:cNvPr id="10" name="Rounded Rectangle 9"/>
           <p:cNvSpPr/>
           <p:nvPr/>
         </p:nvSpPr>
@@ -5219,7 +5380,7 @@
                 </a:solidFill>
                 <a:latin typeface="Segoe UI Semibold"/>
               </a:rPr>
-              <a:t>Supported, partially supported, honestly null, and all reproducible.</a:t>
+              <a:t>The dashboard uses the same envelope-only E(t) definition as the report.</a:t>
             </a:r>
           </a:p>
         </p:txBody>
@@ -5284,7 +5445,7 @@
                 </a:solidFill>
                 <a:latin typeface="Segoe UI Semibold"/>
               </a:rPr>
-              <a:t>NEXT</a:t>
+              <a:t>LIMITS</a:t>
             </a:r>
           </a:p>
         </p:txBody>
@@ -5323,7 +5484,7 @@
                 </a:solidFill>
                 <a:latin typeface="Segoe UI Semibold"/>
               </a:rPr>
-              <a:t>What comes next, and thanks</a:t>
+              <a:t>Weaknesses of the current evidence</a:t>
             </a:r>
           </a:p>
         </p:txBody>
@@ -5362,7 +5523,7 @@
                 </a:solidFill>
                 <a:latin typeface="Segoe UI"/>
               </a:rPr>
-              <a:t>14 / 15</a:t>
+              <a:t>14 / 19</a:t>
             </a:r>
           </a:p>
         </p:txBody>
@@ -5414,8 +5575,8 @@
         </p:nvSpPr>
         <p:spPr>
           <a:xfrm>
-            <a:off x="502920" y="1463040"/>
-            <a:ext cx="11185855" cy="914400"/>
+            <a:off x="502920" y="1234440"/>
+            <a:ext cx="11185855" cy="777240"/>
           </a:xfrm>
           <a:prstGeom prst="roundRect">
             <a:avLst>
@@ -5461,7 +5622,7 @@
                 </a:solidFill>
                 <a:latin typeface="Segoe UI Semibold"/>
               </a:rPr>
-              <a:t>Real latency sessions</a:t>
+              <a:t>Simulated latency</a:t>
             </a:r>
           </a:p>
           <a:p>
@@ -5471,13 +5632,13 @@
               </a:spcAft>
             </a:pPr>
             <a:r>
-              <a:rPr sz="1400" b="0">
+              <a:rPr sz="1250" b="0">
                 <a:solidFill>
                   <a:srgbClr val="24262E"/>
                 </a:solidFill>
                 <a:latin typeface="Segoe UI"/>
               </a:rPr>
-              <a:t>Record live latency-varied sessions: the only way to test H1 without simulation and H2's latency form.</a:t>
+              <a:t>Models transmission, not live singer adaptation.</a:t>
             </a:r>
           </a:p>
         </p:txBody>
@@ -5490,8 +5651,8 @@
         </p:nvSpPr>
         <p:spPr>
           <a:xfrm>
-            <a:off x="502920" y="2514600"/>
-            <a:ext cx="11185855" cy="914400"/>
+            <a:off x="502920" y="2121408"/>
+            <a:ext cx="11185855" cy="777240"/>
           </a:xfrm>
           <a:prstGeom prst="roundRect">
             <a:avLst>
@@ -5537,7 +5698,7 @@
                 </a:solidFill>
                 <a:latin typeface="Segoe UI Semibold"/>
               </a:rPr>
-              <a:t>Paired corpus</a:t>
+              <a:t>Co-varying regimes</a:t>
             </a:r>
           </a:p>
           <a:p>
@@ -5547,13 +5708,13 @@
               </a:spcAft>
             </a:pPr>
             <a:r>
-              <a:rPr sz="1400" b="0">
+              <a:rPr sz="1250" b="0">
                 <a:solidFill>
                   <a:srgbClr val="24262E"/>
                 </a:solidFill>
                 <a:latin typeface="Segoe UI"/>
               </a:rPr>
-              <a:t>A small per-singer audio + video corpus unlocks the H3 test.</a:t>
+              <a:t>Delay, jitter, and dropout change together; individual effects are not isolated.</a:t>
             </a:r>
           </a:p>
         </p:txBody>
@@ -5566,8 +5727,8 @@
         </p:nvSpPr>
         <p:spPr>
           <a:xfrm>
-            <a:off x="502920" y="3566160"/>
-            <a:ext cx="11185855" cy="914400"/>
+            <a:off x="502920" y="3008376"/>
+            <a:ext cx="11185855" cy="777240"/>
           </a:xfrm>
           <a:prstGeom prst="roundRect">
             <a:avLst>
@@ -5613,7 +5774,7 @@
                 </a:solidFill>
                 <a:latin typeface="Segoe UI Semibold"/>
               </a:rPr>
-              <a:t>Report</a:t>
+              <a:t>Multimodal gap</a:t>
             </a:r>
           </a:p>
           <a:p>
@@ -5623,52 +5784,165 @@
               </a:spcAft>
             </a:pPr>
             <a:r>
-              <a:rPr sz="1400" b="0">
+              <a:rPr sz="1250" b="0">
                 <a:solidFill>
                   <a:srgbClr val="24262E"/>
                 </a:solidFill>
                 <a:latin typeface="Segoe UI"/>
               </a:rPr>
-              <a:t>Final report ready as Markdown and a 10-page PDF.</a:t>
-            </a:r>
-          </a:p>
-        </p:txBody>
-      </p:sp>
-      <p:sp>
-        <p:nvSpPr>
-          <p:cNvPr id="9" name="TextBox 8"/>
-          <p:cNvSpPr txBox="1"/>
-          <p:nvPr/>
-        </p:nvSpPr>
-        <p:spPr>
-          <a:xfrm>
-            <a:off x="502920" y="4892040"/>
-            <a:ext cx="11185855" cy="548640"/>
-          </a:xfrm>
-          <a:prstGeom prst="rect">
-            <a:avLst/>
-          </a:prstGeom>
-          <a:noFill/>
-        </p:spPr>
-        <p:txBody>
-          <a:bodyPr wrap="square" anchor="t" lIns="27432" rIns="27432" tIns="18288" bIns="18288">
-            <a:spAutoFit/>
-          </a:bodyPr>
-          <a:lstStyle/>
-          <a:p>
-            <a:pPr algn="ctr" latinLnBrk="0">
-              <a:lnSpc>
-                <a:spcPct val="100000"/>
-              </a:lnSpc>
-            </a:pPr>
-            <a:r>
-              <a:rPr sz="2200" b="1">
+              <a:t>No synchronized per-singer audio and video item exists.</a:t>
+            </a:r>
+          </a:p>
+        </p:txBody>
+      </p:sp>
+      <p:sp>
+        <p:nvSpPr>
+          <p:cNvPr id="9" name="Rounded Rectangle 8"/>
+          <p:cNvSpPr/>
+          <p:nvPr/>
+        </p:nvSpPr>
+        <p:spPr>
+          <a:xfrm>
+            <a:off x="502920" y="3895344"/>
+            <a:ext cx="11185855" cy="777240"/>
+          </a:xfrm>
+          <a:prstGeom prst="roundRect">
+            <a:avLst>
+              <a:gd name="adj" fmla="val 4000"/>
+            </a:avLst>
+          </a:prstGeom>
+          <a:solidFill>
+            <a:srgbClr val="FDFBF5"/>
+          </a:solidFill>
+          <a:ln w="12700">
+            <a:solidFill>
+              <a:srgbClr val="CBD9DD"/>
+            </a:solidFill>
+          </a:ln>
+        </p:spPr>
+        <p:style>
+          <a:lnRef idx="1">
+            <a:schemeClr val="accent1"/>
+          </a:lnRef>
+          <a:fillRef idx="3">
+            <a:schemeClr val="accent1"/>
+          </a:fillRef>
+          <a:effectRef idx="2">
+            <a:schemeClr val="accent1"/>
+          </a:effectRef>
+          <a:fontRef idx="minor">
+            <a:schemeClr val="lt1"/>
+          </a:fontRef>
+        </p:style>
+        <p:txBody>
+          <a:bodyPr rtlCol="0" anchor="t" wrap="square" lIns="201168" rIns="201168" tIns="146304"/>
+          <a:lstStyle/>
+          <a:p>
+            <a:pPr algn="l" latinLnBrk="0">
+              <a:spcAft>
+                <a:spcPts val="600"/>
+              </a:spcAft>
+            </a:pPr>
+            <a:r>
+              <a:rPr sz="1400" b="1">
                 <a:solidFill>
                   <a:srgbClr val="0E4D5E"/>
                 </a:solidFill>
+                <a:latin typeface="Segoe UI Semibold"/>
+              </a:rPr>
+              <a:t>H2 strength</a:t>
+            </a:r>
+          </a:p>
+          <a:p>
+            <a:pPr algn="l" latinLnBrk="0">
+              <a:spcAft>
+                <a:spcPts val="400"/>
+              </a:spcAft>
+            </a:pPr>
+            <a:r>
+              <a:rPr sz="1250" b="0">
+                <a:solidFill>
+                  <a:srgbClr val="24262E"/>
+                </a:solidFill>
                 <a:latin typeface="Segoe UI"/>
               </a:rPr>
-              <a:t>Thank you. Questions welcome.</a:t>
+              <a:t>Two individual results, but no corpus-level significance.</a:t>
+            </a:r>
+          </a:p>
+        </p:txBody>
+      </p:sp>
+      <p:sp>
+        <p:nvSpPr>
+          <p:cNvPr id="10" name="Rounded Rectangle 9"/>
+          <p:cNvSpPr/>
+          <p:nvPr/>
+        </p:nvSpPr>
+        <p:spPr>
+          <a:xfrm>
+            <a:off x="502920" y="4782312"/>
+            <a:ext cx="11185855" cy="777240"/>
+          </a:xfrm>
+          <a:prstGeom prst="roundRect">
+            <a:avLst>
+              <a:gd name="adj" fmla="val 4000"/>
+            </a:avLst>
+          </a:prstGeom>
+          <a:solidFill>
+            <a:srgbClr val="FDFBF5"/>
+          </a:solidFill>
+          <a:ln w="12700">
+            <a:solidFill>
+              <a:srgbClr val="CBD9DD"/>
+            </a:solidFill>
+          </a:ln>
+        </p:spPr>
+        <p:style>
+          <a:lnRef idx="1">
+            <a:schemeClr val="accent1"/>
+          </a:lnRef>
+          <a:fillRef idx="3">
+            <a:schemeClr val="accent1"/>
+          </a:fillRef>
+          <a:effectRef idx="2">
+            <a:schemeClr val="accent1"/>
+          </a:effectRef>
+          <a:fontRef idx="minor">
+            <a:schemeClr val="lt1"/>
+          </a:fontRef>
+        </p:style>
+        <p:txBody>
+          <a:bodyPr rtlCol="0" anchor="t" wrap="square" lIns="201168" rIns="201168" tIns="146304"/>
+          <a:lstStyle/>
+          <a:p>
+            <a:pPr algn="l" latinLnBrk="0">
+              <a:spcAft>
+                <a:spcPts val="600"/>
+              </a:spcAft>
+            </a:pPr>
+            <a:r>
+              <a:rPr sz="1400" b="1">
+                <a:solidFill>
+                  <a:srgbClr val="0E4D5E"/>
+                </a:solidFill>
+                <a:latin typeface="Segoe UI Semibold"/>
+              </a:rPr>
+              <a:t>External validity</a:t>
+            </a:r>
+          </a:p>
+          <a:p>
+            <a:pPr algn="l" latinLnBrk="0">
+              <a:spcAft>
+                <a:spcPts val="400"/>
+              </a:spcAft>
+            </a:pPr>
+            <a:r>
+              <a:rPr sz="1250" b="0">
+                <a:solidFill>
+                  <a:srgbClr val="24262E"/>
+                </a:solidFill>
+                <a:latin typeface="Segoe UI"/>
+              </a:rPr>
+              <a:t>E(t) is not yet validated against perceived performance quality.</a:t>
             </a:r>
           </a:p>
         </p:txBody>
@@ -5733,7 +6007,7 @@
                 </a:solidFill>
                 <a:latin typeface="Segoe UI Semibold"/>
               </a:rPr>
-              <a:t>BACKUP</a:t>
+              <a:t>RESULTS</a:t>
             </a:r>
           </a:p>
         </p:txBody>
@@ -5772,7 +6046,7 @@
                 </a:solidFill>
                 <a:latin typeface="Segoe UI Semibold"/>
               </a:rPr>
-              <a:t>Reproducibility protocol</a:t>
+              <a:t>Main results and implementation</a:t>
             </a:r>
           </a:p>
         </p:txBody>
@@ -5811,7 +6085,7 @@
                 </a:solidFill>
                 <a:latin typeface="Segoe UI"/>
               </a:rPr>
-              <a:t>15 / 15</a:t>
+              <a:t>15 / 19</a:t>
             </a:r>
           </a:p>
         </p:txBody>
@@ -5864,7 +6138,7 @@
         <p:spPr>
           <a:xfrm>
             <a:off x="502920" y="1371600"/>
-            <a:ext cx="11185855" cy="896112"/>
+            <a:ext cx="11185855" cy="914400"/>
           </a:xfrm>
           <a:prstGeom prst="roundRect">
             <a:avLst>
@@ -5910,7 +6184,7 @@
                 </a:solidFill>
                 <a:latin typeface="Segoe UI Semibold"/>
               </a:rPr>
-              <a:t>Regenerate</a:t>
+              <a:t>H1 supported for timing</a:t>
             </a:r>
           </a:p>
           <a:p>
@@ -5926,7 +6200,7 @@
                 </a:solidFill>
                 <a:latin typeface="Segoe UI"/>
               </a:rPr>
-              <a:t>`make reproduce` rebuilds report results and PDF from committed artifacts.</a:t>
+              <a:t>All 28 pieces lose onset synchrony; corpus mean drop 70.7%.</a:t>
             </a:r>
           </a:p>
         </p:txBody>
@@ -5939,8 +6213,8 @@
         </p:nvSpPr>
         <p:spPr>
           <a:xfrm>
-            <a:off x="502920" y="2404871"/>
-            <a:ext cx="11185855" cy="896112"/>
+            <a:off x="502920" y="2423160"/>
+            <a:ext cx="11185855" cy="914400"/>
           </a:xfrm>
           <a:prstGeom prst="roundRect">
             <a:avLst>
@@ -5986,7 +6260,7 @@
                 </a:solidFill>
                 <a:latin typeface="Segoe UI Semibold"/>
               </a:rPr>
-              <a:t>Grid protocol</a:t>
+              <a:t>H2 limited</a:t>
             </a:r>
           </a:p>
           <a:p>
@@ -6002,7 +6276,7 @@
                 </a:solidFill>
                 <a:latin typeface="Segoe UI"/>
               </a:rPr>
-              <a:t>`scripts/hpc/tier3_2000.sbatch`: 140 array tasks (28 pieces x 5 levels), merged and completeness-checked by `scripts/tier3_merge_shards.py`.</a:t>
+              <a:t>Two human pieces show significant centralization; overall evidence remains weak.</a:t>
             </a:r>
           </a:p>
         </p:txBody>
@@ -6015,8 +6289,8 @@
         </p:nvSpPr>
         <p:spPr>
           <a:xfrm>
-            <a:off x="502920" y="3438142"/>
-            <a:ext cx="11185855" cy="896112"/>
+            <a:off x="502920" y="3474720"/>
+            <a:ext cx="11185855" cy="914400"/>
           </a:xfrm>
           <a:prstGeom prst="roundRect">
             <a:avLst>
@@ -6062,7 +6336,7 @@
                 </a:solidFill>
                 <a:latin typeface="Segoe UI Semibold"/>
               </a:rPr>
-              <a:t>H3 experiment</a:t>
+              <a:t>H3 exploratory null</a:t>
             </a:r>
           </a:p>
           <a:p>
@@ -6078,7 +6352,7 @@
                 </a:solidFill>
                 <a:latin typeface="Segoe UI"/>
               </a:rPr>
-              <a:t>`uv run python -m scripts.h3_visual_onset` (deterministic seeds).</a:t>
+              <a:t>Mixed audio plus one pose stream does not substitute for paired per-singer data.</a:t>
             </a:r>
           </a:p>
         </p:txBody>
@@ -6091,8 +6365,8 @@
         </p:nvSpPr>
         <p:spPr>
           <a:xfrm>
-            <a:off x="502920" y="4471413"/>
-            <a:ext cx="11185855" cy="896112"/>
+            <a:off x="502920" y="4526280"/>
+            <a:ext cx="11185855" cy="914400"/>
           </a:xfrm>
           <a:prstGeom prst="roundRect">
             <a:avLst>
@@ -6138,7 +6412,7 @@
                 </a:solidFill>
                 <a:latin typeface="Segoe UI Semibold"/>
               </a:rPr>
-              <a:t>Environment</a:t>
+              <a:t>System delivered</a:t>
             </a:r>
           </a:p>
           <a:p>
@@ -6154,7 +6428,1692 @@
                 </a:solidFill>
                 <a:latin typeface="Segoe UI"/>
               </a:rPr>
-              <a:t>Python 3.11.9 pinned, locked dependencies, `uv sync --extra all`.</a:t>
+              <a:t>Reproducible pipelines, tested dashboard, figures, report, and presentation package.</a:t>
+            </a:r>
+          </a:p>
+        </p:txBody>
+      </p:sp>
+    </p:spTree>
+  </p:cSld>
+  <p:clrMapOvr>
+    <a:masterClrMapping/>
+  </p:clrMapOvr>
+</p:sld>
+</file>
+
+<file path=ppt/slides/slide16.xml><?xml version="1.0" encoding="utf-8"?>
+<p:sld xmlns:a="http://schemas.openxmlformats.org/drawingml/2006/main" xmlns:p="http://schemas.openxmlformats.org/presentationml/2006/main" xmlns:r="http://schemas.openxmlformats.org/officeDocument/2006/relationships">
+  <p:cSld>
+    <p:bg>
+      <p:bgPr>
+        <a:solidFill>
+          <a:srgbClr val="FAF6EC"/>
+        </a:solidFill>
+        <a:effectLst/>
+      </p:bgPr>
+    </p:bg>
+    <p:spTree>
+      <p:nvGrpSpPr>
+        <p:cNvPr id="1" name=""/>
+        <p:cNvGrpSpPr/>
+        <p:nvPr/>
+      </p:nvGrpSpPr>
+      <p:grpSpPr/>
+      <p:sp>
+        <p:nvSpPr>
+          <p:cNvPr id="2" name="TextBox 1"/>
+          <p:cNvSpPr txBox="1"/>
+          <p:nvPr/>
+        </p:nvSpPr>
+        <p:spPr>
+          <a:xfrm>
+            <a:off x="502920" y="292608"/>
+            <a:ext cx="5486400" cy="274320"/>
+          </a:xfrm>
+          <a:prstGeom prst="rect">
+            <a:avLst/>
+          </a:prstGeom>
+          <a:noFill/>
+        </p:spPr>
+        <p:txBody>
+          <a:bodyPr wrap="square" anchor="t" lIns="27432" rIns="27432" tIns="18288" bIns="18288">
+            <a:spAutoFit/>
+          </a:bodyPr>
+          <a:lstStyle/>
+          <a:p>
+            <a:pPr algn="l" latinLnBrk="0">
+              <a:lnSpc>
+                <a:spcPct val="100000"/>
+              </a:lnSpc>
+            </a:pPr>
+            <a:r>
+              <a:rPr sz="1200" b="1">
+                <a:solidFill>
+                  <a:srgbClr val="C4902A"/>
+                </a:solidFill>
+                <a:latin typeface="Segoe UI Semibold"/>
+              </a:rPr>
+              <a:t>EXTENSIONS</a:t>
+            </a:r>
+          </a:p>
+        </p:txBody>
+      </p:sp>
+      <p:sp>
+        <p:nvSpPr>
+          <p:cNvPr id="3" name="TextBox 2"/>
+          <p:cNvSpPr txBox="1"/>
+          <p:nvPr/>
+        </p:nvSpPr>
+        <p:spPr>
+          <a:xfrm>
+            <a:off x="502920" y="530352"/>
+            <a:ext cx="11185855" cy="566928"/>
+          </a:xfrm>
+          <a:prstGeom prst="rect">
+            <a:avLst/>
+          </a:prstGeom>
+          <a:noFill/>
+        </p:spPr>
+        <p:txBody>
+          <a:bodyPr wrap="square" anchor="t" lIns="27432" rIns="27432" tIns="18288" bIns="18288">
+            <a:spAutoFit/>
+          </a:bodyPr>
+          <a:lstStyle/>
+          <a:p>
+            <a:pPr algn="l" latinLnBrk="0">
+              <a:lnSpc>
+                <a:spcPct val="100000"/>
+              </a:lnSpc>
+            </a:pPr>
+            <a:r>
+              <a:rPr sz="2700" b="1">
+                <a:solidFill>
+                  <a:srgbClr val="0E4D5E"/>
+                </a:solidFill>
+                <a:latin typeface="Segoe UI Semibold"/>
+              </a:rPr>
+              <a:t>What the next study should add</a:t>
+            </a:r>
+          </a:p>
+        </p:txBody>
+      </p:sp>
+      <p:sp>
+        <p:nvSpPr>
+          <p:cNvPr id="4" name="TextBox 3"/>
+          <p:cNvSpPr txBox="1"/>
+          <p:nvPr/>
+        </p:nvSpPr>
+        <p:spPr>
+          <a:xfrm>
+            <a:off x="10637215" y="6510528"/>
+            <a:ext cx="1097280" cy="274320"/>
+          </a:xfrm>
+          <a:prstGeom prst="rect">
+            <a:avLst/>
+          </a:prstGeom>
+          <a:noFill/>
+        </p:spPr>
+        <p:txBody>
+          <a:bodyPr wrap="square" anchor="t" lIns="27432" rIns="27432" tIns="18288" bIns="18288">
+            <a:spAutoFit/>
+          </a:bodyPr>
+          <a:lstStyle/>
+          <a:p>
+            <a:pPr algn="r" latinLnBrk="0">
+              <a:lnSpc>
+                <a:spcPct val="100000"/>
+              </a:lnSpc>
+            </a:pPr>
+            <a:r>
+              <a:rPr sz="1000" b="0">
+                <a:solidFill>
+                  <a:srgbClr val="6E6A60"/>
+                </a:solidFill>
+                <a:latin typeface="Segoe UI"/>
+              </a:rPr>
+              <a:t>16 / 19</a:t>
+            </a:r>
+          </a:p>
+        </p:txBody>
+      </p:sp>
+      <p:sp>
+        <p:nvSpPr>
+          <p:cNvPr id="5" name="TextBox 4"/>
+          <p:cNvSpPr txBox="1"/>
+          <p:nvPr/>
+        </p:nvSpPr>
+        <p:spPr>
+          <a:xfrm>
+            <a:off x="502920" y="6510528"/>
+            <a:ext cx="4572000" cy="274320"/>
+          </a:xfrm>
+          <a:prstGeom prst="rect">
+            <a:avLst/>
+          </a:prstGeom>
+          <a:noFill/>
+        </p:spPr>
+        <p:txBody>
+          <a:bodyPr wrap="square" anchor="t" lIns="27432" rIns="27432" tIns="18288" bIns="18288">
+            <a:spAutoFit/>
+          </a:bodyPr>
+          <a:lstStyle/>
+          <a:p>
+            <a:pPr algn="l" latinLnBrk="0">
+              <a:lnSpc>
+                <a:spcPct val="100000"/>
+              </a:lnSpc>
+            </a:pPr>
+            <a:r>
+              <a:rPr sz="1000" b="0">
+                <a:solidFill>
+                  <a:srgbClr val="6E6A60"/>
+                </a:solidFill>
+                <a:latin typeface="Segoe UI"/>
+              </a:rPr>
+              <a:t>Project 8 - Entanglement in Online Choir</a:t>
+            </a:r>
+          </a:p>
+        </p:txBody>
+      </p:sp>
+      <p:sp>
+        <p:nvSpPr>
+          <p:cNvPr id="6" name="Rounded Rectangle 5"/>
+          <p:cNvSpPr/>
+          <p:nvPr/>
+        </p:nvSpPr>
+        <p:spPr>
+          <a:xfrm>
+            <a:off x="502920" y="1371600"/>
+            <a:ext cx="11185855" cy="914400"/>
+          </a:xfrm>
+          <a:prstGeom prst="roundRect">
+            <a:avLst>
+              <a:gd name="adj" fmla="val 4000"/>
+            </a:avLst>
+          </a:prstGeom>
+          <a:solidFill>
+            <a:srgbClr val="FDFBF5"/>
+          </a:solidFill>
+          <a:ln w="12700">
+            <a:solidFill>
+              <a:srgbClr val="CBD9DD"/>
+            </a:solidFill>
+          </a:ln>
+        </p:spPr>
+        <p:style>
+          <a:lnRef idx="1">
+            <a:schemeClr val="accent1"/>
+          </a:lnRef>
+          <a:fillRef idx="3">
+            <a:schemeClr val="accent1"/>
+          </a:fillRef>
+          <a:effectRef idx="2">
+            <a:schemeClr val="accent1"/>
+          </a:effectRef>
+          <a:fontRef idx="minor">
+            <a:schemeClr val="lt1"/>
+          </a:fontRef>
+        </p:style>
+        <p:txBody>
+          <a:bodyPr rtlCol="0" anchor="t" wrap="square" lIns="201168" rIns="201168" tIns="146304"/>
+          <a:lstStyle/>
+          <a:p>
+            <a:pPr algn="l" latinLnBrk="0">
+              <a:spcAft>
+                <a:spcPts val="600"/>
+              </a:spcAft>
+            </a:pPr>
+            <a:r>
+              <a:rPr sz="1400" b="1">
+                <a:solidFill>
+                  <a:srgbClr val="0E4D5E"/>
+                </a:solidFill>
+                <a:latin typeface="Segoe UI Semibold"/>
+              </a:rPr>
+              <a:t>Live latency sessions</a:t>
+            </a:r>
+          </a:p>
+          <a:p>
+            <a:pPr algn="l" latinLnBrk="0">
+              <a:spcAft>
+                <a:spcPts val="400"/>
+              </a:spcAft>
+            </a:pPr>
+            <a:r>
+              <a:rPr sz="1350" b="0">
+                <a:solidFill>
+                  <a:srgbClr val="24262E"/>
+                </a:solidFill>
+                <a:latin typeface="Segoe UI"/>
+              </a:rPr>
+              <a:t>Measure behavioral adaptation and latency-driven leadership.</a:t>
+            </a:r>
+          </a:p>
+        </p:txBody>
+      </p:sp>
+      <p:sp>
+        <p:nvSpPr>
+          <p:cNvPr id="7" name="Rounded Rectangle 6"/>
+          <p:cNvSpPr/>
+          <p:nvPr/>
+        </p:nvSpPr>
+        <p:spPr>
+          <a:xfrm>
+            <a:off x="502920" y="2423160"/>
+            <a:ext cx="11185855" cy="914400"/>
+          </a:xfrm>
+          <a:prstGeom prst="roundRect">
+            <a:avLst>
+              <a:gd name="adj" fmla="val 4000"/>
+            </a:avLst>
+          </a:prstGeom>
+          <a:solidFill>
+            <a:srgbClr val="FDFBF5"/>
+          </a:solidFill>
+          <a:ln w="12700">
+            <a:solidFill>
+              <a:srgbClr val="CBD9DD"/>
+            </a:solidFill>
+          </a:ln>
+        </p:spPr>
+        <p:style>
+          <a:lnRef idx="1">
+            <a:schemeClr val="accent1"/>
+          </a:lnRef>
+          <a:fillRef idx="3">
+            <a:schemeClr val="accent1"/>
+          </a:fillRef>
+          <a:effectRef idx="2">
+            <a:schemeClr val="accent1"/>
+          </a:effectRef>
+          <a:fontRef idx="minor">
+            <a:schemeClr val="lt1"/>
+          </a:fontRef>
+        </p:style>
+        <p:txBody>
+          <a:bodyPr rtlCol="0" anchor="t" wrap="square" lIns="201168" rIns="201168" tIns="146304"/>
+          <a:lstStyle/>
+          <a:p>
+            <a:pPr algn="l" latinLnBrk="0">
+              <a:spcAft>
+                <a:spcPts val="600"/>
+              </a:spcAft>
+            </a:pPr>
+            <a:r>
+              <a:rPr sz="1400" b="1">
+                <a:solidFill>
+                  <a:srgbClr val="0E4D5E"/>
+                </a:solidFill>
+                <a:latin typeface="Segoe UI Semibold"/>
+              </a:rPr>
+              <a:t>Paired audio-video corpus</a:t>
+            </a:r>
+          </a:p>
+          <a:p>
+            <a:pPr algn="l" latinLnBrk="0">
+              <a:spcAft>
+                <a:spcPts val="400"/>
+              </a:spcAft>
+            </a:pPr>
+            <a:r>
+              <a:rPr sz="1350" b="0">
+                <a:solidFill>
+                  <a:srgbClr val="24262E"/>
+                </a:solidFill>
+                <a:latin typeface="Segoe UI"/>
+              </a:rPr>
+              <a:t>Unlock the planned H3 incremental-validity test.</a:t>
+            </a:r>
+          </a:p>
+        </p:txBody>
+      </p:sp>
+      <p:sp>
+        <p:nvSpPr>
+          <p:cNvPr id="8" name="Rounded Rectangle 7"/>
+          <p:cNvSpPr/>
+          <p:nvPr/>
+        </p:nvSpPr>
+        <p:spPr>
+          <a:xfrm>
+            <a:off x="502920" y="3474720"/>
+            <a:ext cx="11185855" cy="914400"/>
+          </a:xfrm>
+          <a:prstGeom prst="roundRect">
+            <a:avLst>
+              <a:gd name="adj" fmla="val 4000"/>
+            </a:avLst>
+          </a:prstGeom>
+          <a:solidFill>
+            <a:srgbClr val="FDFBF5"/>
+          </a:solidFill>
+          <a:ln w="12700">
+            <a:solidFill>
+              <a:srgbClr val="CBD9DD"/>
+            </a:solidFill>
+          </a:ln>
+        </p:spPr>
+        <p:style>
+          <a:lnRef idx="1">
+            <a:schemeClr val="accent1"/>
+          </a:lnRef>
+          <a:fillRef idx="3">
+            <a:schemeClr val="accent1"/>
+          </a:fillRef>
+          <a:effectRef idx="2">
+            <a:schemeClr val="accent1"/>
+          </a:effectRef>
+          <a:fontRef idx="minor">
+            <a:schemeClr val="lt1"/>
+          </a:fontRef>
+        </p:style>
+        <p:txBody>
+          <a:bodyPr rtlCol="0" anchor="t" wrap="square" lIns="201168" rIns="201168" tIns="146304"/>
+          <a:lstStyle/>
+          <a:p>
+            <a:pPr algn="l" latinLnBrk="0">
+              <a:spcAft>
+                <a:spcPts val="600"/>
+              </a:spcAft>
+            </a:pPr>
+            <a:r>
+              <a:rPr sz="1400" b="1">
+                <a:solidFill>
+                  <a:srgbClr val="0E4D5E"/>
+                </a:solidFill>
+                <a:latin typeface="Segoe UI Semibold"/>
+              </a:rPr>
+              <a:t>Factorial network experiment</a:t>
+            </a:r>
+          </a:p>
+          <a:p>
+            <a:pPr algn="l" latinLnBrk="0">
+              <a:spcAft>
+                <a:spcPts val="400"/>
+              </a:spcAft>
+            </a:pPr>
+            <a:r>
+              <a:rPr sz="1350" b="0">
+                <a:solidFill>
+                  <a:srgbClr val="24262E"/>
+                </a:solidFill>
+                <a:latin typeface="Segoe UI"/>
+              </a:rPr>
+              <a:t>Separate delay, jitter, and dropout effects.</a:t>
+            </a:r>
+          </a:p>
+        </p:txBody>
+      </p:sp>
+      <p:sp>
+        <p:nvSpPr>
+          <p:cNvPr id="9" name="Rounded Rectangle 8"/>
+          <p:cNvSpPr/>
+          <p:nvPr/>
+        </p:nvSpPr>
+        <p:spPr>
+          <a:xfrm>
+            <a:off x="502920" y="4526280"/>
+            <a:ext cx="11185855" cy="914400"/>
+          </a:xfrm>
+          <a:prstGeom prst="roundRect">
+            <a:avLst>
+              <a:gd name="adj" fmla="val 4000"/>
+            </a:avLst>
+          </a:prstGeom>
+          <a:solidFill>
+            <a:srgbClr val="FDFBF5"/>
+          </a:solidFill>
+          <a:ln w="12700">
+            <a:solidFill>
+              <a:srgbClr val="CBD9DD"/>
+            </a:solidFill>
+          </a:ln>
+        </p:spPr>
+        <p:style>
+          <a:lnRef idx="1">
+            <a:schemeClr val="accent1"/>
+          </a:lnRef>
+          <a:fillRef idx="3">
+            <a:schemeClr val="accent1"/>
+          </a:fillRef>
+          <a:effectRef idx="2">
+            <a:schemeClr val="accent1"/>
+          </a:effectRef>
+          <a:fontRef idx="minor">
+            <a:schemeClr val="lt1"/>
+          </a:fontRef>
+        </p:style>
+        <p:txBody>
+          <a:bodyPr rtlCol="0" anchor="t" wrap="square" lIns="201168" rIns="201168" tIns="146304"/>
+          <a:lstStyle/>
+          <a:p>
+            <a:pPr algn="l" latinLnBrk="0">
+              <a:spcAft>
+                <a:spcPts val="600"/>
+              </a:spcAft>
+            </a:pPr>
+            <a:r>
+              <a:rPr sz="1400" b="1">
+                <a:solidFill>
+                  <a:srgbClr val="0E4D5E"/>
+                </a:solidFill>
+                <a:latin typeface="Segoe UI Semibold"/>
+              </a:rPr>
+              <a:t>External validation</a:t>
+            </a:r>
+          </a:p>
+          <a:p>
+            <a:pPr algn="l" latinLnBrk="0">
+              <a:spcAft>
+                <a:spcPts val="400"/>
+              </a:spcAft>
+            </a:pPr>
+            <a:r>
+              <a:rPr sz="1350" b="0">
+                <a:solidFill>
+                  <a:srgbClr val="24262E"/>
+                </a:solidFill>
+                <a:latin typeface="Segoe UI"/>
+              </a:rPr>
+              <a:t>Compare E(t) with expert ratings, singer experience, and score-alignment errors.</a:t>
+            </a:r>
+          </a:p>
+        </p:txBody>
+      </p:sp>
+    </p:spTree>
+  </p:cSld>
+  <p:clrMapOvr>
+    <a:masterClrMapping/>
+  </p:clrMapOvr>
+</p:sld>
+</file>
+
+<file path=ppt/slides/slide17.xml><?xml version="1.0" encoding="utf-8"?>
+<p:sld xmlns:a="http://schemas.openxmlformats.org/drawingml/2006/main" xmlns:p="http://schemas.openxmlformats.org/presentationml/2006/main" xmlns:r="http://schemas.openxmlformats.org/officeDocument/2006/relationships">
+  <p:cSld>
+    <p:bg>
+      <p:bgPr>
+        <a:solidFill>
+          <a:srgbClr val="FAF6EC"/>
+        </a:solidFill>
+        <a:effectLst/>
+      </p:bgPr>
+    </p:bg>
+    <p:spTree>
+      <p:nvGrpSpPr>
+        <p:cNvPr id="1" name=""/>
+        <p:cNvGrpSpPr/>
+        <p:nvPr/>
+      </p:nvGrpSpPr>
+      <p:grpSpPr/>
+      <p:sp>
+        <p:nvSpPr>
+          <p:cNvPr id="2" name="TextBox 1"/>
+          <p:cNvSpPr txBox="1"/>
+          <p:nvPr/>
+        </p:nvSpPr>
+        <p:spPr>
+          <a:xfrm>
+            <a:off x="502920" y="292608"/>
+            <a:ext cx="5486400" cy="274320"/>
+          </a:xfrm>
+          <a:prstGeom prst="rect">
+            <a:avLst/>
+          </a:prstGeom>
+          <a:noFill/>
+        </p:spPr>
+        <p:txBody>
+          <a:bodyPr wrap="square" anchor="t" lIns="27432" rIns="27432" tIns="18288" bIns="18288">
+            <a:spAutoFit/>
+          </a:bodyPr>
+          <a:lstStyle/>
+          <a:p>
+            <a:pPr algn="l" latinLnBrk="0">
+              <a:lnSpc>
+                <a:spcPct val="100000"/>
+              </a:lnSpc>
+            </a:pPr>
+            <a:r>
+              <a:rPr sz="1200" b="1">
+                <a:solidFill>
+                  <a:srgbClr val="C4902A"/>
+                </a:solidFill>
+                <a:latin typeface="Segoe UI Semibold"/>
+              </a:rPr>
+              <a:t>RETROSPECTIVE</a:t>
+            </a:r>
+          </a:p>
+        </p:txBody>
+      </p:sp>
+      <p:sp>
+        <p:nvSpPr>
+          <p:cNvPr id="3" name="TextBox 2"/>
+          <p:cNvSpPr txBox="1"/>
+          <p:nvPr/>
+        </p:nvSpPr>
+        <p:spPr>
+          <a:xfrm>
+            <a:off x="502920" y="530352"/>
+            <a:ext cx="11185855" cy="566928"/>
+          </a:xfrm>
+          <a:prstGeom prst="rect">
+            <a:avLst/>
+          </a:prstGeom>
+          <a:noFill/>
+        </p:spPr>
+        <p:txBody>
+          <a:bodyPr wrap="square" anchor="t" lIns="27432" rIns="27432" tIns="18288" bIns="18288">
+            <a:spAutoFit/>
+          </a:bodyPr>
+          <a:lstStyle/>
+          <a:p>
+            <a:pPr algn="l" latinLnBrk="0">
+              <a:lnSpc>
+                <a:spcPct val="100000"/>
+              </a:lnSpc>
+            </a:pPr>
+            <a:r>
+              <a:rPr sz="2700" b="1">
+                <a:solidFill>
+                  <a:srgbClr val="0E4D5E"/>
+                </a:solidFill>
+                <a:latin typeface="Segoe UI Semibold"/>
+              </a:rPr>
+              <a:t>What worked and what could improve</a:t>
+            </a:r>
+          </a:p>
+        </p:txBody>
+      </p:sp>
+      <p:sp>
+        <p:nvSpPr>
+          <p:cNvPr id="4" name="TextBox 3"/>
+          <p:cNvSpPr txBox="1"/>
+          <p:nvPr/>
+        </p:nvSpPr>
+        <p:spPr>
+          <a:xfrm>
+            <a:off x="10637215" y="6510528"/>
+            <a:ext cx="1097280" cy="274320"/>
+          </a:xfrm>
+          <a:prstGeom prst="rect">
+            <a:avLst/>
+          </a:prstGeom>
+          <a:noFill/>
+        </p:spPr>
+        <p:txBody>
+          <a:bodyPr wrap="square" anchor="t" lIns="27432" rIns="27432" tIns="18288" bIns="18288">
+            <a:spAutoFit/>
+          </a:bodyPr>
+          <a:lstStyle/>
+          <a:p>
+            <a:pPr algn="r" latinLnBrk="0">
+              <a:lnSpc>
+                <a:spcPct val="100000"/>
+              </a:lnSpc>
+            </a:pPr>
+            <a:r>
+              <a:rPr sz="1000" b="0">
+                <a:solidFill>
+                  <a:srgbClr val="6E6A60"/>
+                </a:solidFill>
+                <a:latin typeface="Segoe UI"/>
+              </a:rPr>
+              <a:t>17 / 19</a:t>
+            </a:r>
+          </a:p>
+        </p:txBody>
+      </p:sp>
+      <p:sp>
+        <p:nvSpPr>
+          <p:cNvPr id="5" name="TextBox 4"/>
+          <p:cNvSpPr txBox="1"/>
+          <p:nvPr/>
+        </p:nvSpPr>
+        <p:spPr>
+          <a:xfrm>
+            <a:off x="502920" y="6510528"/>
+            <a:ext cx="4572000" cy="274320"/>
+          </a:xfrm>
+          <a:prstGeom prst="rect">
+            <a:avLst/>
+          </a:prstGeom>
+          <a:noFill/>
+        </p:spPr>
+        <p:txBody>
+          <a:bodyPr wrap="square" anchor="t" lIns="27432" rIns="27432" tIns="18288" bIns="18288">
+            <a:spAutoFit/>
+          </a:bodyPr>
+          <a:lstStyle/>
+          <a:p>
+            <a:pPr algn="l" latinLnBrk="0">
+              <a:lnSpc>
+                <a:spcPct val="100000"/>
+              </a:lnSpc>
+            </a:pPr>
+            <a:r>
+              <a:rPr sz="1000" b="0">
+                <a:solidFill>
+                  <a:srgbClr val="6E6A60"/>
+                </a:solidFill>
+                <a:latin typeface="Segoe UI"/>
+              </a:rPr>
+              <a:t>Project 8 - Entanglement in Online Choir</a:t>
+            </a:r>
+          </a:p>
+        </p:txBody>
+      </p:sp>
+      <p:sp>
+        <p:nvSpPr>
+          <p:cNvPr id="6" name="Rounded Rectangle 5"/>
+          <p:cNvSpPr/>
+          <p:nvPr/>
+        </p:nvSpPr>
+        <p:spPr>
+          <a:xfrm>
+            <a:off x="502920" y="1325880"/>
+            <a:ext cx="5349240" cy="4160520"/>
+          </a:xfrm>
+          <a:prstGeom prst="roundRect">
+            <a:avLst>
+              <a:gd name="adj" fmla="val 4000"/>
+            </a:avLst>
+          </a:prstGeom>
+          <a:solidFill>
+            <a:srgbClr val="FDFBF5"/>
+          </a:solidFill>
+          <a:ln w="12700">
+            <a:solidFill>
+              <a:srgbClr val="CBD9DD"/>
+            </a:solidFill>
+          </a:ln>
+        </p:spPr>
+        <p:style>
+          <a:lnRef idx="1">
+            <a:schemeClr val="accent1"/>
+          </a:lnRef>
+          <a:fillRef idx="3">
+            <a:schemeClr val="accent1"/>
+          </a:fillRef>
+          <a:effectRef idx="2">
+            <a:schemeClr val="accent1"/>
+          </a:effectRef>
+          <a:fontRef idx="minor">
+            <a:schemeClr val="lt1"/>
+          </a:fontRef>
+        </p:style>
+        <p:txBody>
+          <a:bodyPr rtlCol="0" anchor="t" wrap="square" lIns="201168" rIns="201168" tIns="146304"/>
+          <a:lstStyle/>
+          <a:p>
+            <a:pPr algn="l" latinLnBrk="0">
+              <a:spcAft>
+                <a:spcPts val="600"/>
+              </a:spcAft>
+            </a:pPr>
+            <a:r>
+              <a:rPr sz="1400" b="1">
+                <a:solidFill>
+                  <a:srgbClr val="0E4D5E"/>
+                </a:solidFill>
+                <a:latin typeface="Segoe UI Semibold"/>
+              </a:rPr>
+              <a:t>What worked well</a:t>
+            </a:r>
+          </a:p>
+          <a:p>
+            <a:pPr algn="l" latinLnBrk="0">
+              <a:spcAft>
+                <a:spcPts val="400"/>
+              </a:spcAft>
+            </a:pPr>
+            <a:r>
+              <a:rPr sz="1500" b="0">
+                <a:solidFill>
+                  <a:srgbClr val="24262E"/>
+                </a:solidFill>
+                <a:latin typeface="Segoe UI"/>
+              </a:rPr>
+              <a:t>Controls exposed the first metric mismatch.
+Seeded scripts, tests, and audits kept claims traceable.
+Instructor questions improved definitions and limitation framing.</a:t>
+            </a:r>
+          </a:p>
+        </p:txBody>
+      </p:sp>
+      <p:sp>
+        <p:nvSpPr>
+          <p:cNvPr id="7" name="Rounded Rectangle 6"/>
+          <p:cNvSpPr/>
+          <p:nvPr/>
+        </p:nvSpPr>
+        <p:spPr>
+          <a:xfrm>
+            <a:off x="6263640" y="1325880"/>
+            <a:ext cx="5349240" cy="4160520"/>
+          </a:xfrm>
+          <a:prstGeom prst="roundRect">
+            <a:avLst>
+              <a:gd name="adj" fmla="val 4000"/>
+            </a:avLst>
+          </a:prstGeom>
+          <a:solidFill>
+            <a:srgbClr val="FDFBF5"/>
+          </a:solidFill>
+          <a:ln w="12700">
+            <a:solidFill>
+              <a:srgbClr val="CBD9DD"/>
+            </a:solidFill>
+          </a:ln>
+        </p:spPr>
+        <p:style>
+          <a:lnRef idx="1">
+            <a:schemeClr val="accent1"/>
+          </a:lnRef>
+          <a:fillRef idx="3">
+            <a:schemeClr val="accent1"/>
+          </a:fillRef>
+          <a:effectRef idx="2">
+            <a:schemeClr val="accent1"/>
+          </a:effectRef>
+          <a:fontRef idx="minor">
+            <a:schemeClr val="lt1"/>
+          </a:fontRef>
+        </p:style>
+        <p:txBody>
+          <a:bodyPr rtlCol="0" anchor="t" wrap="square" lIns="201168" rIns="201168" tIns="146304"/>
+          <a:lstStyle/>
+          <a:p>
+            <a:pPr algn="l" latinLnBrk="0">
+              <a:spcAft>
+                <a:spcPts val="600"/>
+              </a:spcAft>
+            </a:pPr>
+            <a:r>
+              <a:rPr sz="1400" b="1">
+                <a:solidFill>
+                  <a:srgbClr val="0E4D5E"/>
+                </a:solidFill>
+                <a:latin typeface="Segoe UI Semibold"/>
+              </a:rPr>
+              <a:t>What could improve</a:t>
+            </a:r>
+          </a:p>
+          <a:p>
+            <a:pPr algn="l" latinLnBrk="0">
+              <a:spcAft>
+                <a:spcPts val="400"/>
+              </a:spcAft>
+            </a:pPr>
+            <a:r>
+              <a:rPr sz="1500" b="0">
+                <a:solidFill>
+                  <a:srgbClr val="24262E"/>
+                </a:solidFill>
+                <a:latin typeface="Segoe UI"/>
+              </a:rPr>
+              <a:t>Secure paired multimodal data earlier.
+Resolve work-package dependencies before parallel implementation.
+Confirm final format and metric expectations earlier.</a:t>
+            </a:r>
+          </a:p>
+        </p:txBody>
+      </p:sp>
+      <p:sp>
+        <p:nvSpPr>
+          <p:cNvPr id="8" name="TextBox 7"/>
+          <p:cNvSpPr txBox="1"/>
+          <p:nvPr/>
+        </p:nvSpPr>
+        <p:spPr>
+          <a:xfrm>
+            <a:off x="502920" y="5715000"/>
+            <a:ext cx="11185855" cy="411480"/>
+          </a:xfrm>
+          <a:prstGeom prst="rect">
+            <a:avLst/>
+          </a:prstGeom>
+          <a:noFill/>
+        </p:spPr>
+        <p:txBody>
+          <a:bodyPr wrap="square" anchor="t" lIns="27432" rIns="27432" tIns="18288" bIns="18288">
+            <a:spAutoFit/>
+          </a:bodyPr>
+          <a:lstStyle/>
+          <a:p>
+            <a:pPr algn="ctr" latinLnBrk="0">
+              <a:lnSpc>
+                <a:spcPct val="100000"/>
+              </a:lnSpc>
+            </a:pPr>
+            <a:r>
+              <a:rPr sz="2200" b="1">
+                <a:solidFill>
+                  <a:srgbClr val="0E4D5E"/>
+                </a:solidFill>
+                <a:latin typeface="Segoe UI"/>
+              </a:rPr>
+              <a:t>Thank you. Questions are welcome.</a:t>
+            </a:r>
+          </a:p>
+        </p:txBody>
+      </p:sp>
+    </p:spTree>
+  </p:cSld>
+  <p:clrMapOvr>
+    <a:masterClrMapping/>
+  </p:clrMapOvr>
+</p:sld>
+</file>
+
+<file path=ppt/slides/slide18.xml><?xml version="1.0" encoding="utf-8"?>
+<p:sld xmlns:a="http://schemas.openxmlformats.org/drawingml/2006/main" xmlns:p="http://schemas.openxmlformats.org/presentationml/2006/main" xmlns:r="http://schemas.openxmlformats.org/officeDocument/2006/relationships">
+  <p:cSld>
+    <p:bg>
+      <p:bgPr>
+        <a:solidFill>
+          <a:srgbClr val="FAF6EC"/>
+        </a:solidFill>
+        <a:effectLst/>
+      </p:bgPr>
+    </p:bg>
+    <p:spTree>
+      <p:nvGrpSpPr>
+        <p:cNvPr id="1" name=""/>
+        <p:cNvGrpSpPr/>
+        <p:nvPr/>
+      </p:nvGrpSpPr>
+      <p:grpSpPr/>
+      <p:sp>
+        <p:nvSpPr>
+          <p:cNvPr id="2" name="TextBox 1"/>
+          <p:cNvSpPr txBox="1"/>
+          <p:nvPr/>
+        </p:nvSpPr>
+        <p:spPr>
+          <a:xfrm>
+            <a:off x="502920" y="292608"/>
+            <a:ext cx="5486400" cy="274320"/>
+          </a:xfrm>
+          <a:prstGeom prst="rect">
+            <a:avLst/>
+          </a:prstGeom>
+          <a:noFill/>
+        </p:spPr>
+        <p:txBody>
+          <a:bodyPr wrap="square" anchor="t" lIns="27432" rIns="27432" tIns="18288" bIns="18288">
+            <a:spAutoFit/>
+          </a:bodyPr>
+          <a:lstStyle/>
+          <a:p>
+            <a:pPr algn="l" latinLnBrk="0">
+              <a:lnSpc>
+                <a:spcPct val="100000"/>
+              </a:lnSpc>
+            </a:pPr>
+            <a:r>
+              <a:rPr sz="1200" b="1">
+                <a:solidFill>
+                  <a:srgbClr val="C4902A"/>
+                </a:solidFill>
+                <a:latin typeface="Segoe UI Semibold"/>
+              </a:rPr>
+              <a:t>BACKUP</a:t>
+            </a:r>
+          </a:p>
+        </p:txBody>
+      </p:sp>
+      <p:sp>
+        <p:nvSpPr>
+          <p:cNvPr id="3" name="TextBox 2"/>
+          <p:cNvSpPr txBox="1"/>
+          <p:nvPr/>
+        </p:nvSpPr>
+        <p:spPr>
+          <a:xfrm>
+            <a:off x="502920" y="530352"/>
+            <a:ext cx="11185855" cy="566928"/>
+          </a:xfrm>
+          <a:prstGeom prst="rect">
+            <a:avLst/>
+          </a:prstGeom>
+          <a:noFill/>
+        </p:spPr>
+        <p:txBody>
+          <a:bodyPr wrap="square" anchor="t" lIns="27432" rIns="27432" tIns="18288" bIns="18288">
+            <a:spAutoFit/>
+          </a:bodyPr>
+          <a:lstStyle/>
+          <a:p>
+            <a:pPr algn="l" latinLnBrk="0">
+              <a:lnSpc>
+                <a:spcPct val="100000"/>
+              </a:lnSpc>
+            </a:pPr>
+            <a:r>
+              <a:rPr sz="2700" b="1">
+                <a:solidFill>
+                  <a:srgbClr val="0E4D5E"/>
+                </a:solidFill>
+                <a:latin typeface="Segoe UI Semibold"/>
+              </a:rPr>
+              <a:t>Dashboard on real outputs</a:t>
+            </a:r>
+          </a:p>
+        </p:txBody>
+      </p:sp>
+      <p:sp>
+        <p:nvSpPr>
+          <p:cNvPr id="4" name="TextBox 3"/>
+          <p:cNvSpPr txBox="1"/>
+          <p:nvPr/>
+        </p:nvSpPr>
+        <p:spPr>
+          <a:xfrm>
+            <a:off x="10637215" y="6510528"/>
+            <a:ext cx="1097280" cy="274320"/>
+          </a:xfrm>
+          <a:prstGeom prst="rect">
+            <a:avLst/>
+          </a:prstGeom>
+          <a:noFill/>
+        </p:spPr>
+        <p:txBody>
+          <a:bodyPr wrap="square" anchor="t" lIns="27432" rIns="27432" tIns="18288" bIns="18288">
+            <a:spAutoFit/>
+          </a:bodyPr>
+          <a:lstStyle/>
+          <a:p>
+            <a:pPr algn="r" latinLnBrk="0">
+              <a:lnSpc>
+                <a:spcPct val="100000"/>
+              </a:lnSpc>
+            </a:pPr>
+            <a:r>
+              <a:rPr sz="1000" b="0">
+                <a:solidFill>
+                  <a:srgbClr val="6E6A60"/>
+                </a:solidFill>
+                <a:latin typeface="Segoe UI"/>
+              </a:rPr>
+              <a:t>18 / 19</a:t>
+            </a:r>
+          </a:p>
+        </p:txBody>
+      </p:sp>
+      <p:sp>
+        <p:nvSpPr>
+          <p:cNvPr id="5" name="TextBox 4"/>
+          <p:cNvSpPr txBox="1"/>
+          <p:nvPr/>
+        </p:nvSpPr>
+        <p:spPr>
+          <a:xfrm>
+            <a:off x="502920" y="6510528"/>
+            <a:ext cx="4572000" cy="274320"/>
+          </a:xfrm>
+          <a:prstGeom prst="rect">
+            <a:avLst/>
+          </a:prstGeom>
+          <a:noFill/>
+        </p:spPr>
+        <p:txBody>
+          <a:bodyPr wrap="square" anchor="t" lIns="27432" rIns="27432" tIns="18288" bIns="18288">
+            <a:spAutoFit/>
+          </a:bodyPr>
+          <a:lstStyle/>
+          <a:p>
+            <a:pPr algn="l" latinLnBrk="0">
+              <a:lnSpc>
+                <a:spcPct val="100000"/>
+              </a:lnSpc>
+            </a:pPr>
+            <a:r>
+              <a:rPr sz="1000" b="0">
+                <a:solidFill>
+                  <a:srgbClr val="6E6A60"/>
+                </a:solidFill>
+                <a:latin typeface="Segoe UI"/>
+              </a:rPr>
+              <a:t>Project 8 - Entanglement in Online Choir</a:t>
+            </a:r>
+          </a:p>
+        </p:txBody>
+      </p:sp>
+      <p:pic>
+        <p:nvPicPr>
+          <p:cNvPr id="6" name="Picture 5" descr="wp4_dashboard_realdata.png"/>
+          <p:cNvPicPr>
+            <a:picLocks noChangeAspect="1"/>
+          </p:cNvPicPr>
+          <p:nvPr/>
+        </p:nvPicPr>
+        <p:blipFill>
+          <a:blip r:embed="rId2"/>
+          <a:stretch>
+            <a:fillRect/>
+          </a:stretch>
+        </p:blipFill>
+        <p:spPr>
+          <a:xfrm>
+            <a:off x="3530642" y="1280160"/>
+            <a:ext cx="5130410" cy="4754880"/>
+          </a:xfrm>
+          <a:prstGeom prst="rect">
+            <a:avLst/>
+          </a:prstGeom>
+        </p:spPr>
+      </p:pic>
+      <p:sp>
+        <p:nvSpPr>
+          <p:cNvPr id="7" name="Rounded Rectangle 6"/>
+          <p:cNvSpPr/>
+          <p:nvPr/>
+        </p:nvSpPr>
+        <p:spPr>
+          <a:xfrm>
+            <a:off x="502920" y="6144768"/>
+            <a:ext cx="11185855" cy="475488"/>
+          </a:xfrm>
+          <a:prstGeom prst="roundRect">
+            <a:avLst>
+              <a:gd name="adj" fmla="val 6000"/>
+            </a:avLst>
+          </a:prstGeom>
+          <a:solidFill>
+            <a:srgbClr val="0E4D5E"/>
+          </a:solidFill>
+          <a:ln>
+            <a:noFill/>
+          </a:ln>
+        </p:spPr>
+        <p:style>
+          <a:lnRef idx="1">
+            <a:schemeClr val="accent1"/>
+          </a:lnRef>
+          <a:fillRef idx="3">
+            <a:schemeClr val="accent1"/>
+          </a:fillRef>
+          <a:effectRef idx="2">
+            <a:schemeClr val="accent1"/>
+          </a:effectRef>
+          <a:fontRef idx="minor">
+            <a:schemeClr val="lt1"/>
+          </a:fontRef>
+        </p:style>
+        <p:txBody>
+          <a:bodyPr rtlCol="0" anchor="ctr" wrap="square"/>
+          <a:lstStyle/>
+          <a:p>
+            <a:pPr algn="ctr" latinLnBrk="0"/>
+            <a:r>
+              <a:rPr sz="1400" b="1">
+                <a:solidFill>
+                  <a:srgbClr val="FDFBF5"/>
+                </a:solidFill>
+                <a:latin typeface="Segoe UI Semibold"/>
+              </a:rPr>
+              <a:t>Use only if the live dashboard cannot run.</a:t>
+            </a:r>
+          </a:p>
+        </p:txBody>
+      </p:sp>
+    </p:spTree>
+  </p:cSld>
+  <p:clrMapOvr>
+    <a:masterClrMapping/>
+  </p:clrMapOvr>
+</p:sld>
+</file>
+
+<file path=ppt/slides/slide19.xml><?xml version="1.0" encoding="utf-8"?>
+<p:sld xmlns:a="http://schemas.openxmlformats.org/drawingml/2006/main" xmlns:p="http://schemas.openxmlformats.org/presentationml/2006/main" xmlns:r="http://schemas.openxmlformats.org/officeDocument/2006/relationships">
+  <p:cSld>
+    <p:bg>
+      <p:bgPr>
+        <a:solidFill>
+          <a:srgbClr val="FAF6EC"/>
+        </a:solidFill>
+        <a:effectLst/>
+      </p:bgPr>
+    </p:bg>
+    <p:spTree>
+      <p:nvGrpSpPr>
+        <p:cNvPr id="1" name=""/>
+        <p:cNvGrpSpPr/>
+        <p:nvPr/>
+      </p:nvGrpSpPr>
+      <p:grpSpPr/>
+      <p:sp>
+        <p:nvSpPr>
+          <p:cNvPr id="2" name="TextBox 1"/>
+          <p:cNvSpPr txBox="1"/>
+          <p:nvPr/>
+        </p:nvSpPr>
+        <p:spPr>
+          <a:xfrm>
+            <a:off x="502920" y="292608"/>
+            <a:ext cx="5486400" cy="274320"/>
+          </a:xfrm>
+          <a:prstGeom prst="rect">
+            <a:avLst/>
+          </a:prstGeom>
+          <a:noFill/>
+        </p:spPr>
+        <p:txBody>
+          <a:bodyPr wrap="square" anchor="t" lIns="27432" rIns="27432" tIns="18288" bIns="18288">
+            <a:spAutoFit/>
+          </a:bodyPr>
+          <a:lstStyle/>
+          <a:p>
+            <a:pPr algn="l" latinLnBrk="0">
+              <a:lnSpc>
+                <a:spcPct val="100000"/>
+              </a:lnSpc>
+            </a:pPr>
+            <a:r>
+              <a:rPr sz="1200" b="1">
+                <a:solidFill>
+                  <a:srgbClr val="C4902A"/>
+                </a:solidFill>
+                <a:latin typeface="Segoe UI Semibold"/>
+              </a:rPr>
+              <a:t>BACKUP</a:t>
+            </a:r>
+          </a:p>
+        </p:txBody>
+      </p:sp>
+      <p:sp>
+        <p:nvSpPr>
+          <p:cNvPr id="3" name="TextBox 2"/>
+          <p:cNvSpPr txBox="1"/>
+          <p:nvPr/>
+        </p:nvSpPr>
+        <p:spPr>
+          <a:xfrm>
+            <a:off x="502920" y="530352"/>
+            <a:ext cx="11185855" cy="566928"/>
+          </a:xfrm>
+          <a:prstGeom prst="rect">
+            <a:avLst/>
+          </a:prstGeom>
+          <a:noFill/>
+        </p:spPr>
+        <p:txBody>
+          <a:bodyPr wrap="square" anchor="t" lIns="27432" rIns="27432" tIns="18288" bIns="18288">
+            <a:spAutoFit/>
+          </a:bodyPr>
+          <a:lstStyle/>
+          <a:p>
+            <a:pPr algn="l" latinLnBrk="0">
+              <a:lnSpc>
+                <a:spcPct val="100000"/>
+              </a:lnSpc>
+            </a:pPr>
+            <a:r>
+              <a:rPr sz="2700" b="1">
+                <a:solidFill>
+                  <a:srgbClr val="0E4D5E"/>
+                </a:solidFill>
+                <a:latin typeface="Segoe UI Semibold"/>
+              </a:rPr>
+              <a:t>Reproducibility protocol</a:t>
+            </a:r>
+          </a:p>
+        </p:txBody>
+      </p:sp>
+      <p:sp>
+        <p:nvSpPr>
+          <p:cNvPr id="4" name="TextBox 3"/>
+          <p:cNvSpPr txBox="1"/>
+          <p:nvPr/>
+        </p:nvSpPr>
+        <p:spPr>
+          <a:xfrm>
+            <a:off x="10637215" y="6510528"/>
+            <a:ext cx="1097280" cy="274320"/>
+          </a:xfrm>
+          <a:prstGeom prst="rect">
+            <a:avLst/>
+          </a:prstGeom>
+          <a:noFill/>
+        </p:spPr>
+        <p:txBody>
+          <a:bodyPr wrap="square" anchor="t" lIns="27432" rIns="27432" tIns="18288" bIns="18288">
+            <a:spAutoFit/>
+          </a:bodyPr>
+          <a:lstStyle/>
+          <a:p>
+            <a:pPr algn="r" latinLnBrk="0">
+              <a:lnSpc>
+                <a:spcPct val="100000"/>
+              </a:lnSpc>
+            </a:pPr>
+            <a:r>
+              <a:rPr sz="1000" b="0">
+                <a:solidFill>
+                  <a:srgbClr val="6E6A60"/>
+                </a:solidFill>
+                <a:latin typeface="Segoe UI"/>
+              </a:rPr>
+              <a:t>19 / 19</a:t>
+            </a:r>
+          </a:p>
+        </p:txBody>
+      </p:sp>
+      <p:sp>
+        <p:nvSpPr>
+          <p:cNvPr id="5" name="TextBox 4"/>
+          <p:cNvSpPr txBox="1"/>
+          <p:nvPr/>
+        </p:nvSpPr>
+        <p:spPr>
+          <a:xfrm>
+            <a:off x="502920" y="6510528"/>
+            <a:ext cx="4572000" cy="274320"/>
+          </a:xfrm>
+          <a:prstGeom prst="rect">
+            <a:avLst/>
+          </a:prstGeom>
+          <a:noFill/>
+        </p:spPr>
+        <p:txBody>
+          <a:bodyPr wrap="square" anchor="t" lIns="27432" rIns="27432" tIns="18288" bIns="18288">
+            <a:spAutoFit/>
+          </a:bodyPr>
+          <a:lstStyle/>
+          <a:p>
+            <a:pPr algn="l" latinLnBrk="0">
+              <a:lnSpc>
+                <a:spcPct val="100000"/>
+              </a:lnSpc>
+            </a:pPr>
+            <a:r>
+              <a:rPr sz="1000" b="0">
+                <a:solidFill>
+                  <a:srgbClr val="6E6A60"/>
+                </a:solidFill>
+                <a:latin typeface="Segoe UI"/>
+              </a:rPr>
+              <a:t>Project 8 - Entanglement in Online Choir</a:t>
+            </a:r>
+          </a:p>
+        </p:txBody>
+      </p:sp>
+      <p:sp>
+        <p:nvSpPr>
+          <p:cNvPr id="6" name="Rounded Rectangle 5"/>
+          <p:cNvSpPr/>
+          <p:nvPr/>
+        </p:nvSpPr>
+        <p:spPr>
+          <a:xfrm>
+            <a:off x="502920" y="1234440"/>
+            <a:ext cx="11185855" cy="777240"/>
+          </a:xfrm>
+          <a:prstGeom prst="roundRect">
+            <a:avLst>
+              <a:gd name="adj" fmla="val 4000"/>
+            </a:avLst>
+          </a:prstGeom>
+          <a:solidFill>
+            <a:srgbClr val="FDFBF5"/>
+          </a:solidFill>
+          <a:ln w="12700">
+            <a:solidFill>
+              <a:srgbClr val="CBD9DD"/>
+            </a:solidFill>
+          </a:ln>
+        </p:spPr>
+        <p:style>
+          <a:lnRef idx="1">
+            <a:schemeClr val="accent1"/>
+          </a:lnRef>
+          <a:fillRef idx="3">
+            <a:schemeClr val="accent1"/>
+          </a:fillRef>
+          <a:effectRef idx="2">
+            <a:schemeClr val="accent1"/>
+          </a:effectRef>
+          <a:fontRef idx="minor">
+            <a:schemeClr val="lt1"/>
+          </a:fontRef>
+        </p:style>
+        <p:txBody>
+          <a:bodyPr rtlCol="0" anchor="t" wrap="square" lIns="201168" rIns="201168" tIns="146304"/>
+          <a:lstStyle/>
+          <a:p>
+            <a:pPr algn="l" latinLnBrk="0">
+              <a:spcAft>
+                <a:spcPts val="600"/>
+              </a:spcAft>
+            </a:pPr>
+            <a:r>
+              <a:rPr sz="1400" b="1">
+                <a:solidFill>
+                  <a:srgbClr val="0E4D5E"/>
+                </a:solidFill>
+                <a:latin typeface="Segoe UI Semibold"/>
+              </a:rPr>
+              <a:t>Regenerate</a:t>
+            </a:r>
+          </a:p>
+          <a:p>
+            <a:pPr algn="l" latinLnBrk="0">
+              <a:spcAft>
+                <a:spcPts val="400"/>
+              </a:spcAft>
+            </a:pPr>
+            <a:r>
+              <a:rPr sz="1250" b="0">
+                <a:solidFill>
+                  <a:srgbClr val="24262E"/>
+                </a:solidFill>
+                <a:latin typeface="Segoe UI"/>
+              </a:rPr>
+              <a:t>`make reproduce` rebuilds report-stage results and the final PDF.</a:t>
+            </a:r>
+          </a:p>
+        </p:txBody>
+      </p:sp>
+      <p:sp>
+        <p:nvSpPr>
+          <p:cNvPr id="7" name="Rounded Rectangle 6"/>
+          <p:cNvSpPr/>
+          <p:nvPr/>
+        </p:nvSpPr>
+        <p:spPr>
+          <a:xfrm>
+            <a:off x="502920" y="2121408"/>
+            <a:ext cx="11185855" cy="777240"/>
+          </a:xfrm>
+          <a:prstGeom prst="roundRect">
+            <a:avLst>
+              <a:gd name="adj" fmla="val 4000"/>
+            </a:avLst>
+          </a:prstGeom>
+          <a:solidFill>
+            <a:srgbClr val="FDFBF5"/>
+          </a:solidFill>
+          <a:ln w="12700">
+            <a:solidFill>
+              <a:srgbClr val="CBD9DD"/>
+            </a:solidFill>
+          </a:ln>
+        </p:spPr>
+        <p:style>
+          <a:lnRef idx="1">
+            <a:schemeClr val="accent1"/>
+          </a:lnRef>
+          <a:fillRef idx="3">
+            <a:schemeClr val="accent1"/>
+          </a:fillRef>
+          <a:effectRef idx="2">
+            <a:schemeClr val="accent1"/>
+          </a:effectRef>
+          <a:fontRef idx="minor">
+            <a:schemeClr val="lt1"/>
+          </a:fontRef>
+        </p:style>
+        <p:txBody>
+          <a:bodyPr rtlCol="0" anchor="t" wrap="square" lIns="201168" rIns="201168" tIns="146304"/>
+          <a:lstStyle/>
+          <a:p>
+            <a:pPr algn="l" latinLnBrk="0">
+              <a:spcAft>
+                <a:spcPts val="600"/>
+              </a:spcAft>
+            </a:pPr>
+            <a:r>
+              <a:rPr sz="1400" b="1">
+                <a:solidFill>
+                  <a:srgbClr val="0E4D5E"/>
+                </a:solidFill>
+                <a:latin typeface="Segoe UI Semibold"/>
+              </a:rPr>
+              <a:t>H1</a:t>
+            </a:r>
+          </a:p>
+          <a:p>
+            <a:pPr algn="l" latinLnBrk="0">
+              <a:spcAft>
+                <a:spcPts val="400"/>
+              </a:spcAft>
+            </a:pPr>
+            <a:r>
+              <a:rPr sz="1250" b="0">
+                <a:solidFill>
+                  <a:srgbClr val="24262E"/>
+                </a:solidFill>
+                <a:latin typeface="Segoe UI"/>
+              </a:rPr>
+              <a:t>Exact paired sign test plus seeded bootstrap.</a:t>
+            </a:r>
+          </a:p>
+        </p:txBody>
+      </p:sp>
+      <p:sp>
+        <p:nvSpPr>
+          <p:cNvPr id="8" name="Rounded Rectangle 7"/>
+          <p:cNvSpPr/>
+          <p:nvPr/>
+        </p:nvSpPr>
+        <p:spPr>
+          <a:xfrm>
+            <a:off x="502920" y="3008376"/>
+            <a:ext cx="11185855" cy="777240"/>
+          </a:xfrm>
+          <a:prstGeom prst="roundRect">
+            <a:avLst>
+              <a:gd name="adj" fmla="val 4000"/>
+            </a:avLst>
+          </a:prstGeom>
+          <a:solidFill>
+            <a:srgbClr val="FDFBF5"/>
+          </a:solidFill>
+          <a:ln w="12700">
+            <a:solidFill>
+              <a:srgbClr val="CBD9DD"/>
+            </a:solidFill>
+          </a:ln>
+        </p:spPr>
+        <p:style>
+          <a:lnRef idx="1">
+            <a:schemeClr val="accent1"/>
+          </a:lnRef>
+          <a:fillRef idx="3">
+            <a:schemeClr val="accent1"/>
+          </a:fillRef>
+          <a:effectRef idx="2">
+            <a:schemeClr val="accent1"/>
+          </a:effectRef>
+          <a:fontRef idx="minor">
+            <a:schemeClr val="lt1"/>
+          </a:fontRef>
+        </p:style>
+        <p:txBody>
+          <a:bodyPr rtlCol="0" anchor="t" wrap="square" lIns="201168" rIns="201168" tIns="146304"/>
+          <a:lstStyle/>
+          <a:p>
+            <a:pPr algn="l" latinLnBrk="0">
+              <a:spcAft>
+                <a:spcPts val="600"/>
+              </a:spcAft>
+            </a:pPr>
+            <a:r>
+              <a:rPr sz="1400" b="1">
+                <a:solidFill>
+                  <a:srgbClr val="0E4D5E"/>
+                </a:solidFill>
+                <a:latin typeface="Segoe UI Semibold"/>
+              </a:rPr>
+              <a:t>H2</a:t>
+            </a:r>
+          </a:p>
+          <a:p>
+            <a:pPr algn="l" latinLnBrk="0">
+              <a:spcAft>
+                <a:spcPts val="400"/>
+              </a:spcAft>
+            </a:pPr>
+            <a:r>
+              <a:rPr sz="1250" b="0">
+                <a:solidFill>
+                  <a:srgbClr val="24262E"/>
+                </a:solidFill>
+                <a:latin typeface="Segoe UI"/>
+              </a:rPr>
+              <a:t>1,000 matched random graphs per piece with plus-one p-values.</a:t>
+            </a:r>
+          </a:p>
+        </p:txBody>
+      </p:sp>
+      <p:sp>
+        <p:nvSpPr>
+          <p:cNvPr id="9" name="Rounded Rectangle 8"/>
+          <p:cNvSpPr/>
+          <p:nvPr/>
+        </p:nvSpPr>
+        <p:spPr>
+          <a:xfrm>
+            <a:off x="502920" y="3895344"/>
+            <a:ext cx="11185855" cy="777240"/>
+          </a:xfrm>
+          <a:prstGeom prst="roundRect">
+            <a:avLst>
+              <a:gd name="adj" fmla="val 4000"/>
+            </a:avLst>
+          </a:prstGeom>
+          <a:solidFill>
+            <a:srgbClr val="FDFBF5"/>
+          </a:solidFill>
+          <a:ln w="12700">
+            <a:solidFill>
+              <a:srgbClr val="CBD9DD"/>
+            </a:solidFill>
+          </a:ln>
+        </p:spPr>
+        <p:style>
+          <a:lnRef idx="1">
+            <a:schemeClr val="accent1"/>
+          </a:lnRef>
+          <a:fillRef idx="3">
+            <a:schemeClr val="accent1"/>
+          </a:fillRef>
+          <a:effectRef idx="2">
+            <a:schemeClr val="accent1"/>
+          </a:effectRef>
+          <a:fontRef idx="minor">
+            <a:schemeClr val="lt1"/>
+          </a:fontRef>
+        </p:style>
+        <p:txBody>
+          <a:bodyPr rtlCol="0" anchor="t" wrap="square" lIns="201168" rIns="201168" tIns="146304"/>
+          <a:lstStyle/>
+          <a:p>
+            <a:pPr algn="l" latinLnBrk="0">
+              <a:spcAft>
+                <a:spcPts val="600"/>
+              </a:spcAft>
+            </a:pPr>
+            <a:r>
+              <a:rPr sz="1400" b="1">
+                <a:solidFill>
+                  <a:srgbClr val="0E4D5E"/>
+                </a:solidFill>
+                <a:latin typeface="Segoe UI Semibold"/>
+              </a:rPr>
+              <a:t>H3</a:t>
+            </a:r>
+          </a:p>
+          <a:p>
+            <a:pPr algn="l" latinLnBrk="0">
+              <a:spcAft>
+                <a:spcPts val="400"/>
+              </a:spcAft>
+            </a:pPr>
+            <a:r>
+              <a:rPr sz="1250" b="0">
+                <a:solidFill>
+                  <a:srgbClr val="24262E"/>
+                </a:solidFill>
+                <a:latin typeface="Segoe UI"/>
+              </a:rPr>
+              <a:t>1,000 circular shifts per video with deterministic seeds.</a:t>
+            </a:r>
+          </a:p>
+        </p:txBody>
+      </p:sp>
+      <p:sp>
+        <p:nvSpPr>
+          <p:cNvPr id="10" name="Rounded Rectangle 9"/>
+          <p:cNvSpPr/>
+          <p:nvPr/>
+        </p:nvSpPr>
+        <p:spPr>
+          <a:xfrm>
+            <a:off x="502920" y="4782312"/>
+            <a:ext cx="11185855" cy="777240"/>
+          </a:xfrm>
+          <a:prstGeom prst="roundRect">
+            <a:avLst>
+              <a:gd name="adj" fmla="val 4000"/>
+            </a:avLst>
+          </a:prstGeom>
+          <a:solidFill>
+            <a:srgbClr val="FDFBF5"/>
+          </a:solidFill>
+          <a:ln w="12700">
+            <a:solidFill>
+              <a:srgbClr val="CBD9DD"/>
+            </a:solidFill>
+          </a:ln>
+        </p:spPr>
+        <p:style>
+          <a:lnRef idx="1">
+            <a:schemeClr val="accent1"/>
+          </a:lnRef>
+          <a:fillRef idx="3">
+            <a:schemeClr val="accent1"/>
+          </a:fillRef>
+          <a:effectRef idx="2">
+            <a:schemeClr val="accent1"/>
+          </a:effectRef>
+          <a:fontRef idx="minor">
+            <a:schemeClr val="lt1"/>
+          </a:fontRef>
+        </p:style>
+        <p:txBody>
+          <a:bodyPr rtlCol="0" anchor="t" wrap="square" lIns="201168" rIns="201168" tIns="146304"/>
+          <a:lstStyle/>
+          <a:p>
+            <a:pPr algn="l" latinLnBrk="0">
+              <a:spcAft>
+                <a:spcPts val="600"/>
+              </a:spcAft>
+            </a:pPr>
+            <a:r>
+              <a:rPr sz="1400" b="1">
+                <a:solidFill>
+                  <a:srgbClr val="0E4D5E"/>
+                </a:solidFill>
+                <a:latin typeface="Segoe UI Semibold"/>
+              </a:rPr>
+              <a:t>Environment</a:t>
+            </a:r>
+          </a:p>
+          <a:p>
+            <a:pPr algn="l" latinLnBrk="0">
+              <a:spcAft>
+                <a:spcPts val="400"/>
+              </a:spcAft>
+            </a:pPr>
+            <a:r>
+              <a:rPr sz="1250" b="0">
+                <a:solidFill>
+                  <a:srgbClr val="24262E"/>
+                </a:solidFill>
+                <a:latin typeface="Segoe UI"/>
+              </a:rPr>
+              <a:t>Python 3.11.9 and locked dependencies.</a:t>
             </a:r>
           </a:p>
         </p:txBody>
@@ -6219,7 +8178,7 @@
                 </a:solidFill>
                 <a:latin typeface="Segoe UI Semibold"/>
               </a:rPr>
-              <a:t>QUESTION</a:t>
+              <a:t>GOALS</a:t>
             </a:r>
           </a:p>
         </p:txBody>
@@ -6258,7 +8217,7 @@
                 </a:solidFill>
                 <a:latin typeface="Segoe UI Semibold"/>
               </a:rPr>
-              <a:t>The network is part of the instrument</a:t>
+              <a:t>What we set out to test</a:t>
             </a:r>
           </a:p>
         </p:txBody>
@@ -6297,7 +8256,7 @@
                 </a:solidFill>
                 <a:latin typeface="Segoe UI"/>
               </a:rPr>
-              <a:t>2 / 15</a:t>
+              <a:t>2 / 19</a:t>
             </a:r>
           </a:p>
         </p:txBody>
@@ -6349,8 +8308,8 @@
         </p:nvSpPr>
         <p:spPr>
           <a:xfrm>
-            <a:off x="502920" y="1325880"/>
-            <a:ext cx="11185855" cy="548640"/>
+            <a:off x="502920" y="1234440"/>
+            <a:ext cx="11185855" cy="502920"/>
           </a:xfrm>
           <a:prstGeom prst="rect">
             <a:avLst/>
@@ -6369,13 +8328,13 @@
               </a:lnSpc>
             </a:pPr>
             <a:r>
-              <a:rPr sz="1900" b="1">
+              <a:rPr sz="1800" b="1">
                 <a:solidFill>
                   <a:srgbClr val="0E4D5E"/>
                 </a:solidFill>
                 <a:latin typeface="Segoe UI"/>
               </a:rPr>
-              <a:t>We measured what latency does to choir togetherness, with one score over time: E(t).</a:t>
+              <a:t>Measure network effects on choir coordination and deliver an auditable analysis system.</a:t>
             </a:r>
           </a:p>
         </p:txBody>
@@ -6388,8 +8347,8 @@
         </p:nvSpPr>
         <p:spPr>
           <a:xfrm>
-            <a:off x="502920" y="2148840"/>
-            <a:ext cx="11185855" cy="868680"/>
+            <a:off x="502920" y="1965960"/>
+            <a:ext cx="11185855" cy="914400"/>
           </a:xfrm>
           <a:prstGeom prst="roundRect">
             <a:avLst>
@@ -6435,7 +8394,7 @@
                 </a:solidFill>
                 <a:latin typeface="Segoe UI Semibold"/>
               </a:rPr>
-              <a:t>H1</a:t>
+              <a:t>H1 - latency</a:t>
             </a:r>
           </a:p>
           <a:p>
@@ -6451,7 +8410,7 @@
                 </a:solidFill>
                 <a:latin typeface="Segoe UI"/>
               </a:rPr>
-              <a:t>Higher latency reduces coordination. Metric: zero-lag onset synchrony; predicted to fall.</a:t>
+              <a:t>Higher latency reduces coordination; primary outcome: zero-lag onset synchrony.</a:t>
             </a:r>
           </a:p>
         </p:txBody>
@@ -6464,8 +8423,8 @@
         </p:nvSpPr>
         <p:spPr>
           <a:xfrm>
-            <a:off x="502920" y="3154680"/>
-            <a:ext cx="11185855" cy="868680"/>
+            <a:off x="502920" y="3017520"/>
+            <a:ext cx="11185855" cy="914400"/>
           </a:xfrm>
           <a:prstGeom prst="roundRect">
             <a:avLst>
@@ -6511,7 +8470,7 @@
                 </a:solidFill>
                 <a:latin typeface="Segoe UI Semibold"/>
               </a:rPr>
-              <a:t>H2</a:t>
+              <a:t>H2 - leadership</a:t>
             </a:r>
           </a:p>
           <a:p>
@@ -6527,7 +8486,7 @@
                 </a:solidFill>
                 <a:latin typeface="Segoe UI"/>
               </a:rPr>
-              <a:t>Influence networks show leadership structure. Metric: out-degree Gini vs a matched random null; predicted above null.</a:t>
+              <a:t>Influence networks show leadership structure; outcome: out-degree Gini versus matched random graphs.</a:t>
             </a:r>
           </a:p>
         </p:txBody>
@@ -6540,8 +8499,8 @@
         </p:nvSpPr>
         <p:spPr>
           <a:xfrm>
-            <a:off x="502920" y="4160520"/>
-            <a:ext cx="11185855" cy="868680"/>
+            <a:off x="502920" y="4069080"/>
+            <a:ext cx="11185855" cy="914400"/>
           </a:xfrm>
           <a:prstGeom prst="roundRect">
             <a:avLst>
@@ -6587,7 +8546,7 @@
                 </a:solidFill>
                 <a:latin typeface="Segoe UI Semibold"/>
               </a:rPr>
-              <a:t>H3</a:t>
+              <a:t>H3 - visual information</a:t>
             </a:r>
           </a:p>
           <a:p>
@@ -6603,7 +8562,7 @@
                 </a:solidFill>
                 <a:latin typeface="Segoe UI"/>
               </a:rPr>
-              <a:t>Visual body signals add information beyond audio. Metric: first visual-onset coupling; the full test needs paired data.</a:t>
+              <a:t>Visual signals add information beyond audio; the full test compares audio-only with audio-plus-visual prediction.</a:t>
             </a:r>
           </a:p>
         </p:txBody>
@@ -6657,7 +8616,7 @@
                 </a:solidFill>
                 <a:latin typeface="Segoe UI Semibold"/>
               </a:rPr>
-              <a:t>Three testable claims, each with a metric and a direction fixed in advance.</a:t>
+              <a:t>Directions were declared at project start; metric revisions are dated and documented.</a:t>
             </a:r>
           </a:p>
         </p:txBody>
@@ -6722,7 +8681,7 @@
                 </a:solidFill>
                 <a:latin typeface="Segoe UI Semibold"/>
               </a:rPr>
-              <a:t>DATA</a:t>
+              <a:t>RELATED WORK</a:t>
             </a:r>
           </a:p>
         </p:txBody>
@@ -6761,7 +8720,7 @@
                 </a:solidFill>
                 <a:latin typeface="Segoe UI Semibold"/>
               </a:rPr>
-              <a:t>Three tiers, one honest constraint</a:t>
+              <a:t>Three foundations, one research gap</a:t>
             </a:r>
           </a:p>
         </p:txBody>
@@ -6800,7 +8759,7 @@
                 </a:solidFill>
                 <a:latin typeface="Segoe UI"/>
               </a:rPr>
-              <a:t>3 / 15</a:t>
+              <a:t>3 / 19</a:t>
             </a:r>
           </a:p>
         </p:txBody>
@@ -6853,7 +8812,7 @@
         <p:spPr>
           <a:xfrm>
             <a:off x="502920" y="1371600"/>
-            <a:ext cx="11185855" cy="868680"/>
+            <a:ext cx="11185855" cy="914400"/>
           </a:xfrm>
           <a:prstGeom prst="roundRect">
             <a:avLst>
@@ -6899,7 +8858,7 @@
                 </a:solidFill>
                 <a:latin typeface="Segoe UI Semibold"/>
               </a:rPr>
-              <a:t>Tier 1 - video</a:t>
+              <a:t>Entanglement</a:t>
             </a:r>
           </a:p>
           <a:p>
@@ -6915,7 +8874,7 @@
                 </a:solidFill>
                 <a:latin typeface="Segoe UI"/>
               </a:rPr>
-              <a:t>29 YouTube virtual-choir videos, 18 pose-usable. Visual signals: sway and breathing gestures.</a:t>
+              <a:t>Temporal alignment has been measured in organizational communication networks.</a:t>
             </a:r>
           </a:p>
         </p:txBody>
@@ -6928,8 +8887,8 @@
         </p:nvSpPr>
         <p:spPr>
           <a:xfrm>
-            <a:off x="502920" y="2377440"/>
-            <a:ext cx="11185855" cy="868680"/>
+            <a:off x="502920" y="2423160"/>
+            <a:ext cx="11185855" cy="914400"/>
           </a:xfrm>
           <a:prstGeom prst="roundRect">
             <a:avLst>
@@ -6975,7 +8934,7 @@
                 </a:solidFill>
                 <a:latin typeface="Segoe UI Semibold"/>
               </a:rPr>
-              <a:t>Tier 2 - multitrack</a:t>
+              <a:t>Honest Signals</a:t>
             </a:r>
           </a:p>
           <a:p>
@@ -6991,7 +8950,7 @@
                 </a:solidFill>
                 <a:latin typeface="Segoe UI"/>
               </a:rPr>
-              <a:t>Dagstuhl (5 pieces), ESMUC (3), ChoralSynth (20, synthetic). Per-singer audio and influence networks.</a:t>
+              <a:t>Activity, consistency, influence, and mimicry can reveal group coordination.</a:t>
             </a:r>
           </a:p>
         </p:txBody>
@@ -7004,8 +8963,8 @@
         </p:nvSpPr>
         <p:spPr>
           <a:xfrm>
-            <a:off x="502920" y="3383280"/>
-            <a:ext cx="11185855" cy="868680"/>
+            <a:off x="502920" y="3474720"/>
+            <a:ext cx="11185855" cy="914400"/>
           </a:xfrm>
           <a:prstGeom prst="roundRect">
             <a:avLst>
@@ -7051,7 +9010,7 @@
                 </a:solidFill>
                 <a:latin typeface="Segoe UI Semibold"/>
               </a:rPr>
-              <a:t>Tier 3 - injection</a:t>
+              <a:t>Choir and NMP research</a:t>
             </a:r>
           </a:p>
           <a:p>
@@ -7067,71 +9026,34 @@
                 </a:solidFill>
                 <a:latin typeface="Segoe UI"/>
               </a:rPr>
-              <a:t>Controlled latency injection on Tier 2: ground-truth latency variation, each piece its own control.</a:t>
-            </a:r>
-          </a:p>
-        </p:txBody>
-      </p:sp>
-      <p:sp>
-        <p:nvSpPr>
-          <p:cNvPr id="9" name="TextBox 8"/>
-          <p:cNvSpPr txBox="1"/>
-          <p:nvPr/>
-        </p:nvSpPr>
-        <p:spPr>
-          <a:xfrm>
-            <a:off x="502920" y="4572000"/>
-            <a:ext cx="11185855" cy="1097280"/>
-          </a:xfrm>
-          <a:prstGeom prst="rect">
-            <a:avLst/>
-          </a:prstGeom>
-          <a:noFill/>
-        </p:spPr>
-        <p:txBody>
-          <a:bodyPr wrap="square" anchor="t" lIns="27432" rIns="27432" tIns="18288" bIns="18288">
-            <a:spAutoFit/>
-          </a:bodyPr>
-          <a:lstStyle/>
-          <a:p>
-            <a:pPr algn="l" latinLnBrk="0">
-              <a:lnSpc>
-                <a:spcPct val="100000"/>
-              </a:lnSpc>
-            </a:pPr>
-            <a:r>
-              <a:rPr sz="1500" b="1">
-                <a:solidFill>
-                  <a:srgbClr val="0E4D5E"/>
-                </a:solidFill>
-                <a:latin typeface="Segoe UI"/>
-              </a:rPr>
-              <a:t>The constraint: no piece has audio, video, and network signals together. Tier 2 has audio without video; Tier 1 has video without per-singer audio. Every claim respects that boundary.</a:t>
-            </a:r>
-          </a:p>
-        </p:txBody>
-      </p:sp>
-      <p:sp>
-        <p:nvSpPr>
-          <p:cNvPr id="10" name="Rounded Rectangle 9"/>
+              <a:t>Multitrack corpora and latency studies provide audio evidence, but no integrated acoustic, visual, and influence measure.</a:t>
+            </a:r>
+          </a:p>
+        </p:txBody>
+      </p:sp>
+      <p:sp>
+        <p:nvSpPr>
+          <p:cNvPr id="9" name="Rounded Rectangle 8"/>
           <p:cNvSpPr/>
           <p:nvPr/>
         </p:nvSpPr>
         <p:spPr>
           <a:xfrm>
-            <a:off x="502920" y="6144768"/>
-            <a:ext cx="11185855" cy="475488"/>
+            <a:off x="502920" y="4526280"/>
+            <a:ext cx="11185855" cy="914400"/>
           </a:xfrm>
           <a:prstGeom prst="roundRect">
             <a:avLst>
-              <a:gd name="adj" fmla="val 6000"/>
+              <a:gd name="adj" fmla="val 4000"/>
             </a:avLst>
           </a:prstGeom>
           <a:solidFill>
-            <a:srgbClr val="0E4D5E"/>
+            <a:srgbClr val="FDFBF5"/>
           </a:solidFill>
-          <a:ln>
-            <a:noFill/>
+          <a:ln w="12700">
+            <a:solidFill>
+              <a:srgbClr val="CBD9DD"/>
+            </a:solidFill>
           </a:ln>
         </p:spPr>
         <p:style>
@@ -7149,18 +9071,38 @@
           </a:fontRef>
         </p:style>
         <p:txBody>
-          <a:bodyPr rtlCol="0" anchor="ctr" wrap="square"/>
-          <a:lstStyle/>
-          <a:p>
-            <a:pPr algn="ctr" latinLnBrk="0"/>
+          <a:bodyPr rtlCol="0" anchor="t" wrap="square" lIns="201168" rIns="201168" tIns="146304"/>
+          <a:lstStyle/>
+          <a:p>
+            <a:pPr algn="l" latinLnBrk="0">
+              <a:spcAft>
+                <a:spcPts val="600"/>
+              </a:spcAft>
+            </a:pPr>
             <a:r>
               <a:rPr sz="1400" b="1">
                 <a:solidFill>
-                  <a:srgbClr val="FDFBF5"/>
+                  <a:srgbClr val="0E4D5E"/>
                 </a:solidFill>
                 <a:latin typeface="Segoe UI Semibold"/>
               </a:rPr>
-              <a:t>Two real corpora, one synthetic control, one visual corpus, each used for what it is good for.</a:t>
+              <a:t>Research gap</a:t>
+            </a:r>
+          </a:p>
+          <a:p>
+            <a:pPr algn="l" latinLnBrk="0">
+              <a:spcAft>
+                <a:spcPts val="400"/>
+              </a:spcAft>
+            </a:pPr>
+            <a:r>
+              <a:rPr sz="1350" b="0">
+                <a:solidFill>
+                  <a:srgbClr val="24262E"/>
+                </a:solidFill>
+                <a:latin typeface="Segoe UI"/>
+              </a:rPr>
+              <a:t>Adapt these ideas to singing, test them against controlled degradation, and state where the data cannot support a claim.</a:t>
             </a:r>
           </a:p>
         </p:txBody>
@@ -7225,7 +9167,7 @@
                 </a:solidFill>
                 <a:latin typeface="Segoe UI Semibold"/>
               </a:rPr>
-              <a:t>METHOD</a:t>
+              <a:t>PROJECT</a:t>
             </a:r>
           </a:p>
         </p:txBody>
@@ -7264,7 +9206,7 @@
                 </a:solidFill>
                 <a:latin typeface="Segoe UI Semibold"/>
               </a:rPr>
-              <a:t>E(t) and the latency grid</a:t>
+              <a:t>Whole-project structure</a:t>
             </a:r>
           </a:p>
         </p:txBody>
@@ -7303,7 +9245,7 @@
                 </a:solidFill>
                 <a:latin typeface="Segoe UI"/>
               </a:rPr>
-              <a:t>4 / 15</a:t>
+              <a:t>4 / 19</a:t>
             </a:r>
           </a:p>
         </p:txBody>
@@ -7347,519 +9289,33 @@
           </a:p>
         </p:txBody>
       </p:sp>
-      <p:sp>
-        <p:nvSpPr>
-          <p:cNvPr id="6" name="TextBox 5"/>
-          <p:cNvSpPr txBox="1"/>
-          <p:nvPr/>
-        </p:nvSpPr>
-        <p:spPr>
-          <a:xfrm>
-            <a:off x="502920" y="1280160"/>
-            <a:ext cx="11185855" cy="457200"/>
+      <p:pic>
+        <p:nvPicPr>
+          <p:cNvPr id="6" name="Picture 5" descr="project_structure.png"/>
+          <p:cNvPicPr>
+            <a:picLocks noChangeAspect="1"/>
+          </p:cNvPicPr>
+          <p:nvPr/>
+        </p:nvPicPr>
+        <p:blipFill>
+          <a:blip r:embed="rId2"/>
+          <a:stretch>
+            <a:fillRect/>
+          </a:stretch>
+        </p:blipFill>
+        <p:spPr>
+          <a:xfrm>
+            <a:off x="502920" y="2408982"/>
+            <a:ext cx="11185855" cy="2542956"/>
           </a:xfrm>
           <a:prstGeom prst="rect">
             <a:avLst/>
           </a:prstGeom>
-          <a:noFill/>
-        </p:spPr>
-        <p:txBody>
-          <a:bodyPr wrap="square" anchor="t" lIns="27432" rIns="27432" tIns="18288" bIns="18288">
-            <a:spAutoFit/>
-          </a:bodyPr>
-          <a:lstStyle/>
-          <a:p>
-            <a:pPr algn="l" latinLnBrk="0">
-              <a:lnSpc>
-                <a:spcPct val="100000"/>
-              </a:lnSpc>
-            </a:pPr>
-            <a:r>
-              <a:rPr sz="1500" b="1">
-                <a:solidFill>
-                  <a:srgbClr val="0E4D5E"/>
-                </a:solidFill>
-                <a:latin typeface="Segoe UI"/>
-              </a:rPr>
-              <a:t>Each clean piece is degraded through five regimes; every metric is recomputed per piece and regime.</a:t>
-            </a:r>
-          </a:p>
-        </p:txBody>
-      </p:sp>
+        </p:spPr>
+      </p:pic>
       <p:sp>
         <p:nvSpPr>
           <p:cNvPr id="7" name="Rounded Rectangle 6"/>
-          <p:cNvSpPr/>
-          <p:nvPr/>
-        </p:nvSpPr>
-        <p:spPr>
-          <a:xfrm>
-            <a:off x="502920" y="1920240"/>
-            <a:ext cx="2121408" cy="1234440"/>
-          </a:xfrm>
-          <a:prstGeom prst="roundRect">
-            <a:avLst>
-              <a:gd name="adj" fmla="val 6000"/>
-            </a:avLst>
-          </a:prstGeom>
-          <a:solidFill>
-            <a:srgbClr val="FDFBF5"/>
-          </a:solidFill>
-          <a:ln w="12700">
-            <a:solidFill>
-              <a:srgbClr val="CBD9DD"/>
-            </a:solidFill>
-          </a:ln>
-        </p:spPr>
-        <p:style>
-          <a:lnRef idx="1">
-            <a:schemeClr val="accent1"/>
-          </a:lnRef>
-          <a:fillRef idx="3">
-            <a:schemeClr val="accent1"/>
-          </a:fillRef>
-          <a:effectRef idx="2">
-            <a:schemeClr val="accent1"/>
-          </a:effectRef>
-          <a:fontRef idx="minor">
-            <a:schemeClr val="lt1"/>
-          </a:fontRef>
-        </p:style>
-        <p:txBody>
-          <a:bodyPr rtlCol="0" anchor="ctr" wrap="square"/>
-          <a:lstStyle/>
-          <a:p>
-            <a:pPr algn="ctr" latinLnBrk="0"/>
-            <a:r>
-              <a:rPr sz="1600" b="1">
-                <a:solidFill>
-                  <a:srgbClr val="0E4D5E"/>
-                </a:solidFill>
-                <a:latin typeface="Segoe UI Semibold"/>
-              </a:rPr>
-              <a:t>clean</a:t>
-            </a:r>
-          </a:p>
-          <a:p>
-            <a:pPr algn="ctr" latinLnBrk="0"/>
-            <a:r>
-              <a:rPr sz="1150" b="0">
-                <a:solidFill>
-                  <a:srgbClr val="6E6A60"/>
-                </a:solidFill>
-                <a:latin typeface="Segoe UI"/>
-              </a:rPr>
-              <a:t>0 ms - 0 ms - 0%</a:t>
-            </a:r>
-          </a:p>
-        </p:txBody>
-      </p:sp>
-      <p:sp>
-        <p:nvSpPr>
-          <p:cNvPr id="8" name="Rounded Rectangle 7"/>
-          <p:cNvSpPr/>
-          <p:nvPr/>
-        </p:nvSpPr>
-        <p:spPr>
-          <a:xfrm>
-            <a:off x="2734056" y="1920240"/>
-            <a:ext cx="2121408" cy="1234440"/>
-          </a:xfrm>
-          <a:prstGeom prst="roundRect">
-            <a:avLst>
-              <a:gd name="adj" fmla="val 6000"/>
-            </a:avLst>
-          </a:prstGeom>
-          <a:solidFill>
-            <a:srgbClr val="FDFBF5"/>
-          </a:solidFill>
-          <a:ln w="12700">
-            <a:solidFill>
-              <a:srgbClr val="CBD9DD"/>
-            </a:solidFill>
-          </a:ln>
-        </p:spPr>
-        <p:style>
-          <a:lnRef idx="1">
-            <a:schemeClr val="accent1"/>
-          </a:lnRef>
-          <a:fillRef idx="3">
-            <a:schemeClr val="accent1"/>
-          </a:fillRef>
-          <a:effectRef idx="2">
-            <a:schemeClr val="accent1"/>
-          </a:effectRef>
-          <a:fontRef idx="minor">
-            <a:schemeClr val="lt1"/>
-          </a:fontRef>
-        </p:style>
-        <p:txBody>
-          <a:bodyPr rtlCol="0" anchor="ctr" wrap="square"/>
-          <a:lstStyle/>
-          <a:p>
-            <a:pPr algn="ctr" latinLnBrk="0"/>
-            <a:r>
-              <a:rPr sz="1600" b="1">
-                <a:solidFill>
-                  <a:srgbClr val="0E4D5E"/>
-                </a:solidFill>
-                <a:latin typeface="Segoe UI Semibold"/>
-              </a:rPr>
-              <a:t>in-person</a:t>
-            </a:r>
-          </a:p>
-          <a:p>
-            <a:pPr algn="ctr" latinLnBrk="0"/>
-            <a:r>
-              <a:rPr sz="1150" b="0">
-                <a:solidFill>
-                  <a:srgbClr val="6E6A60"/>
-                </a:solidFill>
-                <a:latin typeface="Segoe UI"/>
-              </a:rPr>
-              <a:t>25 ms - 10 ms - 0%</a:t>
-            </a:r>
-          </a:p>
-        </p:txBody>
-      </p:sp>
-      <p:sp>
-        <p:nvSpPr>
-          <p:cNvPr id="9" name="Rounded Rectangle 8"/>
-          <p:cNvSpPr/>
-          <p:nvPr/>
-        </p:nvSpPr>
-        <p:spPr>
-          <a:xfrm>
-            <a:off x="4965192" y="1920240"/>
-            <a:ext cx="2121408" cy="1234440"/>
-          </a:xfrm>
-          <a:prstGeom prst="roundRect">
-            <a:avLst>
-              <a:gd name="adj" fmla="val 6000"/>
-            </a:avLst>
-          </a:prstGeom>
-          <a:solidFill>
-            <a:srgbClr val="FDFBF5"/>
-          </a:solidFill>
-          <a:ln w="12700">
-            <a:solidFill>
-              <a:srgbClr val="CBD9DD"/>
-            </a:solidFill>
-          </a:ln>
-        </p:spPr>
-        <p:style>
-          <a:lnRef idx="1">
-            <a:schemeClr val="accent1"/>
-          </a:lnRef>
-          <a:fillRef idx="3">
-            <a:schemeClr val="accent1"/>
-          </a:fillRef>
-          <a:effectRef idx="2">
-            <a:schemeClr val="accent1"/>
-          </a:effectRef>
-          <a:fontRef idx="minor">
-            <a:schemeClr val="lt1"/>
-          </a:fontRef>
-        </p:style>
-        <p:txBody>
-          <a:bodyPr rtlCol="0" anchor="ctr" wrap="square"/>
-          <a:lstStyle/>
-          <a:p>
-            <a:pPr algn="ctr" latinLnBrk="0"/>
-            <a:r>
-              <a:rPr sz="1600" b="1">
-                <a:solidFill>
-                  <a:srgbClr val="0E4D5E"/>
-                </a:solidFill>
-                <a:latin typeface="Segoe UI Semibold"/>
-              </a:rPr>
-              <a:t>Jamulus LAN</a:t>
-            </a:r>
-          </a:p>
-          <a:p>
-            <a:pPr algn="ctr" latinLnBrk="0"/>
-            <a:r>
-              <a:rPr sz="1150" b="0">
-                <a:solidFill>
-                  <a:srgbClr val="6E6A60"/>
-                </a:solidFill>
-                <a:latin typeface="Segoe UI"/>
-              </a:rPr>
-              <a:t>47 ms - 46 ms - 1%</a:t>
-            </a:r>
-          </a:p>
-        </p:txBody>
-      </p:sp>
-      <p:sp>
-        <p:nvSpPr>
-          <p:cNvPr id="10" name="Rounded Rectangle 9"/>
-          <p:cNvSpPr/>
-          <p:nvPr/>
-        </p:nvSpPr>
-        <p:spPr>
-          <a:xfrm>
-            <a:off x="7196328" y="1920240"/>
-            <a:ext cx="2121408" cy="1234440"/>
-          </a:xfrm>
-          <a:prstGeom prst="roundRect">
-            <a:avLst>
-              <a:gd name="adj" fmla="val 6000"/>
-            </a:avLst>
-          </a:prstGeom>
-          <a:solidFill>
-            <a:srgbClr val="FDFBF5"/>
-          </a:solidFill>
-          <a:ln w="12700">
-            <a:solidFill>
-              <a:srgbClr val="CBD9DD"/>
-            </a:solidFill>
-          </a:ln>
-        </p:spPr>
-        <p:style>
-          <a:lnRef idx="1">
-            <a:schemeClr val="accent1"/>
-          </a:lnRef>
-          <a:fillRef idx="3">
-            <a:schemeClr val="accent1"/>
-          </a:fillRef>
-          <a:effectRef idx="2">
-            <a:schemeClr val="accent1"/>
-          </a:effectRef>
-          <a:fontRef idx="minor">
-            <a:schemeClr val="lt1"/>
-          </a:fontRef>
-        </p:style>
-        <p:txBody>
-          <a:bodyPr rtlCol="0" anchor="ctr" wrap="square"/>
-          <a:lstStyle/>
-          <a:p>
-            <a:pPr algn="ctr" latinLnBrk="0"/>
-            <a:r>
-              <a:rPr sz="1600" b="1">
-                <a:solidFill>
-                  <a:srgbClr val="0E4D5E"/>
-                </a:solidFill>
-                <a:latin typeface="Segoe UI Semibold"/>
-              </a:rPr>
-              <a:t>Jamulus WAN</a:t>
-            </a:r>
-          </a:p>
-          <a:p>
-            <a:pPr algn="ctr" latinLnBrk="0"/>
-            <a:r>
-              <a:rPr sz="1150" b="0">
-                <a:solidFill>
-                  <a:srgbClr val="6E6A60"/>
-                </a:solidFill>
-                <a:latin typeface="Segoe UI"/>
-              </a:rPr>
-              <a:t>83 ms - 57 ms - 3%</a:t>
-            </a:r>
-          </a:p>
-        </p:txBody>
-      </p:sp>
-      <p:sp>
-        <p:nvSpPr>
-          <p:cNvPr id="11" name="Rounded Rectangle 10"/>
-          <p:cNvSpPr/>
-          <p:nvPr/>
-        </p:nvSpPr>
-        <p:spPr>
-          <a:xfrm>
-            <a:off x="9427464" y="1920240"/>
-            <a:ext cx="2121408" cy="1234440"/>
-          </a:xfrm>
-          <a:prstGeom prst="roundRect">
-            <a:avLst>
-              <a:gd name="adj" fmla="val 6000"/>
-            </a:avLst>
-          </a:prstGeom>
-          <a:solidFill>
-            <a:srgbClr val="FDFBF5"/>
-          </a:solidFill>
-          <a:ln w="12700">
-            <a:solidFill>
-              <a:srgbClr val="CBD9DD"/>
-            </a:solidFill>
-          </a:ln>
-        </p:spPr>
-        <p:style>
-          <a:lnRef idx="1">
-            <a:schemeClr val="accent1"/>
-          </a:lnRef>
-          <a:fillRef idx="3">
-            <a:schemeClr val="accent1"/>
-          </a:fillRef>
-          <a:effectRef idx="2">
-            <a:schemeClr val="accent1"/>
-          </a:effectRef>
-          <a:fontRef idx="minor">
-            <a:schemeClr val="lt1"/>
-          </a:fontRef>
-        </p:style>
-        <p:txBody>
-          <a:bodyPr rtlCol="0" anchor="ctr" wrap="square"/>
-          <a:lstStyle/>
-          <a:p>
-            <a:pPr algn="ctr" latinLnBrk="0"/>
-            <a:r>
-              <a:rPr sz="1600" b="1">
-                <a:solidFill>
-                  <a:srgbClr val="0E4D5E"/>
-                </a:solidFill>
-                <a:latin typeface="Segoe UI Semibold"/>
-              </a:rPr>
-              <a:t>Zoom-class</a:t>
-            </a:r>
-          </a:p>
-          <a:p>
-            <a:pPr algn="ctr" latinLnBrk="0"/>
-            <a:r>
-              <a:rPr sz="1150" b="0">
-                <a:solidFill>
-                  <a:srgbClr val="6E6A60"/>
-                </a:solidFill>
-                <a:latin typeface="Segoe UI"/>
-              </a:rPr>
-              <a:t>150 ms - 80 ms - 8%</a:t>
-            </a:r>
-          </a:p>
-        </p:txBody>
-      </p:sp>
-      <p:sp>
-        <p:nvSpPr>
-          <p:cNvPr id="12" name="TextBox 11"/>
-          <p:cNvSpPr txBox="1"/>
-          <p:nvPr/>
-        </p:nvSpPr>
-        <p:spPr>
-          <a:xfrm>
-            <a:off x="502920" y="3383280"/>
-            <a:ext cx="11185855" cy="320040"/>
-          </a:xfrm>
-          <a:prstGeom prst="rect">
-            <a:avLst/>
-          </a:prstGeom>
-          <a:noFill/>
-        </p:spPr>
-        <p:txBody>
-          <a:bodyPr wrap="square" anchor="t" lIns="27432" rIns="27432" tIns="18288" bIns="18288">
-            <a:spAutoFit/>
-          </a:bodyPr>
-          <a:lstStyle/>
-          <a:p>
-            <a:pPr algn="l" latinLnBrk="0">
-              <a:lnSpc>
-                <a:spcPct val="100000"/>
-              </a:lnSpc>
-            </a:pPr>
-            <a:r>
-              <a:rPr sz="1200" b="0">
-                <a:solidFill>
-                  <a:srgbClr val="6E6A60"/>
-                </a:solidFill>
-                <a:latin typeface="Segoe UI"/>
-              </a:rPr>
-              <a:t>Regime columns: delay - jitter SD - dropout.</a:t>
-            </a:r>
-          </a:p>
-        </p:txBody>
-      </p:sp>
-      <p:sp>
-        <p:nvSpPr>
-          <p:cNvPr id="13" name="Rounded Rectangle 12"/>
-          <p:cNvSpPr/>
-          <p:nvPr/>
-        </p:nvSpPr>
-        <p:spPr>
-          <a:xfrm>
-            <a:off x="502920" y="3886200"/>
-            <a:ext cx="11185855" cy="1691640"/>
-          </a:xfrm>
-          <a:prstGeom prst="roundRect">
-            <a:avLst>
-              <a:gd name="adj" fmla="val 4000"/>
-            </a:avLst>
-          </a:prstGeom>
-          <a:solidFill>
-            <a:srgbClr val="FDFBF5"/>
-          </a:solidFill>
-          <a:ln w="12700">
-            <a:solidFill>
-              <a:srgbClr val="CBD9DD"/>
-            </a:solidFill>
-          </a:ln>
-        </p:spPr>
-        <p:style>
-          <a:lnRef idx="1">
-            <a:schemeClr val="accent1"/>
-          </a:lnRef>
-          <a:fillRef idx="3">
-            <a:schemeClr val="accent1"/>
-          </a:fillRef>
-          <a:effectRef idx="2">
-            <a:schemeClr val="accent1"/>
-          </a:effectRef>
-          <a:fontRef idx="minor">
-            <a:schemeClr val="lt1"/>
-          </a:fontRef>
-        </p:style>
-        <p:txBody>
-          <a:bodyPr rtlCol="0" anchor="t" wrap="square" lIns="201168" rIns="201168" tIns="146304"/>
-          <a:lstStyle/>
-          <a:p>
-            <a:pPr algn="l" latinLnBrk="0">
-              <a:spcAft>
-                <a:spcPts val="600"/>
-              </a:spcAft>
-            </a:pPr>
-            <a:r>
-              <a:rPr sz="1400" b="1">
-                <a:solidFill>
-                  <a:srgbClr val="0E4D5E"/>
-                </a:solidFill>
-                <a:latin typeface="Segoe UI Semibold"/>
-              </a:rPr>
-              <a:t>Statistical floor</a:t>
-            </a:r>
-          </a:p>
-          <a:p>
-            <a:pPr algn="l" latinLnBrk="0">
-              <a:spcAft>
-                <a:spcPts val="400"/>
-              </a:spcAft>
-            </a:pPr>
-            <a:r>
-              <a:rPr sz="1350" b="0">
-                <a:solidFill>
-                  <a:srgbClr val="24262E"/>
-                </a:solidFill>
-                <a:latin typeface="Segoe UI"/>
-              </a:rPr>
-              <a:t>Envelope and influence-network results use a circular-shift null that preserves each stream's own autocorrelation.</a:t>
-            </a:r>
-          </a:p>
-          <a:p>
-            <a:pPr algn="l" latinLnBrk="0">
-              <a:spcAft>
-                <a:spcPts val="400"/>
-              </a:spcAft>
-            </a:pPr>
-            <a:r>
-              <a:rPr sz="1350" b="0">
-                <a:solidFill>
-                  <a:srgbClr val="24262E"/>
-                </a:solidFill>
-                <a:latin typeface="Segoe UI"/>
-              </a:rPr>
-              <a:t>Final grid: 2000 shuffles per cell, rerun as 140 SLURM array tasks on the NHR@FAU cluster (2026-07-14).</a:t>
-            </a:r>
-          </a:p>
-        </p:txBody>
-      </p:sp>
-      <p:sp>
-        <p:nvSpPr>
-          <p:cNvPr id="14" name="Rounded Rectangle 13"/>
           <p:cNvSpPr/>
           <p:nvPr/>
         </p:nvSpPr>
@@ -7906,7 +9362,7 @@
                 </a:solidFill>
                 <a:latin typeface="Segoe UI Semibold"/>
               </a:rPr>
-              <a:t>Known degradation by construction; each piece is its own control.</a:t>
+              <a:t>Every result has a visible path from source data to tested claim.</a:t>
             </a:r>
           </a:p>
         </p:txBody>
@@ -7971,7 +9427,7 @@
                 </a:solidFill>
                 <a:latin typeface="Segoe UI Semibold"/>
               </a:rPr>
-              <a:t>METHOD</a:t>
+              <a:t>DATA</a:t>
             </a:r>
           </a:p>
         </p:txBody>
@@ -8010,7 +9466,7 @@
                 </a:solidFill>
                 <a:latin typeface="Segoe UI Semibold"/>
               </a:rPr>
-              <a:t>The pipeline is reproducible</a:t>
+              <a:t>Three tiers and one multimodal constraint</a:t>
             </a:r>
           </a:p>
         </p:txBody>
@@ -8049,7 +9505,7 @@
                 </a:solidFill>
                 <a:latin typeface="Segoe UI"/>
               </a:rPr>
-              <a:t>5 / 15</a:t>
+              <a:t>5 / 19</a:t>
             </a:r>
           </a:p>
         </p:txBody>
@@ -8102,7 +9558,7 @@
         <p:spPr>
           <a:xfrm>
             <a:off x="502920" y="1371600"/>
-            <a:ext cx="11185855" cy="896112"/>
+            <a:ext cx="11185855" cy="914400"/>
           </a:xfrm>
           <a:prstGeom prst="roundRect">
             <a:avLst>
@@ -8148,7 +9604,7 @@
                 </a:solidFill>
                 <a:latin typeface="Segoe UI Semibold"/>
               </a:rPr>
-              <a:t>One command</a:t>
+              <a:t>Tier 1 - video</a:t>
             </a:r>
           </a:p>
           <a:p>
@@ -8164,7 +9620,7 @@
                 </a:solidFill>
                 <a:latin typeface="Segoe UI"/>
               </a:rPr>
-              <a:t>`make reproduce` regenerates the headline results from committed data summaries.</a:t>
+              <a:t>29 virtual-choir videos; 18 pose-usable. Mixed audio plus visual features for exploratory H3.</a:t>
             </a:r>
           </a:p>
         </p:txBody>
@@ -8177,8 +9633,8 @@
         </p:nvSpPr>
         <p:spPr>
           <a:xfrm>
-            <a:off x="502920" y="2404871"/>
-            <a:ext cx="11185855" cy="896112"/>
+            <a:off x="502920" y="2423160"/>
+            <a:ext cx="11185855" cy="914400"/>
           </a:xfrm>
           <a:prstGeom prst="roundRect">
             <a:avLst>
@@ -8224,7 +9680,7 @@
                 </a:solidFill>
                 <a:latin typeface="Segoe UI Semibold"/>
               </a:rPr>
-              <a:t>48 tests</a:t>
+              <a:t>Tier 2 - multitrack</a:t>
             </a:r>
           </a:p>
           <a:p>
@@ -8240,7 +9696,7 @@
                 </a:solidFill>
                 <a:latin typeface="Segoe UI"/>
               </a:rPr>
-              <a:t>Audio, video, network, latency, entanglement, H3, and report generation run in the automated suite.</a:t>
+              <a:t>Dagstuhl 5, ESMUC 3, ChoralSynth 20. Per-singer audio and influence networks.</a:t>
             </a:r>
           </a:p>
         </p:txBody>
@@ -8253,8 +9709,8 @@
         </p:nvSpPr>
         <p:spPr>
           <a:xfrm>
-            <a:off x="502920" y="3438142"/>
-            <a:ext cx="11185855" cy="896112"/>
+            <a:off x="502920" y="3474720"/>
+            <a:ext cx="11185855" cy="914400"/>
           </a:xfrm>
           <a:prstGeom prst="roundRect">
             <a:avLst>
@@ -8300,7 +9756,7 @@
                 </a:solidFill>
                 <a:latin typeface="Segoe UI Semibold"/>
               </a:rPr>
-              <a:t>Cluster protocol</a:t>
+              <a:t>Tier 3 - controlled degradation</a:t>
             </a:r>
           </a:p>
           <a:p>
@@ -8316,83 +9772,46 @@
                 </a:solidFill>
                 <a:latin typeface="Segoe UI"/>
               </a:rPr>
-              <a:t>The 2000-shuffle grid ran as 140 SLURM array tasks; the submission script is committed and cluster-validated.</a:t>
-            </a:r>
-          </a:p>
-        </p:txBody>
-      </p:sp>
-      <p:sp>
-        <p:nvSpPr>
-          <p:cNvPr id="9" name="Rounded Rectangle 8"/>
-          <p:cNvSpPr/>
-          <p:nvPr/>
-        </p:nvSpPr>
-        <p:spPr>
-          <a:xfrm>
-            <a:off x="502920" y="4471413"/>
-            <a:ext cx="11185855" cy="896112"/>
-          </a:xfrm>
-          <a:prstGeom prst="roundRect">
-            <a:avLst>
-              <a:gd name="adj" fmla="val 4000"/>
-            </a:avLst>
-          </a:prstGeom>
-          <a:solidFill>
-            <a:srgbClr val="FDFBF5"/>
-          </a:solidFill>
-          <a:ln w="12700">
-            <a:solidFill>
-              <a:srgbClr val="CBD9DD"/>
-            </a:solidFill>
-          </a:ln>
-        </p:spPr>
-        <p:style>
-          <a:lnRef idx="1">
-            <a:schemeClr val="accent1"/>
-          </a:lnRef>
-          <a:fillRef idx="3">
-            <a:schemeClr val="accent1"/>
-          </a:fillRef>
-          <a:effectRef idx="2">
-            <a:schemeClr val="accent1"/>
-          </a:effectRef>
-          <a:fontRef idx="minor">
-            <a:schemeClr val="lt1"/>
-          </a:fontRef>
-        </p:style>
-        <p:txBody>
-          <a:bodyPr rtlCol="0" anchor="t" wrap="square" lIns="201168" rIns="201168" tIns="146304"/>
-          <a:lstStyle/>
-          <a:p>
-            <a:pPr algn="l" latinLnBrk="0">
-              <a:spcAft>
-                <a:spcPts val="600"/>
-              </a:spcAft>
-            </a:pPr>
-            <a:r>
-              <a:rPr sz="1400" b="1">
+              <a:t>Five regimes applied to all 28 Tier-2 pieces for the H1 latency experiment.</a:t>
+            </a:r>
+          </a:p>
+        </p:txBody>
+      </p:sp>
+      <p:sp>
+        <p:nvSpPr>
+          <p:cNvPr id="9" name="TextBox 8"/>
+          <p:cNvSpPr txBox="1"/>
+          <p:nvPr/>
+        </p:nvSpPr>
+        <p:spPr>
+          <a:xfrm>
+            <a:off x="502920" y="4617720"/>
+            <a:ext cx="11185855" cy="868680"/>
+          </a:xfrm>
+          <a:prstGeom prst="rect">
+            <a:avLst/>
+          </a:prstGeom>
+          <a:noFill/>
+        </p:spPr>
+        <p:txBody>
+          <a:bodyPr wrap="square" anchor="t" lIns="27432" rIns="27432" tIns="18288" bIns="18288">
+            <a:spAutoFit/>
+          </a:bodyPr>
+          <a:lstStyle/>
+          <a:p>
+            <a:pPr algn="l" latinLnBrk="0">
+              <a:lnSpc>
+                <a:spcPct val="100000"/>
+              </a:lnSpc>
+            </a:pPr>
+            <a:r>
+              <a:rPr sz="1600" b="1">
                 <a:solidFill>
                   <a:srgbClr val="0E4D5E"/>
                 </a:solidFill>
-                <a:latin typeface="Segoe UI Semibold"/>
-              </a:rPr>
-              <a:t>Audit trail</a:t>
-            </a:r>
-          </a:p>
-          <a:p>
-            <a:pPr algn="l" latinLnBrk="0">
-              <a:spcAft>
-                <a:spcPts val="400"/>
-              </a:spcAft>
-            </a:pPr>
-            <a:r>
-              <a:rPr sz="1350" b="0">
-                <a:solidFill>
-                  <a:srgbClr val="24262E"/>
-                </a:solidFill>
                 <a:latin typeface="Segoe UI"/>
               </a:rPr>
-              <a:t>Every deck number traces to a committed CSV.</a:t>
+              <a:t>No item has synchronized per-singer audio and per-singer video. Tier 1 has mixed audio; Tier 2 has no video.</a:t>
             </a:r>
           </a:p>
         </p:txBody>
@@ -8446,7 +9865,7 @@
                 </a:solidFill>
                 <a:latin typeface="Segoe UI Semibold"/>
               </a:rPr>
-              <a:t>The numbers can be regenerated without us in the room.</a:t>
+              <a:t>Each dataset is used only for the claims it can support.</a:t>
             </a:r>
           </a:p>
         </p:txBody>
@@ -8511,7 +9930,7 @@
                 </a:solidFill>
                 <a:latin typeface="Segoe UI Semibold"/>
               </a:rPr>
-              <a:t>RESULT</a:t>
+              <a:t>METHOD</a:t>
             </a:r>
           </a:p>
         </p:txBody>
@@ -8550,7 +9969,7 @@
                 </a:solidFill>
                 <a:latin typeface="Segoe UI Semibold"/>
               </a:rPr>
-              <a:t>H1: latency breaks timing, not loudness</a:t>
+              <a:t>E(t) and the controlled latency grid</a:t>
             </a:r>
           </a:p>
         </p:txBody>
@@ -8589,7 +10008,7 @@
                 </a:solidFill>
                 <a:latin typeface="Segoe UI"/>
               </a:rPr>
-              <a:t>6 / 15</a:t>
+              <a:t>6 / 19</a:t>
             </a:r>
           </a:p>
         </p:txBody>
@@ -8635,14 +10054,53 @@
       </p:sp>
       <p:sp>
         <p:nvSpPr>
-          <p:cNvPr id="6" name="Rounded Rectangle 5"/>
+          <p:cNvPr id="6" name="TextBox 5"/>
+          <p:cNvSpPr txBox="1"/>
+          <p:nvPr/>
+        </p:nvSpPr>
+        <p:spPr>
+          <a:xfrm>
+            <a:off x="502920" y="1234440"/>
+            <a:ext cx="11185855" cy="411480"/>
+          </a:xfrm>
+          <a:prstGeom prst="rect">
+            <a:avLst/>
+          </a:prstGeom>
+          <a:noFill/>
+        </p:spPr>
+        <p:txBody>
+          <a:bodyPr wrap="square" anchor="t" lIns="27432" rIns="27432" tIns="18288" bIns="18288">
+            <a:spAutoFit/>
+          </a:bodyPr>
+          <a:lstStyle/>
+          <a:p>
+            <a:pPr algn="l" latinLnBrk="0">
+              <a:lnSpc>
+                <a:spcPct val="100000"/>
+              </a:lnSpc>
+            </a:pPr>
+            <a:r>
+              <a:rPr sz="1600" b="1">
+                <a:solidFill>
+                  <a:srgbClr val="0E4D5E"/>
+                </a:solidFill>
+                <a:latin typeface="Segoe UI"/>
+              </a:rPr>
+              <a:t>E(t) combines available acoustic A(t), visual V(t), and network N(t) coordination.</a:t>
+            </a:r>
+          </a:p>
+        </p:txBody>
+      </p:sp>
+      <p:sp>
+        <p:nvSpPr>
+          <p:cNvPr id="7" name="Rounded Rectangle 6"/>
           <p:cNvSpPr/>
           <p:nvPr/>
         </p:nvSpPr>
         <p:spPr>
           <a:xfrm>
-            <a:off x="502920" y="1371600"/>
-            <a:ext cx="2651760" cy="1188720"/>
+            <a:off x="502920" y="1874519"/>
+            <a:ext cx="2121408" cy="1234440"/>
           </a:xfrm>
           <a:prstGeom prst="roundRect">
             <a:avLst>
@@ -8678,13 +10136,13 @@
           <a:p>
             <a:pPr algn="ctr" latinLnBrk="0"/>
             <a:r>
-              <a:rPr sz="3000" b="1">
+              <a:rPr sz="1600" b="1">
                 <a:solidFill>
                   <a:srgbClr val="0E4D5E"/>
                 </a:solidFill>
                 <a:latin typeface="Segoe UI Semibold"/>
               </a:rPr>
-              <a:t>-56.5%</a:t>
+              <a:t>Clean</a:t>
             </a:r>
           </a:p>
           <a:p>
@@ -8696,21 +10154,21 @@
                 </a:solidFill>
                 <a:latin typeface="Segoe UI"/>
               </a:rPr>
-              <a:t>Dagstuhl (real)</a:t>
-            </a:r>
-          </a:p>
-        </p:txBody>
-      </p:sp>
-      <p:sp>
-        <p:nvSpPr>
-          <p:cNvPr id="7" name="Rounded Rectangle 6"/>
+              <a:t>0 / 0 / 0%</a:t>
+            </a:r>
+          </a:p>
+        </p:txBody>
+      </p:sp>
+      <p:sp>
+        <p:nvSpPr>
+          <p:cNvPr id="8" name="Rounded Rectangle 7"/>
           <p:cNvSpPr/>
           <p:nvPr/>
         </p:nvSpPr>
         <p:spPr>
           <a:xfrm>
-            <a:off x="3291840" y="1371600"/>
-            <a:ext cx="2651760" cy="1188720"/>
+            <a:off x="2734056" y="1874519"/>
+            <a:ext cx="2121408" cy="1234440"/>
           </a:xfrm>
           <a:prstGeom prst="roundRect">
             <a:avLst>
@@ -8746,13 +10204,13 @@
           <a:p>
             <a:pPr algn="ctr" latinLnBrk="0"/>
             <a:r>
-              <a:rPr sz="3000" b="1">
+              <a:rPr sz="1600" b="1">
                 <a:solidFill>
                   <a:srgbClr val="0E4D5E"/>
                 </a:solidFill>
                 <a:latin typeface="Segoe UI Semibold"/>
               </a:rPr>
-              <a:t>-65.1%</a:t>
+              <a:t>In-person</a:t>
             </a:r>
           </a:p>
           <a:p>
@@ -8764,21 +10222,21 @@
                 </a:solidFill>
                 <a:latin typeface="Segoe UI"/>
               </a:rPr>
-              <a:t>ESMUC (real)</a:t>
-            </a:r>
-          </a:p>
-        </p:txBody>
-      </p:sp>
-      <p:sp>
-        <p:nvSpPr>
-          <p:cNvPr id="8" name="Rounded Rectangle 7"/>
+              <a:t>25 / 10 / 0%</a:t>
+            </a:r>
+          </a:p>
+        </p:txBody>
+      </p:sp>
+      <p:sp>
+        <p:nvSpPr>
+          <p:cNvPr id="9" name="Rounded Rectangle 8"/>
           <p:cNvSpPr/>
           <p:nvPr/>
         </p:nvSpPr>
         <p:spPr>
           <a:xfrm>
-            <a:off x="6080760" y="1371600"/>
-            <a:ext cx="2651760" cy="1188720"/>
+            <a:off x="4965192" y="1874519"/>
+            <a:ext cx="2121408" cy="1234440"/>
           </a:xfrm>
           <a:prstGeom prst="roundRect">
             <a:avLst>
@@ -8814,13 +10272,13 @@
           <a:p>
             <a:pPr algn="ctr" latinLnBrk="0"/>
             <a:r>
-              <a:rPr sz="3000" b="1">
+              <a:rPr sz="1600" b="1">
                 <a:solidFill>
                   <a:srgbClr val="0E4D5E"/>
                 </a:solidFill>
                 <a:latin typeface="Segoe UI Semibold"/>
               </a:rPr>
-              <a:t>-75.1%</a:t>
+              <a:t>Jamulus LAN</a:t>
             </a:r>
           </a:p>
           <a:p>
@@ -8832,21 +10290,21 @@
                 </a:solidFill>
                 <a:latin typeface="Segoe UI"/>
               </a:rPr>
-              <a:t>ChoralSynth (synthetic)</a:t>
-            </a:r>
-          </a:p>
-        </p:txBody>
-      </p:sp>
-      <p:sp>
-        <p:nvSpPr>
-          <p:cNvPr id="9" name="Rounded Rectangle 8"/>
+              <a:t>47 / 46 / 1%</a:t>
+            </a:r>
+          </a:p>
+        </p:txBody>
+      </p:sp>
+      <p:sp>
+        <p:nvSpPr>
+          <p:cNvPr id="10" name="Rounded Rectangle 9"/>
           <p:cNvSpPr/>
           <p:nvPr/>
         </p:nvSpPr>
         <p:spPr>
           <a:xfrm>
-            <a:off x="8869680" y="1371600"/>
-            <a:ext cx="2651760" cy="1188720"/>
+            <a:off x="7196328" y="1874519"/>
+            <a:ext cx="2121408" cy="1234440"/>
           </a:xfrm>
           <a:prstGeom prst="roundRect">
             <a:avLst>
@@ -8882,13 +10340,13 @@
           <a:p>
             <a:pPr algn="ctr" latinLnBrk="0"/>
             <a:r>
-              <a:rPr sz="3000" b="1">
+              <a:rPr sz="1600" b="1">
                 <a:solidFill>
                   <a:srgbClr val="0E4D5E"/>
                 </a:solidFill>
                 <a:latin typeface="Segoe UI Semibold"/>
               </a:rPr>
-              <a:t>-70.7%</a:t>
+              <a:t>Jamulus WAN</a:t>
             </a:r>
           </a:p>
           <a:p>
@@ -8900,38 +10358,197 @@
                 </a:solidFill>
                 <a:latin typeface="Segoe UI"/>
               </a:rPr>
-              <a:t>Corpus; 28/28 decrease</a:t>
-            </a:r>
-          </a:p>
-        </p:txBody>
-      </p:sp>
-      <p:pic>
-        <p:nvPicPr>
-          <p:cNvPr id="10" name="Picture 9" descr="tier3_corpus_summary.png"/>
-          <p:cNvPicPr>
-            <a:picLocks noChangeAspect="1"/>
-          </p:cNvPicPr>
-          <p:nvPr/>
-        </p:nvPicPr>
-        <p:blipFill>
-          <a:blip r:embed="rId2"/>
-          <a:stretch>
-            <a:fillRect/>
-          </a:stretch>
-        </p:blipFill>
-        <p:spPr>
-          <a:xfrm>
-            <a:off x="2186401" y="2788920"/>
-            <a:ext cx="7818892" cy="3108960"/>
+              <a:t>83 / 57 / 3%</a:t>
+            </a:r>
+          </a:p>
+        </p:txBody>
+      </p:sp>
+      <p:sp>
+        <p:nvSpPr>
+          <p:cNvPr id="11" name="Rounded Rectangle 10"/>
+          <p:cNvSpPr/>
+          <p:nvPr/>
+        </p:nvSpPr>
+        <p:spPr>
+          <a:xfrm>
+            <a:off x="9427464" y="1874519"/>
+            <a:ext cx="2121408" cy="1234440"/>
+          </a:xfrm>
+          <a:prstGeom prst="roundRect">
+            <a:avLst>
+              <a:gd name="adj" fmla="val 6000"/>
+            </a:avLst>
+          </a:prstGeom>
+          <a:solidFill>
+            <a:srgbClr val="FDFBF5"/>
+          </a:solidFill>
+          <a:ln w="12700">
+            <a:solidFill>
+              <a:srgbClr val="CBD9DD"/>
+            </a:solidFill>
+          </a:ln>
+        </p:spPr>
+        <p:style>
+          <a:lnRef idx="1">
+            <a:schemeClr val="accent1"/>
+          </a:lnRef>
+          <a:fillRef idx="3">
+            <a:schemeClr val="accent1"/>
+          </a:fillRef>
+          <a:effectRef idx="2">
+            <a:schemeClr val="accent1"/>
+          </a:effectRef>
+          <a:fontRef idx="minor">
+            <a:schemeClr val="lt1"/>
+          </a:fontRef>
+        </p:style>
+        <p:txBody>
+          <a:bodyPr rtlCol="0" anchor="ctr" wrap="square"/>
+          <a:lstStyle/>
+          <a:p>
+            <a:pPr algn="ctr" latinLnBrk="0"/>
+            <a:r>
+              <a:rPr sz="1600" b="1">
+                <a:solidFill>
+                  <a:srgbClr val="0E4D5E"/>
+                </a:solidFill>
+                <a:latin typeface="Segoe UI Semibold"/>
+              </a:rPr>
+              <a:t>Zoom-class</a:t>
+            </a:r>
+          </a:p>
+          <a:p>
+            <a:pPr algn="ctr" latinLnBrk="0"/>
+            <a:r>
+              <a:rPr sz="1150" b="0">
+                <a:solidFill>
+                  <a:srgbClr val="6E6A60"/>
+                </a:solidFill>
+                <a:latin typeface="Segoe UI"/>
+              </a:rPr>
+              <a:t>150 / 80 / 8%</a:t>
+            </a:r>
+          </a:p>
+        </p:txBody>
+      </p:sp>
+      <p:sp>
+        <p:nvSpPr>
+          <p:cNvPr id="12" name="TextBox 11"/>
+          <p:cNvSpPr txBox="1"/>
+          <p:nvPr/>
+        </p:nvSpPr>
+        <p:spPr>
+          <a:xfrm>
+            <a:off x="502920" y="3246120"/>
+            <a:ext cx="4572000" cy="274320"/>
           </a:xfrm>
           <a:prstGeom prst="rect">
             <a:avLst/>
           </a:prstGeom>
-        </p:spPr>
-      </p:pic>
-      <p:sp>
-        <p:nvSpPr>
-          <p:cNvPr id="11" name="Rounded Rectangle 10"/>
+          <a:noFill/>
+        </p:spPr>
+        <p:txBody>
+          <a:bodyPr wrap="square" anchor="t" lIns="27432" rIns="27432" tIns="18288" bIns="18288">
+            <a:spAutoFit/>
+          </a:bodyPr>
+          <a:lstStyle/>
+          <a:p>
+            <a:pPr algn="l" latinLnBrk="0">
+              <a:lnSpc>
+                <a:spcPct val="100000"/>
+              </a:lnSpc>
+            </a:pPr>
+            <a:r>
+              <a:rPr sz="1200" b="0">
+                <a:solidFill>
+                  <a:srgbClr val="6E6A60"/>
+                </a:solidFill>
+                <a:latin typeface="Segoe UI"/>
+              </a:rPr>
+              <a:t>Delay ms / jitter SD ms / dropout</a:t>
+            </a:r>
+          </a:p>
+        </p:txBody>
+      </p:sp>
+      <p:sp>
+        <p:nvSpPr>
+          <p:cNvPr id="13" name="Rounded Rectangle 12"/>
+          <p:cNvSpPr/>
+          <p:nvPr/>
+        </p:nvSpPr>
+        <p:spPr>
+          <a:xfrm>
+            <a:off x="502920" y="3749039"/>
+            <a:ext cx="11185855" cy="1508760"/>
+          </a:xfrm>
+          <a:prstGeom prst="roundRect">
+            <a:avLst>
+              <a:gd name="adj" fmla="val 4000"/>
+            </a:avLst>
+          </a:prstGeom>
+          <a:solidFill>
+            <a:srgbClr val="FDFBF5"/>
+          </a:solidFill>
+          <a:ln w="12700">
+            <a:solidFill>
+              <a:srgbClr val="CBD9DD"/>
+            </a:solidFill>
+          </a:ln>
+        </p:spPr>
+        <p:style>
+          <a:lnRef idx="1">
+            <a:schemeClr val="accent1"/>
+          </a:lnRef>
+          <a:fillRef idx="3">
+            <a:schemeClr val="accent1"/>
+          </a:fillRef>
+          <a:effectRef idx="2">
+            <a:schemeClr val="accent1"/>
+          </a:effectRef>
+          <a:fontRef idx="minor">
+            <a:schemeClr val="lt1"/>
+          </a:fontRef>
+        </p:style>
+        <p:txBody>
+          <a:bodyPr rtlCol="0" anchor="t" wrap="square" lIns="201168" rIns="201168" tIns="146304"/>
+          <a:lstStyle/>
+          <a:p>
+            <a:pPr algn="l" latinLnBrk="0">
+              <a:spcAft>
+                <a:spcPts val="600"/>
+              </a:spcAft>
+            </a:pPr>
+            <a:r>
+              <a:rPr sz="1400" b="1">
+                <a:solidFill>
+                  <a:srgbClr val="0E4D5E"/>
+                </a:solidFill>
+                <a:latin typeface="Segoe UI Semibold"/>
+              </a:rPr>
+              <a:t>Inference</a:t>
+            </a:r>
+          </a:p>
+          <a:p>
+            <a:pPr algn="l" latinLnBrk="0">
+              <a:spcAft>
+                <a:spcPts val="400"/>
+              </a:spcAft>
+            </a:pPr>
+            <a:r>
+              <a:rPr sz="1400" b="0">
+                <a:solidFill>
+                  <a:srgbClr val="24262E"/>
+                </a:solidFill>
+                <a:latin typeface="Segoe UI"/>
+              </a:rPr>
+              <a:t>Envelope and network analyses use 2,000 circular shifts per cell. H1 onset inference uses a paired clean-to-Zoom sign test across pieces.</a:t>
+            </a:r>
+          </a:p>
+        </p:txBody>
+      </p:sp>
+      <p:sp>
+        <p:nvSpPr>
+          <p:cNvPr id="14" name="Rounded Rectangle 13"/>
           <p:cNvSpPr/>
           <p:nvPr/>
         </p:nvSpPr>
@@ -8978,7 +10595,7 @@
                 </a:solidFill>
                 <a:latin typeface="Segoe UI Semibold"/>
               </a:rPr>
-              <a:t>All 28 pieces decrease (paired p = 3.73 x 10^-9); envelope coupling stays flat.</a:t>
+              <a:t>The same piece is evaluated in every regime and serves as its own control.</a:t>
             </a:r>
           </a:p>
         </p:txBody>
@@ -9043,7 +10660,7 @@
                 </a:solidFill>
                 <a:latin typeface="Segoe UI Semibold"/>
               </a:rPr>
-              <a:t>RESULT</a:t>
+              <a:t>WORK PROCESS</a:t>
             </a:r>
           </a:p>
         </p:txBody>
@@ -9082,7 +10699,7 @@
                 </a:solidFill>
                 <a:latin typeface="Segoe UI Semibold"/>
               </a:rPr>
-              <a:t>Why the dissociation is the finding</a:t>
+              <a:t>How the team organized the project</a:t>
             </a:r>
           </a:p>
         </p:txBody>
@@ -9121,7 +10738,7 @@
                 </a:solidFill>
                 <a:latin typeface="Segoe UI"/>
               </a:rPr>
-              <a:t>7 / 15</a:t>
+              <a:t>7 / 19</a:t>
             </a:r>
           </a:p>
         </p:txBody>
@@ -9173,8 +10790,8 @@
         </p:nvSpPr>
         <p:spPr>
           <a:xfrm>
-            <a:off x="502920" y="1371600"/>
-            <a:ext cx="11185855" cy="896112"/>
+            <a:off x="502920" y="1325880"/>
+            <a:ext cx="11185855" cy="914400"/>
           </a:xfrm>
           <a:prstGeom prst="roundRect">
             <a:avLst>
@@ -9220,7 +10837,7 @@
                 </a:solidFill>
                 <a:latin typeface="Segoe UI Semibold"/>
               </a:rPr>
-              <a:t>The null we kept</a:t>
+              <a:t>Four work packages</a:t>
             </a:r>
           </a:p>
           <a:p>
@@ -9236,7 +10853,7 @@
                 </a:solidFill>
                 <a:latin typeface="Segoe UI"/>
               </a:rPr>
-              <a:t>Constant delay + envelope coupling showed no effect; the control caught the confound (envelope coupling is lag-tolerant).</a:t>
+              <a:t>Acoustic/integration, visual extraction, influence networks, and dashboard/report integration.</a:t>
             </a:r>
           </a:p>
         </p:txBody>
@@ -9249,8 +10866,8 @@
         </p:nvSpPr>
         <p:spPr>
           <a:xfrm>
-            <a:off x="502920" y="2404871"/>
-            <a:ext cx="11185855" cy="896112"/>
+            <a:off x="502920" y="2377440"/>
+            <a:ext cx="11185855" cy="914400"/>
           </a:xfrm>
           <a:prstGeom prst="roundRect">
             <a:avLst>
@@ -9296,7 +10913,7 @@
                 </a:solidFill>
                 <a:latin typeface="Segoe UI Semibold"/>
               </a:rPr>
-              <a:t>The a-priori fix</a:t>
+              <a:t>Iteration outputs</a:t>
             </a:r>
           </a:p>
           <a:p>
@@ -9312,7 +10929,7 @@
                 </a:solidFill>
                 <a:latin typeface="Segoe UI"/>
               </a:rPr>
-              <a:t>Zero-lag onset synchrony is the physical quantity jitter should break. It recovered the effect in every piece.</a:t>
+              <a:t>Every iteration ended in a schema, result table, test, figure, or presentation artifact.</a:t>
             </a:r>
           </a:p>
         </p:txBody>
@@ -9325,8 +10942,8 @@
         </p:nvSpPr>
         <p:spPr>
           <a:xfrm>
-            <a:off x="502920" y="3438142"/>
-            <a:ext cx="11185855" cy="896112"/>
+            <a:off x="502920" y="3429000"/>
+            <a:ext cx="11185855" cy="914400"/>
           </a:xfrm>
           <a:prstGeom prst="roundRect">
             <a:avLst>
@@ -9372,7 +10989,7 @@
                 </a:solidFill>
                 <a:latin typeface="Segoe UI Semibold"/>
               </a:rPr>
-              <a:t>The claim</a:t>
+              <a:t>Review gates</a:t>
             </a:r>
           </a:p>
           <a:p>
@@ -9388,7 +11005,7 @@
                 </a:solidFill>
                 <a:latin typeface="Segoe UI"/>
               </a:rPr>
-              <a:t>Timing collapses while loudness holds. An envelope-only study would have called latency harmless.</a:t>
+              <a:t>Seeded scripts, committed summaries, and independent audits connected implementation to claims.</a:t>
             </a:r>
           </a:p>
         </p:txBody>
@@ -9401,8 +11018,8 @@
         </p:nvSpPr>
         <p:spPr>
           <a:xfrm>
-            <a:off x="502920" y="4471413"/>
-            <a:ext cx="11185855" cy="896112"/>
+            <a:off x="502920" y="4480560"/>
+            <a:ext cx="11185855" cy="914400"/>
           </a:xfrm>
           <a:prstGeom prst="roundRect">
             <a:avLst>
@@ -9448,7 +11065,7 @@
                 </a:solidFill>
                 <a:latin typeface="Segoe UI Semibold"/>
               </a:rPr>
-              <a:t>Replication</a:t>
+              <a:t>Virtual Mirror</a:t>
             </a:r>
           </a:p>
           <a:p>
@@ -9464,61 +11081,7 @@
                 </a:solidFill>
                 <a:latin typeface="Segoe UI"/>
               </a:rPr>
-              <a:t>Two real corpora and one independent synthetic corpus agree.</a:t>
-            </a:r>
-          </a:p>
-        </p:txBody>
-      </p:sp>
-      <p:sp>
-        <p:nvSpPr>
-          <p:cNvPr id="10" name="Rounded Rectangle 9"/>
-          <p:cNvSpPr/>
-          <p:nvPr/>
-        </p:nvSpPr>
-        <p:spPr>
-          <a:xfrm>
-            <a:off x="502920" y="6144768"/>
-            <a:ext cx="11185855" cy="475488"/>
-          </a:xfrm>
-          <a:prstGeom prst="roundRect">
-            <a:avLst>
-              <a:gd name="adj" fmla="val 6000"/>
-            </a:avLst>
-          </a:prstGeom>
-          <a:solidFill>
-            <a:srgbClr val="0E4D5E"/>
-          </a:solidFill>
-          <a:ln>
-            <a:noFill/>
-          </a:ln>
-        </p:spPr>
-        <p:style>
-          <a:lnRef idx="1">
-            <a:schemeClr val="accent1"/>
-          </a:lnRef>
-          <a:fillRef idx="3">
-            <a:schemeClr val="accent1"/>
-          </a:fillRef>
-          <a:effectRef idx="2">
-            <a:schemeClr val="accent1"/>
-          </a:effectRef>
-          <a:fontRef idx="minor">
-            <a:schemeClr val="lt1"/>
-          </a:fontRef>
-        </p:style>
-        <p:txBody>
-          <a:bodyPr rtlCol="0" anchor="ctr" wrap="square"/>
-          <a:lstStyle/>
-          <a:p>
-            <a:pPr algn="ctr" latinLnBrk="0"/>
-            <a:r>
-              <a:rPr sz="1400" b="1">
-                <a:solidFill>
-                  <a:srgbClr val="FDFBF5"/>
-                </a:solidFill>
-                <a:latin typeface="Segoe UI Semibold"/>
-              </a:rPr>
-              <a:t>The method audit trail is part of the result.</a:t>
+              <a:t>High shared meaning, low emotional exchange, medium relationship intensity; a weekly asynchronous check-in was adopted.</a:t>
             </a:r>
           </a:p>
         </p:txBody>
@@ -9583,7 +11146,7 @@
                 </a:solidFill>
                 <a:latin typeface="Segoe UI Semibold"/>
               </a:rPr>
-              <a:t>RESULT</a:t>
+              <a:t>METHOD</a:t>
             </a:r>
           </a:p>
         </p:txBody>
@@ -9622,7 +11185,7 @@
                 </a:solidFill>
                 <a:latin typeface="Segoe UI Semibold"/>
               </a:rPr>
-              <a:t>H2: limited leadership evidence</a:t>
+              <a:t>Reproducibility is part of the result</a:t>
             </a:r>
           </a:p>
         </p:txBody>
@@ -9661,7 +11224,7 @@
                 </a:solidFill>
                 <a:latin typeface="Segoe UI"/>
               </a:rPr>
-              <a:t>8 / 15</a:t>
+              <a:t>8 / 19</a:t>
             </a:r>
           </a:p>
         </p:txBody>
@@ -9707,57 +11270,18 @@
       </p:sp>
       <p:sp>
         <p:nvSpPr>
-          <p:cNvPr id="6" name="TextBox 5"/>
-          <p:cNvSpPr txBox="1"/>
-          <p:nvPr/>
-        </p:nvSpPr>
-        <p:spPr>
-          <a:xfrm>
-            <a:off x="502920" y="1280160"/>
-            <a:ext cx="11185855" cy="594360"/>
-          </a:xfrm>
-          <a:prstGeom prst="rect">
-            <a:avLst/>
-          </a:prstGeom>
-          <a:noFill/>
-        </p:spPr>
-        <p:txBody>
-          <a:bodyPr wrap="square" anchor="t" lIns="27432" rIns="27432" tIns="18288" bIns="18288">
-            <a:spAutoFit/>
-          </a:bodyPr>
-          <a:lstStyle/>
-          <a:p>
-            <a:pPr algn="l" latinLnBrk="0">
-              <a:lnSpc>
-                <a:spcPct val="100000"/>
-              </a:lnSpc>
-            </a:pPr>
-            <a:r>
-              <a:rPr sz="1400" b="1">
-                <a:solidFill>
-                  <a:srgbClr val="0E4D5E"/>
-                </a:solidFill>
-                <a:latin typeface="Segoe UI"/>
-              </a:rPr>
-              <a:t>Leader dominance = Gini of out-degree in the Granger influence graph (0 democratic, 1 single driver), vs 1000 density-matched random graphs.</a:t>
-            </a:r>
-          </a:p>
-        </p:txBody>
-      </p:sp>
-      <p:sp>
-        <p:nvSpPr>
-          <p:cNvPr id="7" name="Rounded Rectangle 6"/>
+          <p:cNvPr id="6" name="Rounded Rectangle 5"/>
           <p:cNvSpPr/>
           <p:nvPr/>
         </p:nvSpPr>
         <p:spPr>
           <a:xfrm>
-            <a:off x="502920" y="2057400"/>
-            <a:ext cx="2651760" cy="1188720"/>
+            <a:off x="502920" y="1371600"/>
+            <a:ext cx="11185855" cy="914400"/>
           </a:xfrm>
           <a:prstGeom prst="roundRect">
             <a:avLst>
-              <a:gd name="adj" fmla="val 6000"/>
+              <a:gd name="adj" fmla="val 4000"/>
             </a:avLst>
           </a:prstGeom>
           <a:solidFill>
@@ -9784,48 +11308,56 @@
           </a:fontRef>
         </p:style>
         <p:txBody>
-          <a:bodyPr rtlCol="0" anchor="ctr" wrap="square"/>
-          <a:lstStyle/>
-          <a:p>
-            <a:pPr algn="ctr" latinLnBrk="0"/>
-            <a:r>
-              <a:rPr sz="2600" b="1">
+          <a:bodyPr rtlCol="0" anchor="t" wrap="square" lIns="201168" rIns="201168" tIns="146304"/>
+          <a:lstStyle/>
+          <a:p>
+            <a:pPr algn="l" latinLnBrk="0">
+              <a:spcAft>
+                <a:spcPts val="600"/>
+              </a:spcAft>
+            </a:pPr>
+            <a:r>
+              <a:rPr sz="1400" b="1">
                 <a:solidFill>
                   <a:srgbClr val="0E4D5E"/>
                 </a:solidFill>
                 <a:latin typeface="Segoe UI Semibold"/>
               </a:rPr>
-              <a:t>0.162</a:t>
-            </a:r>
-          </a:p>
-          <a:p>
-            <a:pPr algn="ctr" latinLnBrk="0"/>
-            <a:r>
-              <a:rPr sz="1150" b="0">
-                <a:solidFill>
-                  <a:srgbClr val="6E6A60"/>
+              <a:t>One command</a:t>
+            </a:r>
+          </a:p>
+          <a:p>
+            <a:pPr algn="l" latinLnBrk="0">
+              <a:spcAft>
+                <a:spcPts val="400"/>
+              </a:spcAft>
+            </a:pPr>
+            <a:r>
+              <a:rPr sz="1350" b="0">
+                <a:solidFill>
+                  <a:srgbClr val="24262E"/>
                 </a:solidFill>
                 <a:latin typeface="Segoe UI"/>
               </a:rPr>
-              <a:t>Observed corpus mean</a:t>
-            </a:r>
-          </a:p>
-        </p:txBody>
-      </p:sp>
-      <p:sp>
-        <p:nvSpPr>
-          <p:cNvPr id="8" name="Rounded Rectangle 7"/>
+              <a:t>`make reproduce` regenerates report-stage statistics, figures, and the PDF.</a:t>
+            </a:r>
+          </a:p>
+        </p:txBody>
+      </p:sp>
+      <p:sp>
+        <p:nvSpPr>
+          <p:cNvPr id="7" name="Rounded Rectangle 6"/>
           <p:cNvSpPr/>
           <p:nvPr/>
         </p:nvSpPr>
         <p:spPr>
           <a:xfrm>
-            <a:off x="3291840" y="2057400"/>
-            <a:ext cx="2651760" cy="1188720"/>
+            <a:off x="502920" y="2423160"/>
+            <a:ext cx="11185855" cy="914400"/>
           </a:xfrm>
           <a:prstGeom prst="roundRect">
             <a:avLst>
-              <a:gd name="adj" fmla="val 6000"/>
+              <a:gd name="adj" fmla="val 4000"/>
             </a:avLst>
           </a:prstGeom>
           <a:solidFill>
@@ -9852,48 +11384,56 @@
           </a:fontRef>
         </p:style>
         <p:txBody>
-          <a:bodyPr rtlCol="0" anchor="ctr" wrap="square"/>
-          <a:lstStyle/>
-          <a:p>
-            <a:pPr algn="ctr" latinLnBrk="0"/>
-            <a:r>
-              <a:rPr sz="2600" b="1">
+          <a:bodyPr rtlCol="0" anchor="t" wrap="square" lIns="201168" rIns="201168" tIns="146304"/>
+          <a:lstStyle/>
+          <a:p>
+            <a:pPr algn="l" latinLnBrk="0">
+              <a:spcAft>
+                <a:spcPts val="600"/>
+              </a:spcAft>
+            </a:pPr>
+            <a:r>
+              <a:rPr sz="1400" b="1">
                 <a:solidFill>
                   <a:srgbClr val="0E4D5E"/>
                 </a:solidFill>
                 <a:latin typeface="Segoe UI Semibold"/>
               </a:rPr>
-              <a:t>0.155</a:t>
-            </a:r>
-          </a:p>
-          <a:p>
-            <a:pPr algn="ctr" latinLnBrk="0"/>
-            <a:r>
-              <a:rPr sz="1150" b="0">
-                <a:solidFill>
-                  <a:srgbClr val="6E6A60"/>
+              <a:t>50 tests</a:t>
+            </a:r>
+          </a:p>
+          <a:p>
+            <a:pPr algn="l" latinLnBrk="0">
+              <a:spcAft>
+                <a:spcPts val="400"/>
+              </a:spcAft>
+            </a:pPr>
+            <a:r>
+              <a:rPr sz="1350" b="0">
+                <a:solidFill>
+                  <a:srgbClr val="24262E"/>
                 </a:solidFill>
                 <a:latin typeface="Segoe UI"/>
               </a:rPr>
-              <a:t>Matched random null</a:t>
-            </a:r>
-          </a:p>
-        </p:txBody>
-      </p:sp>
-      <p:sp>
-        <p:nvSpPr>
-          <p:cNvPr id="9" name="Rounded Rectangle 8"/>
+              <a:t>Scientific pipelines, dashboard consistency, figure definitions, H3 controls, and report generation are covered.</a:t>
+            </a:r>
+          </a:p>
+        </p:txBody>
+      </p:sp>
+      <p:sp>
+        <p:nvSpPr>
+          <p:cNvPr id="8" name="Rounded Rectangle 7"/>
           <p:cNvSpPr/>
           <p:nvPr/>
         </p:nvSpPr>
         <p:spPr>
           <a:xfrm>
-            <a:off x="6080760" y="2057400"/>
-            <a:ext cx="2651760" cy="1188720"/>
+            <a:off x="502920" y="3474720"/>
+            <a:ext cx="11185855" cy="914400"/>
           </a:xfrm>
           <a:prstGeom prst="roundRect">
             <a:avLst>
-              <a:gd name="adj" fmla="val 6000"/>
+              <a:gd name="adj" fmla="val 4000"/>
             </a:avLst>
           </a:prstGeom>
           <a:solidFill>
@@ -9920,48 +11460,56 @@
           </a:fontRef>
         </p:style>
         <p:txBody>
-          <a:bodyPr rtlCol="0" anchor="ctr" wrap="square"/>
-          <a:lstStyle/>
-          <a:p>
-            <a:pPr algn="ctr" latinLnBrk="0"/>
-            <a:r>
-              <a:rPr sz="2600" b="1">
+          <a:bodyPr rtlCol="0" anchor="t" wrap="square" lIns="201168" rIns="201168" tIns="146304"/>
+          <a:lstStyle/>
+          <a:p>
+            <a:pPr algn="l" latinLnBrk="0">
+              <a:spcAft>
+                <a:spcPts val="600"/>
+              </a:spcAft>
+            </a:pPr>
+            <a:r>
+              <a:rPr sz="1400" b="1">
                 <a:solidFill>
                   <a:srgbClr val="0E4D5E"/>
                 </a:solidFill>
                 <a:latin typeface="Segoe UI Semibold"/>
               </a:rPr>
-              <a:t>1/5 - 1/3</a:t>
-            </a:r>
-          </a:p>
-          <a:p>
-            <a:pPr algn="ctr" latinLnBrk="0"/>
-            <a:r>
-              <a:rPr sz="1150" b="0">
-                <a:solidFill>
-                  <a:srgbClr val="6E6A60"/>
+              <a:t>Complete grid</a:t>
+            </a:r>
+          </a:p>
+          <a:p>
+            <a:pPr algn="l" latinLnBrk="0">
+              <a:spcAft>
+                <a:spcPts val="400"/>
+              </a:spcAft>
+            </a:pPr>
+            <a:r>
+              <a:rPr sz="1350" b="0">
+                <a:solidFill>
+                  <a:srgbClr val="24262E"/>
                 </a:solidFill>
                 <a:latin typeface="Segoe UI"/>
               </a:rPr>
-              <a:t>Dagstuhl - ESMUC significant</a:t>
-            </a:r>
-          </a:p>
-        </p:txBody>
-      </p:sp>
-      <p:sp>
-        <p:nvSpPr>
-          <p:cNvPr id="10" name="Rounded Rectangle 9"/>
+              <a:t>140 final cells from the committed 2,000-shuffle SLURM protocol.</a:t>
+            </a:r>
+          </a:p>
+        </p:txBody>
+      </p:sp>
+      <p:sp>
+        <p:nvSpPr>
+          <p:cNvPr id="9" name="Rounded Rectangle 8"/>
           <p:cNvSpPr/>
           <p:nvPr/>
         </p:nvSpPr>
         <p:spPr>
           <a:xfrm>
-            <a:off x="8869680" y="2057400"/>
-            <a:ext cx="2651760" cy="1188720"/>
+            <a:off x="502920" y="4526280"/>
+            <a:ext cx="11185855" cy="914400"/>
           </a:xfrm>
           <a:prstGeom prst="roundRect">
             <a:avLst>
-              <a:gd name="adj" fmla="val 6000"/>
+              <a:gd name="adj" fmla="val 4000"/>
             </a:avLst>
           </a:prstGeom>
           <a:solidFill>
@@ -9988,61 +11536,45 @@
           </a:fontRef>
         </p:style>
         <p:txBody>
-          <a:bodyPr rtlCol="0" anchor="ctr" wrap="square"/>
-          <a:lstStyle/>
-          <a:p>
-            <a:pPr algn="ctr" latinLnBrk="0"/>
-            <a:r>
-              <a:rPr sz="2600" b="1">
+          <a:bodyPr rtlCol="0" anchor="t" wrap="square" lIns="201168" rIns="201168" tIns="146304"/>
+          <a:lstStyle/>
+          <a:p>
+            <a:pPr algn="l" latinLnBrk="0">
+              <a:spcAft>
+                <a:spcPts val="600"/>
+              </a:spcAft>
+            </a:pPr>
+            <a:r>
+              <a:rPr sz="1400" b="1">
                 <a:solidFill>
                   <a:srgbClr val="0E4D5E"/>
                 </a:solidFill>
                 <a:latin typeface="Segoe UI Semibold"/>
               </a:rPr>
-              <a:t>0/20</a:t>
-            </a:r>
-          </a:p>
-          <a:p>
-            <a:pPr algn="ctr" latinLnBrk="0"/>
-            <a:r>
-              <a:rPr sz="1150" b="0">
-                <a:solidFill>
-                  <a:srgbClr val="6E6A60"/>
+              <a:t>Claim provenance</a:t>
+            </a:r>
+          </a:p>
+          <a:p>
+            <a:pPr algn="l" latinLnBrk="0">
+              <a:spcAft>
+                <a:spcPts val="400"/>
+              </a:spcAft>
+            </a:pPr>
+            <a:r>
+              <a:rPr sz="1350" b="0">
+                <a:solidFill>
+                  <a:srgbClr val="24262E"/>
                 </a:solidFill>
                 <a:latin typeface="Segoe UI"/>
               </a:rPr>
-              <a:t>ChoralSynth significant</a:t>
-            </a:r>
-          </a:p>
-        </p:txBody>
-      </p:sp>
-      <p:pic>
-        <p:nvPicPr>
-          <p:cNvPr id="11" name="Picture 10" descr="wp3_flagship_LI_QuartetA_Take02_standard.png"/>
-          <p:cNvPicPr>
-            <a:picLocks noChangeAspect="1"/>
-          </p:cNvPicPr>
-          <p:nvPr/>
-        </p:nvPicPr>
-        <p:blipFill>
-          <a:blip r:embed="rId2"/>
-          <a:stretch>
-            <a:fillRect/>
-          </a:stretch>
-        </p:blipFill>
-        <p:spPr>
-          <a:xfrm>
-            <a:off x="4785363" y="3474720"/>
-            <a:ext cx="2620968" cy="2423160"/>
-          </a:xfrm>
-          <a:prstGeom prst="rect">
-            <a:avLst/>
-          </a:prstGeom>
-        </p:spPr>
-      </p:pic>
-      <p:sp>
-        <p:nvSpPr>
-          <p:cNvPr id="12" name="Rounded Rectangle 11"/>
+              <a:t>Every numerical statement in the deck traces to a committed CSV.</a:t>
+            </a:r>
+          </a:p>
+        </p:txBody>
+      </p:sp>
+      <p:sp>
+        <p:nvSpPr>
+          <p:cNvPr id="10" name="Rounded Rectangle 9"/>
           <p:cNvSpPr/>
           <p:nvPr/>
         </p:nvSpPr>
@@ -10089,7 +11621,7 @@
                 </a:solidFill>
                 <a:latin typeface="Segoe UI Semibold"/>
               </a:rPr>
-              <a:t>Limited support: two human pieces are centralized; no synthetic piece is.</a:t>
+              <a:t>The results can be audited without relying on the presentation.</a:t>
             </a:r>
           </a:p>
         </p:txBody>
@@ -10193,7 +11725,7 @@
                 </a:solidFill>
                 <a:latin typeface="Segoe UI Semibold"/>
               </a:rPr>
-              <a:t>H3: an honest null, and what it teaches</a:t>
+              <a:t>H1: latency breaks note timing</a:t>
             </a:r>
           </a:p>
         </p:txBody>
@@ -10232,7 +11764,7 @@
                 </a:solidFill>
                 <a:latin typeface="Segoe UI"/>
               </a:rPr>
-              <a:t>9 / 15</a:t>
+              <a:t>9 / 19</a:t>
             </a:r>
           </a:p>
         </p:txBody>
@@ -10284,8 +11816,8 @@
         </p:nvSpPr>
         <p:spPr>
           <a:xfrm>
-            <a:off x="502920" y="1371600"/>
-            <a:ext cx="3611880" cy="1188720"/>
+            <a:off x="502920" y="1234440"/>
+            <a:ext cx="2651760" cy="1143000"/>
           </a:xfrm>
           <a:prstGeom prst="roundRect">
             <a:avLst>
@@ -10321,13 +11853,13 @@
           <a:p>
             <a:pPr algn="ctr" latinLnBrk="0"/>
             <a:r>
-              <a:rPr sz="2600" b="1">
+              <a:rPr sz="3000" b="1">
                 <a:solidFill>
                   <a:srgbClr val="0E4D5E"/>
                 </a:solidFill>
                 <a:latin typeface="Segoe UI Semibold"/>
               </a:rPr>
-              <a:t>17 / 18</a:t>
+              <a:t>-56.5%</a:t>
             </a:r>
           </a:p>
           <a:p>
@@ -10339,7 +11871,7 @@
                 </a:solidFill>
                 <a:latin typeface="Segoe UI"/>
               </a:rPr>
-              <a:t>videos analyzable (one silent window)</a:t>
+              <a:t>Dagstuhl</a:t>
             </a:r>
           </a:p>
         </p:txBody>
@@ -10352,8 +11884,8 @@
         </p:nvSpPr>
         <p:spPr>
           <a:xfrm>
-            <a:off x="4251959" y="1371600"/>
-            <a:ext cx="3611880" cy="1188720"/>
+            <a:off x="3291840" y="1234440"/>
+            <a:ext cx="2651760" cy="1143000"/>
           </a:xfrm>
           <a:prstGeom prst="roundRect">
             <a:avLst>
@@ -10389,13 +11921,13 @@
           <a:p>
             <a:pPr algn="ctr" latinLnBrk="0"/>
             <a:r>
-              <a:rPr sz="2600" b="1">
+              <a:rPr sz="3000" b="1">
                 <a:solidFill>
                   <a:srgbClr val="0E4D5E"/>
                 </a:solidFill>
                 <a:latin typeface="Segoe UI Semibold"/>
               </a:rPr>
-              <a:t>1 / 17</a:t>
+              <a:t>-65.1%</a:t>
             </a:r>
           </a:p>
           <a:p>
@@ -10407,7 +11939,7 @@
                 </a:solidFill>
                 <a:latin typeface="Segoe UI"/>
               </a:rPr>
-              <a:t>significant at p &lt; 0.05 = chance</a:t>
+              <a:t>ESMUC</a:t>
             </a:r>
           </a:p>
         </p:txBody>
@@ -10420,8 +11952,8 @@
         </p:nvSpPr>
         <p:spPr>
           <a:xfrm>
-            <a:off x="8000998" y="1371600"/>
-            <a:ext cx="3611880" cy="1188720"/>
+            <a:off x="6080760" y="1234440"/>
+            <a:ext cx="2651760" cy="1143000"/>
           </a:xfrm>
           <a:prstGeom prst="roundRect">
             <a:avLst>
@@ -10457,13 +11989,13 @@
           <a:p>
             <a:pPr algn="ctr" latinLnBrk="0"/>
             <a:r>
-              <a:rPr sz="2600" b="1">
+              <a:rPr sz="3000" b="1">
                 <a:solidFill>
                   <a:srgbClr val="0E4D5E"/>
                 </a:solidFill>
                 <a:latin typeface="Segoe UI Semibold"/>
               </a:rPr>
-              <a:t>0.068</a:t>
+              <a:t>-75.1%</a:t>
             </a:r>
           </a:p>
           <a:p>
@@ -10475,14 +12007,82 @@
                 </a:solidFill>
                 <a:latin typeface="Segoe UI"/>
               </a:rPr>
-              <a:t>median max-lag r</a:t>
+              <a:t>ChoralSynth</a:t>
+            </a:r>
+          </a:p>
+        </p:txBody>
+      </p:sp>
+      <p:sp>
+        <p:nvSpPr>
+          <p:cNvPr id="9" name="Rounded Rectangle 8"/>
+          <p:cNvSpPr/>
+          <p:nvPr/>
+        </p:nvSpPr>
+        <p:spPr>
+          <a:xfrm>
+            <a:off x="8869680" y="1234440"/>
+            <a:ext cx="2651760" cy="1143000"/>
+          </a:xfrm>
+          <a:prstGeom prst="roundRect">
+            <a:avLst>
+              <a:gd name="adj" fmla="val 6000"/>
+            </a:avLst>
+          </a:prstGeom>
+          <a:solidFill>
+            <a:srgbClr val="FDFBF5"/>
+          </a:solidFill>
+          <a:ln w="12700">
+            <a:solidFill>
+              <a:srgbClr val="CBD9DD"/>
+            </a:solidFill>
+          </a:ln>
+        </p:spPr>
+        <p:style>
+          <a:lnRef idx="1">
+            <a:schemeClr val="accent1"/>
+          </a:lnRef>
+          <a:fillRef idx="3">
+            <a:schemeClr val="accent1"/>
+          </a:fillRef>
+          <a:effectRef idx="2">
+            <a:schemeClr val="accent1"/>
+          </a:effectRef>
+          <a:fontRef idx="minor">
+            <a:schemeClr val="lt1"/>
+          </a:fontRef>
+        </p:style>
+        <p:txBody>
+          <a:bodyPr rtlCol="0" anchor="ctr" wrap="square"/>
+          <a:lstStyle/>
+          <a:p>
+            <a:pPr algn="ctr" latinLnBrk="0"/>
+            <a:r>
+              <a:rPr sz="3000" b="1">
+                <a:solidFill>
+                  <a:srgbClr val="0E4D5E"/>
+                </a:solidFill>
+                <a:latin typeface="Segoe UI Semibold"/>
+              </a:rPr>
+              <a:t>-70.7%</a:t>
+            </a:r>
+          </a:p>
+          <a:p>
+            <a:pPr algn="ctr" latinLnBrk="0"/>
+            <a:r>
+              <a:rPr sz="1150" b="0">
+                <a:solidFill>
+                  <a:srgbClr val="6E6A60"/>
+                </a:solidFill>
+                <a:latin typeface="Segoe UI"/>
+              </a:rPr>
+              <a:t>Corpus; 28/28 decrease</a:t>
             </a:r>
           </a:p>
         </p:txBody>
       </p:sp>
       <p:pic>
         <p:nvPicPr>
-          <p:cNvPr id="9" name="Picture 8" descr="h3_visual_onset.png"/>
+          <p:cNvPr id="10" name="Picture 9" descr="tier3_corpus_summary.png"/>
           <p:cNvPicPr>
             <a:picLocks noChangeAspect="1"/>
           </p:cNvPicPr>
@@ -10496,8 +12096,8 @@
         </p:blipFill>
         <p:spPr>
           <a:xfrm>
-            <a:off x="1851218" y="2743200"/>
-            <a:ext cx="4069964" cy="3154680"/>
+            <a:off x="502920" y="2865656"/>
+            <a:ext cx="6858000" cy="2726888"/>
           </a:xfrm>
           <a:prstGeom prst="rect">
             <a:avLst/>
@@ -10506,46 +12106,83 @@
       </p:pic>
       <p:sp>
         <p:nvSpPr>
-          <p:cNvPr id="10" name="TextBox 9"/>
-          <p:cNvSpPr txBox="1"/>
-          <p:nvPr/>
-        </p:nvSpPr>
-        <p:spPr>
-          <a:xfrm>
-            <a:off x="7498079" y="2834640"/>
-            <a:ext cx="4114800" cy="2926080"/>
-          </a:xfrm>
-          <a:prstGeom prst="rect">
-            <a:avLst/>
-          </a:prstGeom>
-          <a:noFill/>
-        </p:spPr>
-        <p:txBody>
-          <a:bodyPr wrap="square" anchor="t" lIns="27432" rIns="27432" tIns="18288" bIns="18288">
-            <a:spAutoFit/>
-          </a:bodyPr>
-          <a:lstStyle/>
-          <a:p>
-            <a:pPr algn="l" latinLnBrk="0">
-              <a:lnSpc>
-                <a:spcPct val="100000"/>
-              </a:lnSpc>
+          <p:cNvPr id="11" name="Rounded Rectangle 10"/>
+          <p:cNvSpPr/>
+          <p:nvPr/>
+        </p:nvSpPr>
+        <p:spPr>
+          <a:xfrm>
+            <a:off x="7543800" y="2697480"/>
+            <a:ext cx="4069080" cy="2971800"/>
+          </a:xfrm>
+          <a:prstGeom prst="roundRect">
+            <a:avLst>
+              <a:gd name="adj" fmla="val 4000"/>
+            </a:avLst>
+          </a:prstGeom>
+          <a:solidFill>
+            <a:srgbClr val="FDFBF5"/>
+          </a:solidFill>
+          <a:ln w="12700">
+            <a:solidFill>
+              <a:srgbClr val="CBD9DD"/>
+            </a:solidFill>
+          </a:ln>
+        </p:spPr>
+        <p:style>
+          <a:lnRef idx="1">
+            <a:schemeClr val="accent1"/>
+          </a:lnRef>
+          <a:fillRef idx="3">
+            <a:schemeClr val="accent1"/>
+          </a:fillRef>
+          <a:effectRef idx="2">
+            <a:schemeClr val="accent1"/>
+          </a:effectRef>
+          <a:fontRef idx="minor">
+            <a:schemeClr val="lt1"/>
+          </a:fontRef>
+        </p:style>
+        <p:txBody>
+          <a:bodyPr rtlCol="0" anchor="t" wrap="square" lIns="201168" rIns="201168" tIns="146304"/>
+          <a:lstStyle/>
+          <a:p>
+            <a:pPr algn="l" latinLnBrk="0">
+              <a:spcAft>
+                <a:spcPts val="600"/>
+              </a:spcAft>
+            </a:pPr>
+            <a:r>
+              <a:rPr sz="1400" b="1">
+                <a:solidFill>
+                  <a:srgbClr val="0E4D5E"/>
+                </a:solidFill>
+                <a:latin typeface="Segoe UI Semibold"/>
+              </a:rPr>
+              <a:t>Channel comparison</a:t>
+            </a:r>
+          </a:p>
+          <a:p>
+            <a:pPr algn="l" latinLnBrk="0">
+              <a:spcAft>
+                <a:spcPts val="400"/>
+              </a:spcAft>
             </a:pPr>
             <a:r>
               <a:rPr sz="1350" b="0">
                 <a:solidFill>
-                  <a:srgbClr val="0E4D5E"/>
+                  <a:srgbClr val="24262E"/>
                 </a:solidFill>
                 <a:latin typeface="Segoe UI"/>
               </a:rPr>
-              <a:t>The estimator recovers known lags on synthetic coupled signals (tested in CI), so the null is informative: ensemble motion of one tracked stream does not couple to a mixed audio envelope. H3's full test still needs per-singer audio + video together.</a:t>
-            </a:r>
-          </a:p>
-        </p:txBody>
-      </p:sp>
-      <p:sp>
-        <p:nvSpPr>
-          <p:cNvPr id="11" name="Rounded Rectangle 10"/>
+              <a:t>Pure envelope A(t): -7.9% Dagstuhl, -11.9% corpus. The envelope-plus-network E(t) composite can rise because network density offsets the envelope decline.</a:t>
+            </a:r>
+          </a:p>
+        </p:txBody>
+      </p:sp>
+      <p:sp>
+        <p:nvSpPr>
+          <p:cNvPr id="12" name="Rounded Rectangle 11"/>
           <p:cNvSpPr/>
           <p:nvPr/>
         </p:nvSpPr>
@@ -10592,7 +12229,7 @@
                 </a:solidFill>
                 <a:latin typeface="Segoe UI Semibold"/>
               </a:rPr>
-              <a:t>We ran the promised experiment, it said no, and we report that.</a:t>
+              <a:t>All 28 pieces decrease; exact one-sided sign-test p = 3.73 x 10^-9.</a:t>
             </a:r>
           </a:p>
         </p:txBody>

--- a/output/jul23_final_presentation.pptx
+++ b/output/jul23_final_presentation.pptx
@@ -5,27 +5,27 @@
     <p:sldMasterId id="2147483648" r:id="rId1"/>
   </p:sldMasterIdLst>
   <p:sldIdLst>
-    <p:sldId id="256" r:id="rId7"/>
-    <p:sldId id="257" r:id="rId8"/>
-    <p:sldId id="258" r:id="rId9"/>
-    <p:sldId id="259" r:id="rId10"/>
-    <p:sldId id="260" r:id="rId11"/>
-    <p:sldId id="261" r:id="rId12"/>
-    <p:sldId id="262" r:id="rId13"/>
-    <p:sldId id="263" r:id="rId14"/>
-    <p:sldId id="264" r:id="rId15"/>
-    <p:sldId id="265" r:id="rId16"/>
-    <p:sldId id="266" r:id="rId17"/>
-    <p:sldId id="267" r:id="rId18"/>
-    <p:sldId id="268" r:id="rId19"/>
-    <p:sldId id="269" r:id="rId20"/>
-    <p:sldId id="270" r:id="rId21"/>
-    <p:sldId id="271" r:id="rId22"/>
-    <p:sldId id="272" r:id="rId23"/>
-    <p:sldId id="273" r:id="rId24"/>
-    <p:sldId id="274" r:id="rId25"/>
+    <p:sldId id="256" r:id="rId2"/>
+    <p:sldId id="257" r:id="rId3"/>
+    <p:sldId id="258" r:id="rId4"/>
+    <p:sldId id="259" r:id="rId5"/>
+    <p:sldId id="260" r:id="rId6"/>
+    <p:sldId id="261" r:id="rId7"/>
+    <p:sldId id="262" r:id="rId8"/>
+    <p:sldId id="263" r:id="rId9"/>
+    <p:sldId id="264" r:id="rId10"/>
+    <p:sldId id="265" r:id="rId11"/>
+    <p:sldId id="266" r:id="rId12"/>
+    <p:sldId id="267" r:id="rId13"/>
+    <p:sldId id="268" r:id="rId14"/>
+    <p:sldId id="269" r:id="rId15"/>
+    <p:sldId id="270" r:id="rId16"/>
+    <p:sldId id="271" r:id="rId17"/>
+    <p:sldId id="272" r:id="rId18"/>
+    <p:sldId id="273" r:id="rId19"/>
+    <p:sldId id="274" r:id="rId20"/>
   </p:sldIdLst>
-  <p:sldSz cx="12191695" cy="6858000" type="screen4x3"/>
+  <p:sldSz cx="12192000" cy="6858000"/>
   <p:notesSz cx="6858000" cy="9144000"/>
   <p:defaultTextStyle>
     <a:defPPr>
@@ -122,6 +122,22 @@
       </a:defRPr>
     </a:lvl9pPr>
   </p:defaultTextStyle>
+  <p:extLst>
+    <p:ext uri="{EFAFB233-063F-42B5-8137-9DF3F51BA10A}">
+      <p15:sldGuideLst xmlns:p15="http://schemas.microsoft.com/office/powerpoint/2012/main">
+        <p15:guide id="1" orient="horz" pos="2160">
+          <p15:clr>
+            <a:srgbClr val="A4A3A4"/>
+          </p15:clr>
+        </p15:guide>
+        <p15:guide id="2" pos="2880">
+          <p15:clr>
+            <a:srgbClr val="A4A3A4"/>
+          </p15:clr>
+        </p15:guide>
+      </p15:sldGuideLst>
+    </p:ext>
+  </p:extLst>
 </p:presentation>
 </file>
 
@@ -163,10 +179,9 @@
           <a:lstStyle/>
           <a:p>
             <a:r>
-              <a:rPr lang="en-US" smtClean="0"/>
+              <a:rPr lang="en-US"/>
               <a:t>Click to edit Master title style</a:t>
             </a:r>
-            <a:endParaRPr lang="en-US"/>
           </a:p>
         </p:txBody>
       </p:sp>
@@ -282,10 +297,9 @@
           </a:lstStyle>
           <a:p>
             <a:r>
-              <a:rPr lang="en-US" smtClean="0"/>
+              <a:rPr lang="en-US"/>
               <a:t>Click to edit Master subtitle style</a:t>
             </a:r>
-            <a:endParaRPr lang="en-US"/>
           </a:p>
         </p:txBody>
       </p:sp>
@@ -306,7 +320,7 @@
           <a:p>
             <a:fld id="{5BCAD085-E8A6-8845-BD4E-CB4CCA059FC4}" type="datetimeFigureOut">
               <a:rPr lang="en-US" smtClean="0"/>
-              <a:t>1/27/13</a:t>
+              <a:t>7/22/2026</a:t>
             </a:fld>
             <a:endParaRPr lang="en-US"/>
           </a:p>
@@ -400,10 +414,9 @@
           <a:lstStyle/>
           <a:p>
             <a:r>
-              <a:rPr lang="en-US" smtClean="0"/>
+              <a:rPr lang="en-US"/>
               <a:t>Click to edit Master title style</a:t>
             </a:r>
-            <a:endParaRPr lang="en-US"/>
           </a:p>
         </p:txBody>
       </p:sp>
@@ -424,38 +437,37 @@
           <a:p>
             <a:pPr lvl="0"/>
             <a:r>
-              <a:rPr lang="en-US" smtClean="0"/>
+              <a:rPr lang="en-US"/>
               <a:t>Click to edit Master text styles</a:t>
             </a:r>
           </a:p>
           <a:p>
             <a:pPr lvl="1"/>
             <a:r>
-              <a:rPr lang="en-US" smtClean="0"/>
+              <a:rPr lang="en-US"/>
               <a:t>Second level</a:t>
             </a:r>
           </a:p>
           <a:p>
             <a:pPr lvl="2"/>
             <a:r>
-              <a:rPr lang="en-US" smtClean="0"/>
+              <a:rPr lang="en-US"/>
               <a:t>Third level</a:t>
             </a:r>
           </a:p>
           <a:p>
             <a:pPr lvl="3"/>
             <a:r>
-              <a:rPr lang="en-US" smtClean="0"/>
+              <a:rPr lang="en-US"/>
               <a:t>Fourth level</a:t>
             </a:r>
           </a:p>
           <a:p>
             <a:pPr lvl="4"/>
             <a:r>
-              <a:rPr lang="en-US" smtClean="0"/>
+              <a:rPr lang="en-US"/>
               <a:t>Fifth level</a:t>
             </a:r>
-            <a:endParaRPr lang="en-US"/>
           </a:p>
         </p:txBody>
       </p:sp>
@@ -476,7 +488,7 @@
           <a:p>
             <a:fld id="{5BCAD085-E8A6-8845-BD4E-CB4CCA059FC4}" type="datetimeFigureOut">
               <a:rPr lang="en-US" smtClean="0"/>
-              <a:t>1/27/13</a:t>
+              <a:t>7/22/2026</a:t>
             </a:fld>
             <a:endParaRPr lang="en-US"/>
           </a:p>
@@ -575,10 +587,9 @@
           <a:lstStyle/>
           <a:p>
             <a:r>
-              <a:rPr lang="en-US" smtClean="0"/>
+              <a:rPr lang="en-US"/>
               <a:t>Click to edit Master title style</a:t>
             </a:r>
-            <a:endParaRPr lang="en-US"/>
           </a:p>
         </p:txBody>
       </p:sp>
@@ -604,38 +615,37 @@
           <a:p>
             <a:pPr lvl="0"/>
             <a:r>
-              <a:rPr lang="en-US" smtClean="0"/>
+              <a:rPr lang="en-US"/>
               <a:t>Click to edit Master text styles</a:t>
             </a:r>
           </a:p>
           <a:p>
             <a:pPr lvl="1"/>
             <a:r>
-              <a:rPr lang="en-US" smtClean="0"/>
+              <a:rPr lang="en-US"/>
               <a:t>Second level</a:t>
             </a:r>
           </a:p>
           <a:p>
             <a:pPr lvl="2"/>
             <a:r>
-              <a:rPr lang="en-US" smtClean="0"/>
+              <a:rPr lang="en-US"/>
               <a:t>Third level</a:t>
             </a:r>
           </a:p>
           <a:p>
             <a:pPr lvl="3"/>
             <a:r>
-              <a:rPr lang="en-US" smtClean="0"/>
+              <a:rPr lang="en-US"/>
               <a:t>Fourth level</a:t>
             </a:r>
           </a:p>
           <a:p>
             <a:pPr lvl="4"/>
             <a:r>
-              <a:rPr lang="en-US" smtClean="0"/>
+              <a:rPr lang="en-US"/>
               <a:t>Fifth level</a:t>
             </a:r>
-            <a:endParaRPr lang="en-US"/>
           </a:p>
         </p:txBody>
       </p:sp>
@@ -656,7 +666,7 @@
           <a:p>
             <a:fld id="{5BCAD085-E8A6-8845-BD4E-CB4CCA059FC4}" type="datetimeFigureOut">
               <a:rPr lang="en-US" smtClean="0"/>
-              <a:t>1/27/13</a:t>
+              <a:t>7/22/2026</a:t>
             </a:fld>
             <a:endParaRPr lang="en-US"/>
           </a:p>
@@ -750,10 +760,9 @@
           <a:lstStyle/>
           <a:p>
             <a:r>
-              <a:rPr lang="en-US" smtClean="0"/>
+              <a:rPr lang="en-US"/>
               <a:t>Click to edit Master title style</a:t>
             </a:r>
-            <a:endParaRPr lang="en-US"/>
           </a:p>
         </p:txBody>
       </p:sp>
@@ -774,38 +783,37 @@
           <a:p>
             <a:pPr lvl="0"/>
             <a:r>
-              <a:rPr lang="en-US" smtClean="0"/>
+              <a:rPr lang="en-US"/>
               <a:t>Click to edit Master text styles</a:t>
             </a:r>
           </a:p>
           <a:p>
             <a:pPr lvl="1"/>
             <a:r>
-              <a:rPr lang="en-US" smtClean="0"/>
+              <a:rPr lang="en-US"/>
               <a:t>Second level</a:t>
             </a:r>
           </a:p>
           <a:p>
             <a:pPr lvl="2"/>
             <a:r>
-              <a:rPr lang="en-US" smtClean="0"/>
+              <a:rPr lang="en-US"/>
               <a:t>Third level</a:t>
             </a:r>
           </a:p>
           <a:p>
             <a:pPr lvl="3"/>
             <a:r>
-              <a:rPr lang="en-US" smtClean="0"/>
+              <a:rPr lang="en-US"/>
               <a:t>Fourth level</a:t>
             </a:r>
           </a:p>
           <a:p>
             <a:pPr lvl="4"/>
             <a:r>
-              <a:rPr lang="en-US" smtClean="0"/>
+              <a:rPr lang="en-US"/>
               <a:t>Fifth level</a:t>
             </a:r>
-            <a:endParaRPr lang="en-US"/>
           </a:p>
         </p:txBody>
       </p:sp>
@@ -826,7 +834,7 @@
           <a:p>
             <a:fld id="{5BCAD085-E8A6-8845-BD4E-CB4CCA059FC4}" type="datetimeFigureOut">
               <a:rPr lang="en-US" smtClean="0"/>
-              <a:t>1/27/13</a:t>
+              <a:t>7/22/2026</a:t>
             </a:fld>
             <a:endParaRPr lang="en-US"/>
           </a:p>
@@ -929,10 +937,9 @@
           </a:lstStyle>
           <a:p>
             <a:r>
-              <a:rPr lang="en-US" smtClean="0"/>
+              <a:rPr lang="en-US"/>
               <a:t>Click to edit Master title style</a:t>
             </a:r>
-            <a:endParaRPr lang="en-US"/>
           </a:p>
         </p:txBody>
       </p:sp>
@@ -1049,7 +1056,7 @@
           <a:p>
             <a:pPr lvl="0"/>
             <a:r>
-              <a:rPr lang="en-US" smtClean="0"/>
+              <a:rPr lang="en-US"/>
               <a:t>Click to edit Master text styles</a:t>
             </a:r>
           </a:p>
@@ -1072,7 +1079,7 @@
           <a:p>
             <a:fld id="{5BCAD085-E8A6-8845-BD4E-CB4CCA059FC4}" type="datetimeFigureOut">
               <a:rPr lang="en-US" smtClean="0"/>
-              <a:t>1/27/13</a:t>
+              <a:t>7/22/2026</a:t>
             </a:fld>
             <a:endParaRPr lang="en-US"/>
           </a:p>
@@ -1166,10 +1173,9 @@
           <a:lstStyle/>
           <a:p>
             <a:r>
-              <a:rPr lang="en-US" smtClean="0"/>
+              <a:rPr lang="en-US"/>
               <a:t>Click to edit Master title style</a:t>
             </a:r>
-            <a:endParaRPr lang="en-US"/>
           </a:p>
         </p:txBody>
       </p:sp>
@@ -1223,38 +1229,37 @@
           <a:p>
             <a:pPr lvl="0"/>
             <a:r>
-              <a:rPr lang="en-US" smtClean="0"/>
+              <a:rPr lang="en-US"/>
               <a:t>Click to edit Master text styles</a:t>
             </a:r>
           </a:p>
           <a:p>
             <a:pPr lvl="1"/>
             <a:r>
-              <a:rPr lang="en-US" smtClean="0"/>
+              <a:rPr lang="en-US"/>
               <a:t>Second level</a:t>
             </a:r>
           </a:p>
           <a:p>
             <a:pPr lvl="2"/>
             <a:r>
-              <a:rPr lang="en-US" smtClean="0"/>
+              <a:rPr lang="en-US"/>
               <a:t>Third level</a:t>
             </a:r>
           </a:p>
           <a:p>
             <a:pPr lvl="3"/>
             <a:r>
-              <a:rPr lang="en-US" smtClean="0"/>
+              <a:rPr lang="en-US"/>
               <a:t>Fourth level</a:t>
             </a:r>
           </a:p>
           <a:p>
             <a:pPr lvl="4"/>
             <a:r>
-              <a:rPr lang="en-US" smtClean="0"/>
+              <a:rPr lang="en-US"/>
               <a:t>Fifth level</a:t>
             </a:r>
-            <a:endParaRPr lang="en-US"/>
           </a:p>
         </p:txBody>
       </p:sp>
@@ -1308,38 +1313,37 @@
           <a:p>
             <a:pPr lvl="0"/>
             <a:r>
-              <a:rPr lang="en-US" smtClean="0"/>
+              <a:rPr lang="en-US"/>
               <a:t>Click to edit Master text styles</a:t>
             </a:r>
           </a:p>
           <a:p>
             <a:pPr lvl="1"/>
             <a:r>
-              <a:rPr lang="en-US" smtClean="0"/>
+              <a:rPr lang="en-US"/>
               <a:t>Second level</a:t>
             </a:r>
           </a:p>
           <a:p>
             <a:pPr lvl="2"/>
             <a:r>
-              <a:rPr lang="en-US" smtClean="0"/>
+              <a:rPr lang="en-US"/>
               <a:t>Third level</a:t>
             </a:r>
           </a:p>
           <a:p>
             <a:pPr lvl="3"/>
             <a:r>
-              <a:rPr lang="en-US" smtClean="0"/>
+              <a:rPr lang="en-US"/>
               <a:t>Fourth level</a:t>
             </a:r>
           </a:p>
           <a:p>
             <a:pPr lvl="4"/>
             <a:r>
-              <a:rPr lang="en-US" smtClean="0"/>
+              <a:rPr lang="en-US"/>
               <a:t>Fifth level</a:t>
             </a:r>
-            <a:endParaRPr lang="en-US"/>
           </a:p>
         </p:txBody>
       </p:sp>
@@ -1360,7 +1364,7 @@
           <a:p>
             <a:fld id="{5BCAD085-E8A6-8845-BD4E-CB4CCA059FC4}" type="datetimeFigureOut">
               <a:rPr lang="en-US" smtClean="0"/>
-              <a:t>1/27/13</a:t>
+              <a:t>7/22/2026</a:t>
             </a:fld>
             <a:endParaRPr lang="en-US"/>
           </a:p>
@@ -1458,10 +1462,9 @@
           </a:lstStyle>
           <a:p>
             <a:r>
-              <a:rPr lang="en-US" smtClean="0"/>
+              <a:rPr lang="en-US"/>
               <a:t>Click to edit Master title style</a:t>
             </a:r>
-            <a:endParaRPr lang="en-US"/>
           </a:p>
         </p:txBody>
       </p:sp>
@@ -1524,7 +1527,7 @@
           <a:p>
             <a:pPr lvl="0"/>
             <a:r>
-              <a:rPr lang="en-US" smtClean="0"/>
+              <a:rPr lang="en-US"/>
               <a:t>Click to edit Master text styles</a:t>
             </a:r>
           </a:p>
@@ -1580,38 +1583,37 @@
           <a:p>
             <a:pPr lvl="0"/>
             <a:r>
-              <a:rPr lang="en-US" smtClean="0"/>
+              <a:rPr lang="en-US"/>
               <a:t>Click to edit Master text styles</a:t>
             </a:r>
           </a:p>
           <a:p>
             <a:pPr lvl="1"/>
             <a:r>
-              <a:rPr lang="en-US" smtClean="0"/>
+              <a:rPr lang="en-US"/>
               <a:t>Second level</a:t>
             </a:r>
           </a:p>
           <a:p>
             <a:pPr lvl="2"/>
             <a:r>
-              <a:rPr lang="en-US" smtClean="0"/>
+              <a:rPr lang="en-US"/>
               <a:t>Third level</a:t>
             </a:r>
           </a:p>
           <a:p>
             <a:pPr lvl="3"/>
             <a:r>
-              <a:rPr lang="en-US" smtClean="0"/>
+              <a:rPr lang="en-US"/>
               <a:t>Fourth level</a:t>
             </a:r>
           </a:p>
           <a:p>
             <a:pPr lvl="4"/>
             <a:r>
-              <a:rPr lang="en-US" smtClean="0"/>
+              <a:rPr lang="en-US"/>
               <a:t>Fifth level</a:t>
             </a:r>
-            <a:endParaRPr lang="en-US"/>
           </a:p>
         </p:txBody>
       </p:sp>
@@ -1674,7 +1676,7 @@
           <a:p>
             <a:pPr lvl="0"/>
             <a:r>
-              <a:rPr lang="en-US" smtClean="0"/>
+              <a:rPr lang="en-US"/>
               <a:t>Click to edit Master text styles</a:t>
             </a:r>
           </a:p>
@@ -1730,38 +1732,37 @@
           <a:p>
             <a:pPr lvl="0"/>
             <a:r>
-              <a:rPr lang="en-US" smtClean="0"/>
+              <a:rPr lang="en-US"/>
               <a:t>Click to edit Master text styles</a:t>
             </a:r>
           </a:p>
           <a:p>
             <a:pPr lvl="1"/>
             <a:r>
-              <a:rPr lang="en-US" smtClean="0"/>
+              <a:rPr lang="en-US"/>
               <a:t>Second level</a:t>
             </a:r>
           </a:p>
           <a:p>
             <a:pPr lvl="2"/>
             <a:r>
-              <a:rPr lang="en-US" smtClean="0"/>
+              <a:rPr lang="en-US"/>
               <a:t>Third level</a:t>
             </a:r>
           </a:p>
           <a:p>
             <a:pPr lvl="3"/>
             <a:r>
-              <a:rPr lang="en-US" smtClean="0"/>
+              <a:rPr lang="en-US"/>
               <a:t>Fourth level</a:t>
             </a:r>
           </a:p>
           <a:p>
             <a:pPr lvl="4"/>
             <a:r>
-              <a:rPr lang="en-US" smtClean="0"/>
+              <a:rPr lang="en-US"/>
               <a:t>Fifth level</a:t>
             </a:r>
-            <a:endParaRPr lang="en-US"/>
           </a:p>
         </p:txBody>
       </p:sp>
@@ -1782,7 +1783,7 @@
           <a:p>
             <a:fld id="{5BCAD085-E8A6-8845-BD4E-CB4CCA059FC4}" type="datetimeFigureOut">
               <a:rPr lang="en-US" smtClean="0"/>
-              <a:t>1/27/13</a:t>
+              <a:t>7/22/2026</a:t>
             </a:fld>
             <a:endParaRPr lang="en-US"/>
           </a:p>
@@ -1876,10 +1877,9 @@
           <a:lstStyle/>
           <a:p>
             <a:r>
-              <a:rPr lang="en-US" smtClean="0"/>
+              <a:rPr lang="en-US"/>
               <a:t>Click to edit Master title style</a:t>
             </a:r>
-            <a:endParaRPr lang="en-US"/>
           </a:p>
         </p:txBody>
       </p:sp>
@@ -1900,7 +1900,7 @@
           <a:p>
             <a:fld id="{5BCAD085-E8A6-8845-BD4E-CB4CCA059FC4}" type="datetimeFigureOut">
               <a:rPr lang="en-US" smtClean="0"/>
-              <a:t>1/27/13</a:t>
+              <a:t>7/22/2026</a:t>
             </a:fld>
             <a:endParaRPr lang="en-US"/>
           </a:p>
@@ -1995,7 +1995,7 @@
           <a:p>
             <a:fld id="{5BCAD085-E8A6-8845-BD4E-CB4CCA059FC4}" type="datetimeFigureOut">
               <a:rPr lang="en-US" smtClean="0"/>
-              <a:t>1/27/13</a:t>
+              <a:t>7/22/2026</a:t>
             </a:fld>
             <a:endParaRPr lang="en-US"/>
           </a:p>
@@ -2098,10 +2098,9 @@
           </a:lstStyle>
           <a:p>
             <a:r>
-              <a:rPr lang="en-US" smtClean="0"/>
+              <a:rPr lang="en-US"/>
               <a:t>Click to edit Master title style</a:t>
             </a:r>
-            <a:endParaRPr lang="en-US"/>
           </a:p>
         </p:txBody>
       </p:sp>
@@ -2155,38 +2154,37 @@
           <a:p>
             <a:pPr lvl="0"/>
             <a:r>
-              <a:rPr lang="en-US" smtClean="0"/>
+              <a:rPr lang="en-US"/>
               <a:t>Click to edit Master text styles</a:t>
             </a:r>
           </a:p>
           <a:p>
             <a:pPr lvl="1"/>
             <a:r>
-              <a:rPr lang="en-US" smtClean="0"/>
+              <a:rPr lang="en-US"/>
               <a:t>Second level</a:t>
             </a:r>
           </a:p>
           <a:p>
             <a:pPr lvl="2"/>
             <a:r>
-              <a:rPr lang="en-US" smtClean="0"/>
+              <a:rPr lang="en-US"/>
               <a:t>Third level</a:t>
             </a:r>
           </a:p>
           <a:p>
             <a:pPr lvl="3"/>
             <a:r>
-              <a:rPr lang="en-US" smtClean="0"/>
+              <a:rPr lang="en-US"/>
               <a:t>Fourth level</a:t>
             </a:r>
           </a:p>
           <a:p>
             <a:pPr lvl="4"/>
             <a:r>
-              <a:rPr lang="en-US" smtClean="0"/>
+              <a:rPr lang="en-US"/>
               <a:t>Fifth level</a:t>
             </a:r>
-            <a:endParaRPr lang="en-US"/>
           </a:p>
         </p:txBody>
       </p:sp>
@@ -2249,7 +2247,7 @@
           <a:p>
             <a:pPr lvl="0"/>
             <a:r>
-              <a:rPr lang="en-US" smtClean="0"/>
+              <a:rPr lang="en-US"/>
               <a:t>Click to edit Master text styles</a:t>
             </a:r>
           </a:p>
@@ -2272,7 +2270,7 @@
           <a:p>
             <a:fld id="{5BCAD085-E8A6-8845-BD4E-CB4CCA059FC4}" type="datetimeFigureOut">
               <a:rPr lang="en-US" smtClean="0"/>
-              <a:t>1/27/13</a:t>
+              <a:t>7/22/2026</a:t>
             </a:fld>
             <a:endParaRPr lang="en-US"/>
           </a:p>
@@ -2375,10 +2373,9 @@
           </a:lstStyle>
           <a:p>
             <a:r>
-              <a:rPr lang="en-US" smtClean="0"/>
+              <a:rPr lang="en-US"/>
               <a:t>Click to edit Master title style</a:t>
             </a:r>
-            <a:endParaRPr lang="en-US"/>
           </a:p>
         </p:txBody>
       </p:sp>
@@ -2502,7 +2499,7 @@
           <a:p>
             <a:pPr lvl="0"/>
             <a:r>
-              <a:rPr lang="en-US" smtClean="0"/>
+              <a:rPr lang="en-US"/>
               <a:t>Click to edit Master text styles</a:t>
             </a:r>
           </a:p>
@@ -2525,7 +2522,7 @@
           <a:p>
             <a:fld id="{5BCAD085-E8A6-8845-BD4E-CB4CCA059FC4}" type="datetimeFigureOut">
               <a:rPr lang="en-US" smtClean="0"/>
-              <a:t>1/27/13</a:t>
+              <a:t>7/22/2026</a:t>
             </a:fld>
             <a:endParaRPr lang="en-US"/>
           </a:p>
@@ -2634,10 +2631,9 @@
           <a:lstStyle/>
           <a:p>
             <a:r>
-              <a:rPr lang="en-US" smtClean="0"/>
+              <a:rPr lang="en-US"/>
               <a:t>Click to edit Master title style</a:t>
             </a:r>
-            <a:endParaRPr lang="en-US"/>
           </a:p>
         </p:txBody>
       </p:sp>
@@ -2668,38 +2664,37 @@
           <a:p>
             <a:pPr lvl="0"/>
             <a:r>
-              <a:rPr lang="en-US" smtClean="0"/>
+              <a:rPr lang="en-US"/>
               <a:t>Click to edit Master text styles</a:t>
             </a:r>
           </a:p>
           <a:p>
             <a:pPr lvl="1"/>
             <a:r>
-              <a:rPr lang="en-US" smtClean="0"/>
+              <a:rPr lang="en-US"/>
               <a:t>Second level</a:t>
             </a:r>
           </a:p>
           <a:p>
             <a:pPr lvl="2"/>
             <a:r>
-              <a:rPr lang="en-US" smtClean="0"/>
+              <a:rPr lang="en-US"/>
               <a:t>Third level</a:t>
             </a:r>
           </a:p>
           <a:p>
             <a:pPr lvl="3"/>
             <a:r>
-              <a:rPr lang="en-US" smtClean="0"/>
+              <a:rPr lang="en-US"/>
               <a:t>Fourth level</a:t>
             </a:r>
           </a:p>
           <a:p>
             <a:pPr lvl="4"/>
             <a:r>
-              <a:rPr lang="en-US" smtClean="0"/>
+              <a:rPr lang="en-US"/>
               <a:t>Fifth level</a:t>
             </a:r>
-            <a:endParaRPr lang="en-US"/>
           </a:p>
         </p:txBody>
       </p:sp>
@@ -2738,7 +2733,7 @@
           <a:p>
             <a:fld id="{5BCAD085-E8A6-8845-BD4E-CB4CCA059FC4}" type="datetimeFigureOut">
               <a:rPr lang="en-US" smtClean="0"/>
-              <a:t>1/27/13</a:t>
+              <a:t>7/22/2026</a:t>
             </a:fld>
             <a:endParaRPr lang="en-US"/>
           </a:p>
@@ -3097,7 +3092,7 @@
 </file>
 
 <file path=ppt/slides/slide1.xml><?xml version="1.0" encoding="utf-8"?>
-<p:sld xmlns:a="http://schemas.openxmlformats.org/drawingml/2006/main" xmlns:p="http://schemas.openxmlformats.org/presentationml/2006/main" xmlns:r="http://schemas.openxmlformats.org/officeDocument/2006/relationships">
+<p:sld xmlns:a="http://schemas.openxmlformats.org/drawingml/2006/main" xmlns:r="http://schemas.openxmlformats.org/officeDocument/2006/relationships" xmlns:p="http://schemas.openxmlformats.org/presentationml/2006/main">
   <p:cSld>
     <p:bg>
       <p:bgPr>
@@ -3113,7 +3108,14 @@
         <p:cNvGrpSpPr/>
         <p:nvPr/>
       </p:nvGrpSpPr>
-      <p:grpSpPr/>
+      <p:grpSpPr>
+        <a:xfrm>
+          <a:off x="0" y="0"/>
+          <a:ext cx="0" cy="0"/>
+          <a:chOff x="0" y="0"/>
+          <a:chExt cx="0" cy="0"/>
+        </a:xfrm>
+      </p:grpSpPr>
       <p:sp>
         <p:nvSpPr>
           <p:cNvPr id="2" name="TextBox 1"/>
@@ -3131,7 +3133,7 @@
           <a:noFill/>
         </p:spPr>
         <p:txBody>
-          <a:bodyPr wrap="square" anchor="t" lIns="27432" rIns="27432" tIns="18288" bIns="18288">
+          <a:bodyPr wrap="square" lIns="27432" tIns="18288" rIns="27432" bIns="18288" anchor="t">
             <a:spAutoFit/>
           </a:bodyPr>
           <a:lstStyle/>
@@ -3170,7 +3172,7 @@
           <a:noFill/>
         </p:spPr>
         <p:txBody>
-          <a:bodyPr wrap="square" anchor="t" lIns="27432" rIns="27432" tIns="18288" bIns="18288">
+          <a:bodyPr wrap="square" lIns="27432" tIns="18288" rIns="27432" bIns="18288" anchor="t">
             <a:spAutoFit/>
           </a:bodyPr>
           <a:lstStyle/>
@@ -3209,7 +3211,7 @@
           <a:noFill/>
         </p:spPr>
         <p:txBody>
-          <a:bodyPr wrap="square" anchor="t" lIns="27432" rIns="27432" tIns="18288" bIns="18288">
+          <a:bodyPr wrap="square" lIns="27432" tIns="18288" rIns="27432" bIns="18288" anchor="t">
             <a:spAutoFit/>
           </a:bodyPr>
           <a:lstStyle/>
@@ -3248,7 +3250,7 @@
           <a:noFill/>
         </p:spPr>
         <p:txBody>
-          <a:bodyPr wrap="square" anchor="t" lIns="27432" rIns="27432" tIns="18288" bIns="18288">
+          <a:bodyPr wrap="square" lIns="27432" tIns="18288" rIns="27432" bIns="18288" anchor="t">
             <a:spAutoFit/>
           </a:bodyPr>
           <a:lstStyle/>
@@ -3287,7 +3289,7 @@
           <a:noFill/>
         </p:spPr>
         <p:txBody>
-          <a:bodyPr wrap="square" anchor="t" lIns="27432" rIns="27432" tIns="18288" bIns="18288">
+          <a:bodyPr wrap="square" lIns="27432" tIns="18288" rIns="27432" bIns="18288" anchor="t">
             <a:spAutoFit/>
           </a:bodyPr>
           <a:lstStyle/>
@@ -3318,7 +3320,7 @@
 </file>
 
 <file path=ppt/slides/slide10.xml><?xml version="1.0" encoding="utf-8"?>
-<p:sld xmlns:a="http://schemas.openxmlformats.org/drawingml/2006/main" xmlns:p="http://schemas.openxmlformats.org/presentationml/2006/main" xmlns:r="http://schemas.openxmlformats.org/officeDocument/2006/relationships">
+<p:sld xmlns:a="http://schemas.openxmlformats.org/drawingml/2006/main" xmlns:r="http://schemas.openxmlformats.org/officeDocument/2006/relationships" xmlns:p="http://schemas.openxmlformats.org/presentationml/2006/main">
   <p:cSld>
     <p:bg>
       <p:bgPr>
@@ -3334,7 +3336,14 @@
         <p:cNvGrpSpPr/>
         <p:nvPr/>
       </p:nvGrpSpPr>
-      <p:grpSpPr/>
+      <p:grpSpPr>
+        <a:xfrm>
+          <a:off x="0" y="0"/>
+          <a:ext cx="0" cy="0"/>
+          <a:chOff x="0" y="0"/>
+          <a:chExt cx="0" cy="0"/>
+        </a:xfrm>
+      </p:grpSpPr>
       <p:sp>
         <p:nvSpPr>
           <p:cNvPr id="2" name="TextBox 1"/>
@@ -3352,7 +3361,7 @@
           <a:noFill/>
         </p:spPr>
         <p:txBody>
-          <a:bodyPr wrap="square" anchor="t" lIns="27432" rIns="27432" tIns="18288" bIns="18288">
+          <a:bodyPr wrap="square" lIns="27432" tIns="18288" rIns="27432" bIns="18288" anchor="t">
             <a:spAutoFit/>
           </a:bodyPr>
           <a:lstStyle/>
@@ -3391,7 +3400,7 @@
           <a:noFill/>
         </p:spPr>
         <p:txBody>
-          <a:bodyPr wrap="square" anchor="t" lIns="27432" rIns="27432" tIns="18288" bIns="18288">
+          <a:bodyPr wrap="square" lIns="27432" tIns="18288" rIns="27432" bIns="18288" anchor="t">
             <a:spAutoFit/>
           </a:bodyPr>
           <a:lstStyle/>
@@ -3430,7 +3439,7 @@
           <a:noFill/>
         </p:spPr>
         <p:txBody>
-          <a:bodyPr wrap="square" anchor="t" lIns="27432" rIns="27432" tIns="18288" bIns="18288">
+          <a:bodyPr wrap="square" lIns="27432" tIns="18288" rIns="27432" bIns="18288" anchor="t">
             <a:spAutoFit/>
           </a:bodyPr>
           <a:lstStyle/>
@@ -3469,7 +3478,7 @@
           <a:noFill/>
         </p:spPr>
         <p:txBody>
-          <a:bodyPr wrap="square" anchor="t" lIns="27432" rIns="27432" tIns="18288" bIns="18288">
+          <a:bodyPr wrap="square" lIns="27432" tIns="18288" rIns="27432" bIns="18288" anchor="t">
             <a:spAutoFit/>
           </a:bodyPr>
           <a:lstStyle/>
@@ -3531,7 +3540,7 @@
           </a:fontRef>
         </p:style>
         <p:txBody>
-          <a:bodyPr rtlCol="0" anchor="t" wrap="square" lIns="201168" rIns="201168" tIns="146304"/>
+          <a:bodyPr wrap="square" lIns="201168" tIns="146304" rIns="201168" rtlCol="0" anchor="t"/>
           <a:lstStyle/>
           <a:p>
             <a:pPr algn="l" latinLnBrk="0">
@@ -3607,7 +3616,7 @@
           </a:fontRef>
         </p:style>
         <p:txBody>
-          <a:bodyPr rtlCol="0" anchor="t" wrap="square" lIns="201168" rIns="201168" tIns="146304"/>
+          <a:bodyPr wrap="square" lIns="201168" tIns="146304" rIns="201168" rtlCol="0" anchor="t"/>
           <a:lstStyle/>
           <a:p>
             <a:pPr algn="l" latinLnBrk="0">
@@ -3683,7 +3692,7 @@
           </a:fontRef>
         </p:style>
         <p:txBody>
-          <a:bodyPr rtlCol="0" anchor="t" wrap="square" lIns="201168" rIns="201168" tIns="146304"/>
+          <a:bodyPr wrap="square" lIns="201168" tIns="146304" rIns="201168" rtlCol="0" anchor="t"/>
           <a:lstStyle/>
           <a:p>
             <a:pPr algn="l" latinLnBrk="0">
@@ -3759,7 +3768,7 @@
           </a:fontRef>
         </p:style>
         <p:txBody>
-          <a:bodyPr rtlCol="0" anchor="t" wrap="square" lIns="201168" rIns="201168" tIns="146304"/>
+          <a:bodyPr wrap="square" lIns="201168" tIns="146304" rIns="201168" rtlCol="0" anchor="t"/>
           <a:lstStyle/>
           <a:p>
             <a:pPr algn="l" latinLnBrk="0">
@@ -3803,7 +3812,7 @@
         </p:nvSpPr>
         <p:spPr>
           <a:xfrm>
-            <a:off x="502920" y="6144768"/>
+            <a:off x="502920" y="5979668"/>
             <a:ext cx="11185855" cy="475488"/>
           </a:xfrm>
           <a:prstGeom prst="roundRect">
@@ -3833,7 +3842,7 @@
           </a:fontRef>
         </p:style>
         <p:txBody>
-          <a:bodyPr rtlCol="0" anchor="ctr" wrap="square"/>
+          <a:bodyPr wrap="square" rtlCol="0" anchor="ctr"/>
           <a:lstStyle/>
           <a:p>
             <a:pPr algn="ctr" latinLnBrk="0"/>
@@ -3858,7 +3867,7 @@
 </file>
 
 <file path=ppt/slides/slide11.xml><?xml version="1.0" encoding="utf-8"?>
-<p:sld xmlns:a="http://schemas.openxmlformats.org/drawingml/2006/main" xmlns:p="http://schemas.openxmlformats.org/presentationml/2006/main" xmlns:r="http://schemas.openxmlformats.org/officeDocument/2006/relationships">
+<p:sld xmlns:a="http://schemas.openxmlformats.org/drawingml/2006/main" xmlns:r="http://schemas.openxmlformats.org/officeDocument/2006/relationships" xmlns:p="http://schemas.openxmlformats.org/presentationml/2006/main">
   <p:cSld>
     <p:bg>
       <p:bgPr>
@@ -3874,7 +3883,14 @@
         <p:cNvGrpSpPr/>
         <p:nvPr/>
       </p:nvGrpSpPr>
-      <p:grpSpPr/>
+      <p:grpSpPr>
+        <a:xfrm>
+          <a:off x="0" y="0"/>
+          <a:ext cx="0" cy="0"/>
+          <a:chOff x="0" y="0"/>
+          <a:chExt cx="0" cy="0"/>
+        </a:xfrm>
+      </p:grpSpPr>
       <p:sp>
         <p:nvSpPr>
           <p:cNvPr id="2" name="TextBox 1"/>
@@ -3892,7 +3908,7 @@
           <a:noFill/>
         </p:spPr>
         <p:txBody>
-          <a:bodyPr wrap="square" anchor="t" lIns="27432" rIns="27432" tIns="18288" bIns="18288">
+          <a:bodyPr wrap="square" lIns="27432" tIns="18288" rIns="27432" bIns="18288" anchor="t">
             <a:spAutoFit/>
           </a:bodyPr>
           <a:lstStyle/>
@@ -3931,7 +3947,7 @@
           <a:noFill/>
         </p:spPr>
         <p:txBody>
-          <a:bodyPr wrap="square" anchor="t" lIns="27432" rIns="27432" tIns="18288" bIns="18288">
+          <a:bodyPr wrap="square" lIns="27432" tIns="18288" rIns="27432" bIns="18288" anchor="t">
             <a:spAutoFit/>
           </a:bodyPr>
           <a:lstStyle/>
@@ -3970,7 +3986,7 @@
           <a:noFill/>
         </p:spPr>
         <p:txBody>
-          <a:bodyPr wrap="square" anchor="t" lIns="27432" rIns="27432" tIns="18288" bIns="18288">
+          <a:bodyPr wrap="square" lIns="27432" tIns="18288" rIns="27432" bIns="18288" anchor="t">
             <a:spAutoFit/>
           </a:bodyPr>
           <a:lstStyle/>
@@ -4009,7 +4025,7 @@
           <a:noFill/>
         </p:spPr>
         <p:txBody>
-          <a:bodyPr wrap="square" anchor="t" lIns="27432" rIns="27432" tIns="18288" bIns="18288">
+          <a:bodyPr wrap="square" lIns="27432" tIns="18288" rIns="27432" bIns="18288" anchor="t">
             <a:spAutoFit/>
           </a:bodyPr>
           <a:lstStyle/>
@@ -4071,7 +4087,7 @@
           </a:fontRef>
         </p:style>
         <p:txBody>
-          <a:bodyPr rtlCol="0" anchor="ctr" wrap="square"/>
+          <a:bodyPr wrap="square" rtlCol="0" anchor="ctr"/>
           <a:lstStyle/>
           <a:p>
             <a:pPr algn="ctr" latinLnBrk="0"/>
@@ -4139,7 +4155,7 @@
           </a:fontRef>
         </p:style>
         <p:txBody>
-          <a:bodyPr rtlCol="0" anchor="ctr" wrap="square"/>
+          <a:bodyPr wrap="square" rtlCol="0" anchor="ctr"/>
           <a:lstStyle/>
           <a:p>
             <a:pPr algn="ctr" latinLnBrk="0"/>
@@ -4207,7 +4223,7 @@
           </a:fontRef>
         </p:style>
         <p:txBody>
-          <a:bodyPr rtlCol="0" anchor="ctr" wrap="square"/>
+          <a:bodyPr wrap="square" rtlCol="0" anchor="ctr"/>
           <a:lstStyle/>
           <a:p>
             <a:pPr algn="ctr" latinLnBrk="0"/>
@@ -4275,7 +4291,7 @@
           </a:fontRef>
         </p:style>
         <p:txBody>
-          <a:bodyPr rtlCol="0" anchor="ctr" wrap="square"/>
+          <a:bodyPr wrap="square" rtlCol="0" anchor="ctr"/>
           <a:lstStyle/>
           <a:p>
             <a:pPr algn="ctr" latinLnBrk="0"/>
@@ -4335,7 +4351,7 @@
         </p:nvSpPr>
         <p:spPr>
           <a:xfrm>
-            <a:off x="502920" y="6144768"/>
+            <a:off x="502920" y="5941568"/>
             <a:ext cx="11185855" cy="475488"/>
           </a:xfrm>
           <a:prstGeom prst="roundRect">
@@ -4365,7 +4381,7 @@
           </a:fontRef>
         </p:style>
         <p:txBody>
-          <a:bodyPr rtlCol="0" anchor="ctr" wrap="square"/>
+          <a:bodyPr wrap="square" rtlCol="0" anchor="ctr"/>
           <a:lstStyle/>
           <a:p>
             <a:pPr algn="ctr" latinLnBrk="0"/>
@@ -4390,7 +4406,7 @@
 </file>
 
 <file path=ppt/slides/slide12.xml><?xml version="1.0" encoding="utf-8"?>
-<p:sld xmlns:a="http://schemas.openxmlformats.org/drawingml/2006/main" xmlns:p="http://schemas.openxmlformats.org/presentationml/2006/main" xmlns:r="http://schemas.openxmlformats.org/officeDocument/2006/relationships">
+<p:sld xmlns:a="http://schemas.openxmlformats.org/drawingml/2006/main" xmlns:r="http://schemas.openxmlformats.org/officeDocument/2006/relationships" xmlns:p="http://schemas.openxmlformats.org/presentationml/2006/main">
   <p:cSld>
     <p:bg>
       <p:bgPr>
@@ -4406,7 +4422,14 @@
         <p:cNvGrpSpPr/>
         <p:nvPr/>
       </p:nvGrpSpPr>
-      <p:grpSpPr/>
+      <p:grpSpPr>
+        <a:xfrm>
+          <a:off x="0" y="0"/>
+          <a:ext cx="0" cy="0"/>
+          <a:chOff x="0" y="0"/>
+          <a:chExt cx="0" cy="0"/>
+        </a:xfrm>
+      </p:grpSpPr>
       <p:sp>
         <p:nvSpPr>
           <p:cNvPr id="2" name="TextBox 1"/>
@@ -4424,7 +4447,7 @@
           <a:noFill/>
         </p:spPr>
         <p:txBody>
-          <a:bodyPr wrap="square" anchor="t" lIns="27432" rIns="27432" tIns="18288" bIns="18288">
+          <a:bodyPr wrap="square" lIns="27432" tIns="18288" rIns="27432" bIns="18288" anchor="t">
             <a:spAutoFit/>
           </a:bodyPr>
           <a:lstStyle/>
@@ -4463,7 +4486,7 @@
           <a:noFill/>
         </p:spPr>
         <p:txBody>
-          <a:bodyPr wrap="square" anchor="t" lIns="27432" rIns="27432" tIns="18288" bIns="18288">
+          <a:bodyPr wrap="square" lIns="27432" tIns="18288" rIns="27432" bIns="18288" anchor="t">
             <a:spAutoFit/>
           </a:bodyPr>
           <a:lstStyle/>
@@ -4502,7 +4525,7 @@
           <a:noFill/>
         </p:spPr>
         <p:txBody>
-          <a:bodyPr wrap="square" anchor="t" lIns="27432" rIns="27432" tIns="18288" bIns="18288">
+          <a:bodyPr wrap="square" lIns="27432" tIns="18288" rIns="27432" bIns="18288" anchor="t">
             <a:spAutoFit/>
           </a:bodyPr>
           <a:lstStyle/>
@@ -4541,7 +4564,7 @@
           <a:noFill/>
         </p:spPr>
         <p:txBody>
-          <a:bodyPr wrap="square" anchor="t" lIns="27432" rIns="27432" tIns="18288" bIns="18288">
+          <a:bodyPr wrap="square" lIns="27432" tIns="18288" rIns="27432" bIns="18288" anchor="t">
             <a:spAutoFit/>
           </a:bodyPr>
           <a:lstStyle/>
@@ -4603,7 +4626,7 @@
           </a:fontRef>
         </p:style>
         <p:txBody>
-          <a:bodyPr rtlCol="0" anchor="ctr" wrap="square"/>
+          <a:bodyPr wrap="square" rtlCol="0" anchor="ctr"/>
           <a:lstStyle/>
           <a:p>
             <a:pPr algn="ctr" latinLnBrk="0"/>
@@ -4671,7 +4694,7 @@
           </a:fontRef>
         </p:style>
         <p:txBody>
-          <a:bodyPr rtlCol="0" anchor="ctr" wrap="square"/>
+          <a:bodyPr wrap="square" rtlCol="0" anchor="ctr"/>
           <a:lstStyle/>
           <a:p>
             <a:pPr algn="ctr" latinLnBrk="0"/>
@@ -4739,7 +4762,7 @@
           </a:fontRef>
         </p:style>
         <p:txBody>
-          <a:bodyPr rtlCol="0" anchor="ctr" wrap="square"/>
+          <a:bodyPr wrap="square" rtlCol="0" anchor="ctr"/>
           <a:lstStyle/>
           <a:p>
             <a:pPr algn="ctr" latinLnBrk="0"/>
@@ -4831,7 +4854,7 @@
           </a:fontRef>
         </p:style>
         <p:txBody>
-          <a:bodyPr rtlCol="0" anchor="t" wrap="square" lIns="201168" rIns="201168" tIns="146304"/>
+          <a:bodyPr wrap="square" lIns="201168" tIns="146304" rIns="201168" rtlCol="0" anchor="t"/>
           <a:lstStyle/>
           <a:p>
             <a:pPr algn="l" latinLnBrk="0">
@@ -4875,7 +4898,7 @@
         </p:nvSpPr>
         <p:spPr>
           <a:xfrm>
-            <a:off x="502920" y="6144768"/>
+            <a:off x="502920" y="5979668"/>
             <a:ext cx="11185855" cy="475488"/>
           </a:xfrm>
           <a:prstGeom prst="roundRect">
@@ -4905,7 +4928,7 @@
           </a:fontRef>
         </p:style>
         <p:txBody>
-          <a:bodyPr rtlCol="0" anchor="ctr" wrap="square"/>
+          <a:bodyPr wrap="square" rtlCol="0" anchor="ctr"/>
           <a:lstStyle/>
           <a:p>
             <a:pPr algn="ctr" latinLnBrk="0"/>
@@ -4930,7 +4953,7 @@
 </file>
 
 <file path=ppt/slides/slide13.xml><?xml version="1.0" encoding="utf-8"?>
-<p:sld xmlns:a="http://schemas.openxmlformats.org/drawingml/2006/main" xmlns:p="http://schemas.openxmlformats.org/presentationml/2006/main" xmlns:r="http://schemas.openxmlformats.org/officeDocument/2006/relationships">
+<p:sld xmlns:a="http://schemas.openxmlformats.org/drawingml/2006/main" xmlns:r="http://schemas.openxmlformats.org/officeDocument/2006/relationships" xmlns:p="http://schemas.openxmlformats.org/presentationml/2006/main">
   <p:cSld>
     <p:bg>
       <p:bgPr>
@@ -4946,7 +4969,14 @@
         <p:cNvGrpSpPr/>
         <p:nvPr/>
       </p:nvGrpSpPr>
-      <p:grpSpPr/>
+      <p:grpSpPr>
+        <a:xfrm>
+          <a:off x="0" y="0"/>
+          <a:ext cx="0" cy="0"/>
+          <a:chOff x="0" y="0"/>
+          <a:chExt cx="0" cy="0"/>
+        </a:xfrm>
+      </p:grpSpPr>
       <p:sp>
         <p:nvSpPr>
           <p:cNvPr id="2" name="TextBox 1"/>
@@ -4964,7 +4994,7 @@
           <a:noFill/>
         </p:spPr>
         <p:txBody>
-          <a:bodyPr wrap="square" anchor="t" lIns="27432" rIns="27432" tIns="18288" bIns="18288">
+          <a:bodyPr wrap="square" lIns="27432" tIns="18288" rIns="27432" bIns="18288" anchor="t">
             <a:spAutoFit/>
           </a:bodyPr>
           <a:lstStyle/>
@@ -5003,7 +5033,7 @@
           <a:noFill/>
         </p:spPr>
         <p:txBody>
-          <a:bodyPr wrap="square" anchor="t" lIns="27432" rIns="27432" tIns="18288" bIns="18288">
+          <a:bodyPr wrap="square" lIns="27432" tIns="18288" rIns="27432" bIns="18288" anchor="t">
             <a:spAutoFit/>
           </a:bodyPr>
           <a:lstStyle/>
@@ -5042,7 +5072,7 @@
           <a:noFill/>
         </p:spPr>
         <p:txBody>
-          <a:bodyPr wrap="square" anchor="t" lIns="27432" rIns="27432" tIns="18288" bIns="18288">
+          <a:bodyPr wrap="square" lIns="27432" tIns="18288" rIns="27432" bIns="18288" anchor="t">
             <a:spAutoFit/>
           </a:bodyPr>
           <a:lstStyle/>
@@ -5081,7 +5111,7 @@
           <a:noFill/>
         </p:spPr>
         <p:txBody>
-          <a:bodyPr wrap="square" anchor="t" lIns="27432" rIns="27432" tIns="18288" bIns="18288">
+          <a:bodyPr wrap="square" lIns="27432" tIns="18288" rIns="27432" bIns="18288" anchor="t">
             <a:spAutoFit/>
           </a:bodyPr>
           <a:lstStyle/>
@@ -5143,7 +5173,7 @@
           </a:fontRef>
         </p:style>
         <p:txBody>
-          <a:bodyPr rtlCol="0" anchor="t" wrap="square" lIns="201168" rIns="201168" tIns="146304"/>
+          <a:bodyPr wrap="square" lIns="201168" tIns="146304" rIns="201168" rtlCol="0" anchor="t"/>
           <a:lstStyle/>
           <a:p>
             <a:pPr algn="l" latinLnBrk="0">
@@ -5219,7 +5249,7 @@
           </a:fontRef>
         </p:style>
         <p:txBody>
-          <a:bodyPr rtlCol="0" anchor="t" wrap="square" lIns="201168" rIns="201168" tIns="146304"/>
+          <a:bodyPr wrap="square" lIns="201168" tIns="146304" rIns="201168" rtlCol="0" anchor="t"/>
           <a:lstStyle/>
           <a:p>
             <a:pPr algn="l" latinLnBrk="0">
@@ -5295,7 +5325,7 @@
           </a:fontRef>
         </p:style>
         <p:txBody>
-          <a:bodyPr rtlCol="0" anchor="t" wrap="square" lIns="201168" rIns="201168" tIns="146304"/>
+          <a:bodyPr wrap="square" lIns="201168" tIns="146304" rIns="201168" rtlCol="0" anchor="t"/>
           <a:lstStyle/>
           <a:p>
             <a:pPr algn="l" latinLnBrk="0">
@@ -5339,7 +5369,7 @@
         </p:nvSpPr>
         <p:spPr>
           <a:xfrm>
-            <a:off x="502920" y="6144768"/>
+            <a:off x="502920" y="5935218"/>
             <a:ext cx="11185855" cy="475488"/>
           </a:xfrm>
           <a:prstGeom prst="roundRect">
@@ -5369,7 +5399,7 @@
           </a:fontRef>
         </p:style>
         <p:txBody>
-          <a:bodyPr rtlCol="0" anchor="ctr" wrap="square"/>
+          <a:bodyPr wrap="square" rtlCol="0" anchor="ctr"/>
           <a:lstStyle/>
           <a:p>
             <a:pPr algn="ctr" latinLnBrk="0"/>
@@ -5394,7 +5424,7 @@
 </file>
 
 <file path=ppt/slides/slide14.xml><?xml version="1.0" encoding="utf-8"?>
-<p:sld xmlns:a="http://schemas.openxmlformats.org/drawingml/2006/main" xmlns:p="http://schemas.openxmlformats.org/presentationml/2006/main" xmlns:r="http://schemas.openxmlformats.org/officeDocument/2006/relationships">
+<p:sld xmlns:a="http://schemas.openxmlformats.org/drawingml/2006/main" xmlns:r="http://schemas.openxmlformats.org/officeDocument/2006/relationships" xmlns:p="http://schemas.openxmlformats.org/presentationml/2006/main">
   <p:cSld>
     <p:bg>
       <p:bgPr>
@@ -5410,7 +5440,14 @@
         <p:cNvGrpSpPr/>
         <p:nvPr/>
       </p:nvGrpSpPr>
-      <p:grpSpPr/>
+      <p:grpSpPr>
+        <a:xfrm>
+          <a:off x="0" y="0"/>
+          <a:ext cx="0" cy="0"/>
+          <a:chOff x="0" y="0"/>
+          <a:chExt cx="0" cy="0"/>
+        </a:xfrm>
+      </p:grpSpPr>
       <p:sp>
         <p:nvSpPr>
           <p:cNvPr id="2" name="TextBox 1"/>
@@ -5428,7 +5465,7 @@
           <a:noFill/>
         </p:spPr>
         <p:txBody>
-          <a:bodyPr wrap="square" anchor="t" lIns="27432" rIns="27432" tIns="18288" bIns="18288">
+          <a:bodyPr wrap="square" lIns="27432" tIns="18288" rIns="27432" bIns="18288" anchor="t">
             <a:spAutoFit/>
           </a:bodyPr>
           <a:lstStyle/>
@@ -5467,7 +5504,7 @@
           <a:noFill/>
         </p:spPr>
         <p:txBody>
-          <a:bodyPr wrap="square" anchor="t" lIns="27432" rIns="27432" tIns="18288" bIns="18288">
+          <a:bodyPr wrap="square" lIns="27432" tIns="18288" rIns="27432" bIns="18288" anchor="t">
             <a:spAutoFit/>
           </a:bodyPr>
           <a:lstStyle/>
@@ -5506,7 +5543,7 @@
           <a:noFill/>
         </p:spPr>
         <p:txBody>
-          <a:bodyPr wrap="square" anchor="t" lIns="27432" rIns="27432" tIns="18288" bIns="18288">
+          <a:bodyPr wrap="square" lIns="27432" tIns="18288" rIns="27432" bIns="18288" anchor="t">
             <a:spAutoFit/>
           </a:bodyPr>
           <a:lstStyle/>
@@ -5545,7 +5582,7 @@
           <a:noFill/>
         </p:spPr>
         <p:txBody>
-          <a:bodyPr wrap="square" anchor="t" lIns="27432" rIns="27432" tIns="18288" bIns="18288">
+          <a:bodyPr wrap="square" lIns="27432" tIns="18288" rIns="27432" bIns="18288" anchor="t">
             <a:spAutoFit/>
           </a:bodyPr>
           <a:lstStyle/>
@@ -5607,7 +5644,7 @@
           </a:fontRef>
         </p:style>
         <p:txBody>
-          <a:bodyPr rtlCol="0" anchor="t" wrap="square" lIns="201168" rIns="201168" tIns="146304"/>
+          <a:bodyPr wrap="square" lIns="201168" tIns="146304" rIns="201168" rtlCol="0" anchor="t"/>
           <a:lstStyle/>
           <a:p>
             <a:pPr algn="l" latinLnBrk="0">
@@ -5683,7 +5720,7 @@
           </a:fontRef>
         </p:style>
         <p:txBody>
-          <a:bodyPr rtlCol="0" anchor="t" wrap="square" lIns="201168" rIns="201168" tIns="146304"/>
+          <a:bodyPr wrap="square" lIns="201168" tIns="146304" rIns="201168" rtlCol="0" anchor="t"/>
           <a:lstStyle/>
           <a:p>
             <a:pPr algn="l" latinLnBrk="0">
@@ -5759,7 +5796,7 @@
           </a:fontRef>
         </p:style>
         <p:txBody>
-          <a:bodyPr rtlCol="0" anchor="t" wrap="square" lIns="201168" rIns="201168" tIns="146304"/>
+          <a:bodyPr wrap="square" lIns="201168" tIns="146304" rIns="201168" rtlCol="0" anchor="t"/>
           <a:lstStyle/>
           <a:p>
             <a:pPr algn="l" latinLnBrk="0">
@@ -5835,7 +5872,7 @@
           </a:fontRef>
         </p:style>
         <p:txBody>
-          <a:bodyPr rtlCol="0" anchor="t" wrap="square" lIns="201168" rIns="201168" tIns="146304"/>
+          <a:bodyPr wrap="square" lIns="201168" tIns="146304" rIns="201168" rtlCol="0" anchor="t"/>
           <a:lstStyle/>
           <a:p>
             <a:pPr algn="l" latinLnBrk="0">
@@ -5911,7 +5948,7 @@
           </a:fontRef>
         </p:style>
         <p:txBody>
-          <a:bodyPr rtlCol="0" anchor="t" wrap="square" lIns="201168" rIns="201168" tIns="146304"/>
+          <a:bodyPr wrap="square" lIns="201168" tIns="146304" rIns="201168" rtlCol="0" anchor="t"/>
           <a:lstStyle/>
           <a:p>
             <a:pPr algn="l" latinLnBrk="0">
@@ -5956,7 +5993,7 @@
 </file>
 
 <file path=ppt/slides/slide15.xml><?xml version="1.0" encoding="utf-8"?>
-<p:sld xmlns:a="http://schemas.openxmlformats.org/drawingml/2006/main" xmlns:p="http://schemas.openxmlformats.org/presentationml/2006/main" xmlns:r="http://schemas.openxmlformats.org/officeDocument/2006/relationships">
+<p:sld xmlns:a="http://schemas.openxmlformats.org/drawingml/2006/main" xmlns:r="http://schemas.openxmlformats.org/officeDocument/2006/relationships" xmlns:p="http://schemas.openxmlformats.org/presentationml/2006/main">
   <p:cSld>
     <p:bg>
       <p:bgPr>
@@ -5972,7 +6009,14 @@
         <p:cNvGrpSpPr/>
         <p:nvPr/>
       </p:nvGrpSpPr>
-      <p:grpSpPr/>
+      <p:grpSpPr>
+        <a:xfrm>
+          <a:off x="0" y="0"/>
+          <a:ext cx="0" cy="0"/>
+          <a:chOff x="0" y="0"/>
+          <a:chExt cx="0" cy="0"/>
+        </a:xfrm>
+      </p:grpSpPr>
       <p:sp>
         <p:nvSpPr>
           <p:cNvPr id="2" name="TextBox 1"/>
@@ -5990,7 +6034,7 @@
           <a:noFill/>
         </p:spPr>
         <p:txBody>
-          <a:bodyPr wrap="square" anchor="t" lIns="27432" rIns="27432" tIns="18288" bIns="18288">
+          <a:bodyPr wrap="square" lIns="27432" tIns="18288" rIns="27432" bIns="18288" anchor="t">
             <a:spAutoFit/>
           </a:bodyPr>
           <a:lstStyle/>
@@ -6029,7 +6073,7 @@
           <a:noFill/>
         </p:spPr>
         <p:txBody>
-          <a:bodyPr wrap="square" anchor="t" lIns="27432" rIns="27432" tIns="18288" bIns="18288">
+          <a:bodyPr wrap="square" lIns="27432" tIns="18288" rIns="27432" bIns="18288" anchor="t">
             <a:spAutoFit/>
           </a:bodyPr>
           <a:lstStyle/>
@@ -6068,7 +6112,7 @@
           <a:noFill/>
         </p:spPr>
         <p:txBody>
-          <a:bodyPr wrap="square" anchor="t" lIns="27432" rIns="27432" tIns="18288" bIns="18288">
+          <a:bodyPr wrap="square" lIns="27432" tIns="18288" rIns="27432" bIns="18288" anchor="t">
             <a:spAutoFit/>
           </a:bodyPr>
           <a:lstStyle/>
@@ -6107,7 +6151,7 @@
           <a:noFill/>
         </p:spPr>
         <p:txBody>
-          <a:bodyPr wrap="square" anchor="t" lIns="27432" rIns="27432" tIns="18288" bIns="18288">
+          <a:bodyPr wrap="square" lIns="27432" tIns="18288" rIns="27432" bIns="18288" anchor="t">
             <a:spAutoFit/>
           </a:bodyPr>
           <a:lstStyle/>
@@ -6169,7 +6213,7 @@
           </a:fontRef>
         </p:style>
         <p:txBody>
-          <a:bodyPr rtlCol="0" anchor="t" wrap="square" lIns="201168" rIns="201168" tIns="146304"/>
+          <a:bodyPr wrap="square" lIns="201168" tIns="146304" rIns="201168" rtlCol="0" anchor="t"/>
           <a:lstStyle/>
           <a:p>
             <a:pPr algn="l" latinLnBrk="0">
@@ -6245,7 +6289,7 @@
           </a:fontRef>
         </p:style>
         <p:txBody>
-          <a:bodyPr rtlCol="0" anchor="t" wrap="square" lIns="201168" rIns="201168" tIns="146304"/>
+          <a:bodyPr wrap="square" lIns="201168" tIns="146304" rIns="201168" rtlCol="0" anchor="t"/>
           <a:lstStyle/>
           <a:p>
             <a:pPr algn="l" latinLnBrk="0">
@@ -6321,7 +6365,7 @@
           </a:fontRef>
         </p:style>
         <p:txBody>
-          <a:bodyPr rtlCol="0" anchor="t" wrap="square" lIns="201168" rIns="201168" tIns="146304"/>
+          <a:bodyPr wrap="square" lIns="201168" tIns="146304" rIns="201168" rtlCol="0" anchor="t"/>
           <a:lstStyle/>
           <a:p>
             <a:pPr algn="l" latinLnBrk="0">
@@ -6397,7 +6441,7 @@
           </a:fontRef>
         </p:style>
         <p:txBody>
-          <a:bodyPr rtlCol="0" anchor="t" wrap="square" lIns="201168" rIns="201168" tIns="146304"/>
+          <a:bodyPr wrap="square" lIns="201168" tIns="146304" rIns="201168" rtlCol="0" anchor="t"/>
           <a:lstStyle/>
           <a:p>
             <a:pPr algn="l" latinLnBrk="0">
@@ -6442,7 +6486,7 @@
 </file>
 
 <file path=ppt/slides/slide16.xml><?xml version="1.0" encoding="utf-8"?>
-<p:sld xmlns:a="http://schemas.openxmlformats.org/drawingml/2006/main" xmlns:p="http://schemas.openxmlformats.org/presentationml/2006/main" xmlns:r="http://schemas.openxmlformats.org/officeDocument/2006/relationships">
+<p:sld xmlns:a="http://schemas.openxmlformats.org/drawingml/2006/main" xmlns:r="http://schemas.openxmlformats.org/officeDocument/2006/relationships" xmlns:p="http://schemas.openxmlformats.org/presentationml/2006/main">
   <p:cSld>
     <p:bg>
       <p:bgPr>
@@ -6458,7 +6502,14 @@
         <p:cNvGrpSpPr/>
         <p:nvPr/>
       </p:nvGrpSpPr>
-      <p:grpSpPr/>
+      <p:grpSpPr>
+        <a:xfrm>
+          <a:off x="0" y="0"/>
+          <a:ext cx="0" cy="0"/>
+          <a:chOff x="0" y="0"/>
+          <a:chExt cx="0" cy="0"/>
+        </a:xfrm>
+      </p:grpSpPr>
       <p:sp>
         <p:nvSpPr>
           <p:cNvPr id="2" name="TextBox 1"/>
@@ -6476,7 +6527,7 @@
           <a:noFill/>
         </p:spPr>
         <p:txBody>
-          <a:bodyPr wrap="square" anchor="t" lIns="27432" rIns="27432" tIns="18288" bIns="18288">
+          <a:bodyPr wrap="square" lIns="27432" tIns="18288" rIns="27432" bIns="18288" anchor="t">
             <a:spAutoFit/>
           </a:bodyPr>
           <a:lstStyle/>
@@ -6515,7 +6566,7 @@
           <a:noFill/>
         </p:spPr>
         <p:txBody>
-          <a:bodyPr wrap="square" anchor="t" lIns="27432" rIns="27432" tIns="18288" bIns="18288">
+          <a:bodyPr wrap="square" lIns="27432" tIns="18288" rIns="27432" bIns="18288" anchor="t">
             <a:spAutoFit/>
           </a:bodyPr>
           <a:lstStyle/>
@@ -6554,7 +6605,7 @@
           <a:noFill/>
         </p:spPr>
         <p:txBody>
-          <a:bodyPr wrap="square" anchor="t" lIns="27432" rIns="27432" tIns="18288" bIns="18288">
+          <a:bodyPr wrap="square" lIns="27432" tIns="18288" rIns="27432" bIns="18288" anchor="t">
             <a:spAutoFit/>
           </a:bodyPr>
           <a:lstStyle/>
@@ -6593,7 +6644,7 @@
           <a:noFill/>
         </p:spPr>
         <p:txBody>
-          <a:bodyPr wrap="square" anchor="t" lIns="27432" rIns="27432" tIns="18288" bIns="18288">
+          <a:bodyPr wrap="square" lIns="27432" tIns="18288" rIns="27432" bIns="18288" anchor="t">
             <a:spAutoFit/>
           </a:bodyPr>
           <a:lstStyle/>
@@ -6655,7 +6706,7 @@
           </a:fontRef>
         </p:style>
         <p:txBody>
-          <a:bodyPr rtlCol="0" anchor="t" wrap="square" lIns="201168" rIns="201168" tIns="146304"/>
+          <a:bodyPr wrap="square" lIns="201168" tIns="146304" rIns="201168" rtlCol="0" anchor="t"/>
           <a:lstStyle/>
           <a:p>
             <a:pPr algn="l" latinLnBrk="0">
@@ -6731,7 +6782,7 @@
           </a:fontRef>
         </p:style>
         <p:txBody>
-          <a:bodyPr rtlCol="0" anchor="t" wrap="square" lIns="201168" rIns="201168" tIns="146304"/>
+          <a:bodyPr wrap="square" lIns="201168" tIns="146304" rIns="201168" rtlCol="0" anchor="t"/>
           <a:lstStyle/>
           <a:p>
             <a:pPr algn="l" latinLnBrk="0">
@@ -6807,7 +6858,7 @@
           </a:fontRef>
         </p:style>
         <p:txBody>
-          <a:bodyPr rtlCol="0" anchor="t" wrap="square" lIns="201168" rIns="201168" tIns="146304"/>
+          <a:bodyPr wrap="square" lIns="201168" tIns="146304" rIns="201168" rtlCol="0" anchor="t"/>
           <a:lstStyle/>
           <a:p>
             <a:pPr algn="l" latinLnBrk="0">
@@ -6883,7 +6934,7 @@
           </a:fontRef>
         </p:style>
         <p:txBody>
-          <a:bodyPr rtlCol="0" anchor="t" wrap="square" lIns="201168" rIns="201168" tIns="146304"/>
+          <a:bodyPr wrap="square" lIns="201168" tIns="146304" rIns="201168" rtlCol="0" anchor="t"/>
           <a:lstStyle/>
           <a:p>
             <a:pPr algn="l" latinLnBrk="0">
@@ -6928,7 +6979,7 @@
 </file>
 
 <file path=ppt/slides/slide17.xml><?xml version="1.0" encoding="utf-8"?>
-<p:sld xmlns:a="http://schemas.openxmlformats.org/drawingml/2006/main" xmlns:p="http://schemas.openxmlformats.org/presentationml/2006/main" xmlns:r="http://schemas.openxmlformats.org/officeDocument/2006/relationships">
+<p:sld xmlns:a="http://schemas.openxmlformats.org/drawingml/2006/main" xmlns:r="http://schemas.openxmlformats.org/officeDocument/2006/relationships" xmlns:p="http://schemas.openxmlformats.org/presentationml/2006/main">
   <p:cSld>
     <p:bg>
       <p:bgPr>
@@ -6944,7 +6995,14 @@
         <p:cNvGrpSpPr/>
         <p:nvPr/>
       </p:nvGrpSpPr>
-      <p:grpSpPr/>
+      <p:grpSpPr>
+        <a:xfrm>
+          <a:off x="0" y="0"/>
+          <a:ext cx="0" cy="0"/>
+          <a:chOff x="0" y="0"/>
+          <a:chExt cx="0" cy="0"/>
+        </a:xfrm>
+      </p:grpSpPr>
       <p:sp>
         <p:nvSpPr>
           <p:cNvPr id="2" name="TextBox 1"/>
@@ -6962,7 +7020,7 @@
           <a:noFill/>
         </p:spPr>
         <p:txBody>
-          <a:bodyPr wrap="square" anchor="t" lIns="27432" rIns="27432" tIns="18288" bIns="18288">
+          <a:bodyPr wrap="square" lIns="27432" tIns="18288" rIns="27432" bIns="18288" anchor="t">
             <a:spAutoFit/>
           </a:bodyPr>
           <a:lstStyle/>
@@ -7001,7 +7059,7 @@
           <a:noFill/>
         </p:spPr>
         <p:txBody>
-          <a:bodyPr wrap="square" anchor="t" lIns="27432" rIns="27432" tIns="18288" bIns="18288">
+          <a:bodyPr wrap="square" lIns="27432" tIns="18288" rIns="27432" bIns="18288" anchor="t">
             <a:spAutoFit/>
           </a:bodyPr>
           <a:lstStyle/>
@@ -7040,7 +7098,7 @@
           <a:noFill/>
         </p:spPr>
         <p:txBody>
-          <a:bodyPr wrap="square" anchor="t" lIns="27432" rIns="27432" tIns="18288" bIns="18288">
+          <a:bodyPr wrap="square" lIns="27432" tIns="18288" rIns="27432" bIns="18288" anchor="t">
             <a:spAutoFit/>
           </a:bodyPr>
           <a:lstStyle/>
@@ -7079,7 +7137,7 @@
           <a:noFill/>
         </p:spPr>
         <p:txBody>
-          <a:bodyPr wrap="square" anchor="t" lIns="27432" rIns="27432" tIns="18288" bIns="18288">
+          <a:bodyPr wrap="square" lIns="27432" tIns="18288" rIns="27432" bIns="18288" anchor="t">
             <a:spAutoFit/>
           </a:bodyPr>
           <a:lstStyle/>
@@ -7141,7 +7199,7 @@
           </a:fontRef>
         </p:style>
         <p:txBody>
-          <a:bodyPr rtlCol="0" anchor="t" wrap="square" lIns="201168" rIns="201168" tIns="146304"/>
+          <a:bodyPr wrap="square" lIns="201168" tIns="146304" rIns="201168" rtlCol="0" anchor="t"/>
           <a:lstStyle/>
           <a:p>
             <a:pPr algn="l" latinLnBrk="0">
@@ -7219,7 +7277,7 @@
           </a:fontRef>
         </p:style>
         <p:txBody>
-          <a:bodyPr rtlCol="0" anchor="t" wrap="square" lIns="201168" rIns="201168" tIns="146304"/>
+          <a:bodyPr wrap="square" lIns="201168" tIns="146304" rIns="201168" rtlCol="0" anchor="t"/>
           <a:lstStyle/>
           <a:p>
             <a:pPr algn="l" latinLnBrk="0">
@@ -7274,7 +7332,7 @@
           <a:noFill/>
         </p:spPr>
         <p:txBody>
-          <a:bodyPr wrap="square" anchor="t" lIns="27432" rIns="27432" tIns="18288" bIns="18288">
+          <a:bodyPr wrap="square" lIns="27432" tIns="18288" rIns="27432" bIns="18288" anchor="t">
             <a:spAutoFit/>
           </a:bodyPr>
           <a:lstStyle/>
@@ -7305,7 +7363,7 @@
 </file>
 
 <file path=ppt/slides/slide18.xml><?xml version="1.0" encoding="utf-8"?>
-<p:sld xmlns:a="http://schemas.openxmlformats.org/drawingml/2006/main" xmlns:p="http://schemas.openxmlformats.org/presentationml/2006/main" xmlns:r="http://schemas.openxmlformats.org/officeDocument/2006/relationships">
+<p:sld xmlns:a="http://schemas.openxmlformats.org/drawingml/2006/main" xmlns:r="http://schemas.openxmlformats.org/officeDocument/2006/relationships" xmlns:p="http://schemas.openxmlformats.org/presentationml/2006/main">
   <p:cSld>
     <p:bg>
       <p:bgPr>
@@ -7321,7 +7379,14 @@
         <p:cNvGrpSpPr/>
         <p:nvPr/>
       </p:nvGrpSpPr>
-      <p:grpSpPr/>
+      <p:grpSpPr>
+        <a:xfrm>
+          <a:off x="0" y="0"/>
+          <a:ext cx="0" cy="0"/>
+          <a:chOff x="0" y="0"/>
+          <a:chExt cx="0" cy="0"/>
+        </a:xfrm>
+      </p:grpSpPr>
       <p:sp>
         <p:nvSpPr>
           <p:cNvPr id="2" name="TextBox 1"/>
@@ -7339,7 +7404,7 @@
           <a:noFill/>
         </p:spPr>
         <p:txBody>
-          <a:bodyPr wrap="square" anchor="t" lIns="27432" rIns="27432" tIns="18288" bIns="18288">
+          <a:bodyPr wrap="square" lIns="27432" tIns="18288" rIns="27432" bIns="18288" anchor="t">
             <a:spAutoFit/>
           </a:bodyPr>
           <a:lstStyle/>
@@ -7378,7 +7443,7 @@
           <a:noFill/>
         </p:spPr>
         <p:txBody>
-          <a:bodyPr wrap="square" anchor="t" lIns="27432" rIns="27432" tIns="18288" bIns="18288">
+          <a:bodyPr wrap="square" lIns="27432" tIns="18288" rIns="27432" bIns="18288" anchor="t">
             <a:spAutoFit/>
           </a:bodyPr>
           <a:lstStyle/>
@@ -7417,7 +7482,7 @@
           <a:noFill/>
         </p:spPr>
         <p:txBody>
-          <a:bodyPr wrap="square" anchor="t" lIns="27432" rIns="27432" tIns="18288" bIns="18288">
+          <a:bodyPr wrap="square" lIns="27432" tIns="18288" rIns="27432" bIns="18288" anchor="t">
             <a:spAutoFit/>
           </a:bodyPr>
           <a:lstStyle/>
@@ -7456,7 +7521,7 @@
           <a:noFill/>
         </p:spPr>
         <p:txBody>
-          <a:bodyPr wrap="square" anchor="t" lIns="27432" rIns="27432" tIns="18288" bIns="18288">
+          <a:bodyPr wrap="square" lIns="27432" tIns="18288" rIns="27432" bIns="18288" anchor="t">
             <a:spAutoFit/>
           </a:bodyPr>
           <a:lstStyle/>
@@ -7502,60 +7567,6 @@
           </a:prstGeom>
         </p:spPr>
       </p:pic>
-      <p:sp>
-        <p:nvSpPr>
-          <p:cNvPr id="7" name="Rounded Rectangle 6"/>
-          <p:cNvSpPr/>
-          <p:nvPr/>
-        </p:nvSpPr>
-        <p:spPr>
-          <a:xfrm>
-            <a:off x="502920" y="6144768"/>
-            <a:ext cx="11185855" cy="475488"/>
-          </a:xfrm>
-          <a:prstGeom prst="roundRect">
-            <a:avLst>
-              <a:gd name="adj" fmla="val 6000"/>
-            </a:avLst>
-          </a:prstGeom>
-          <a:solidFill>
-            <a:srgbClr val="0E4D5E"/>
-          </a:solidFill>
-          <a:ln>
-            <a:noFill/>
-          </a:ln>
-        </p:spPr>
-        <p:style>
-          <a:lnRef idx="1">
-            <a:schemeClr val="accent1"/>
-          </a:lnRef>
-          <a:fillRef idx="3">
-            <a:schemeClr val="accent1"/>
-          </a:fillRef>
-          <a:effectRef idx="2">
-            <a:schemeClr val="accent1"/>
-          </a:effectRef>
-          <a:fontRef idx="minor">
-            <a:schemeClr val="lt1"/>
-          </a:fontRef>
-        </p:style>
-        <p:txBody>
-          <a:bodyPr rtlCol="0" anchor="ctr" wrap="square"/>
-          <a:lstStyle/>
-          <a:p>
-            <a:pPr algn="ctr" latinLnBrk="0"/>
-            <a:r>
-              <a:rPr sz="1400" b="1">
-                <a:solidFill>
-                  <a:srgbClr val="FDFBF5"/>
-                </a:solidFill>
-                <a:latin typeface="Segoe UI Semibold"/>
-              </a:rPr>
-              <a:t>Use only if the live dashboard cannot run.</a:t>
-            </a:r>
-          </a:p>
-        </p:txBody>
-      </p:sp>
     </p:spTree>
   </p:cSld>
   <p:clrMapOvr>
@@ -7565,7 +7576,7 @@
 </file>
 
 <file path=ppt/slides/slide19.xml><?xml version="1.0" encoding="utf-8"?>
-<p:sld xmlns:a="http://schemas.openxmlformats.org/drawingml/2006/main" xmlns:p="http://schemas.openxmlformats.org/presentationml/2006/main" xmlns:r="http://schemas.openxmlformats.org/officeDocument/2006/relationships">
+<p:sld xmlns:a="http://schemas.openxmlformats.org/drawingml/2006/main" xmlns:r="http://schemas.openxmlformats.org/officeDocument/2006/relationships" xmlns:p="http://schemas.openxmlformats.org/presentationml/2006/main">
   <p:cSld>
     <p:bg>
       <p:bgPr>
@@ -7581,7 +7592,14 @@
         <p:cNvGrpSpPr/>
         <p:nvPr/>
       </p:nvGrpSpPr>
-      <p:grpSpPr/>
+      <p:grpSpPr>
+        <a:xfrm>
+          <a:off x="0" y="0"/>
+          <a:ext cx="0" cy="0"/>
+          <a:chOff x="0" y="0"/>
+          <a:chExt cx="0" cy="0"/>
+        </a:xfrm>
+      </p:grpSpPr>
       <p:sp>
         <p:nvSpPr>
           <p:cNvPr id="2" name="TextBox 1"/>
@@ -7599,7 +7617,7 @@
           <a:noFill/>
         </p:spPr>
         <p:txBody>
-          <a:bodyPr wrap="square" anchor="t" lIns="27432" rIns="27432" tIns="18288" bIns="18288">
+          <a:bodyPr wrap="square" lIns="27432" tIns="18288" rIns="27432" bIns="18288" anchor="t">
             <a:spAutoFit/>
           </a:bodyPr>
           <a:lstStyle/>
@@ -7638,7 +7656,7 @@
           <a:noFill/>
         </p:spPr>
         <p:txBody>
-          <a:bodyPr wrap="square" anchor="t" lIns="27432" rIns="27432" tIns="18288" bIns="18288">
+          <a:bodyPr wrap="square" lIns="27432" tIns="18288" rIns="27432" bIns="18288" anchor="t">
             <a:spAutoFit/>
           </a:bodyPr>
           <a:lstStyle/>
@@ -7677,7 +7695,7 @@
           <a:noFill/>
         </p:spPr>
         <p:txBody>
-          <a:bodyPr wrap="square" anchor="t" lIns="27432" rIns="27432" tIns="18288" bIns="18288">
+          <a:bodyPr wrap="square" lIns="27432" tIns="18288" rIns="27432" bIns="18288" anchor="t">
             <a:spAutoFit/>
           </a:bodyPr>
           <a:lstStyle/>
@@ -7716,7 +7734,7 @@
           <a:noFill/>
         </p:spPr>
         <p:txBody>
-          <a:bodyPr wrap="square" anchor="t" lIns="27432" rIns="27432" tIns="18288" bIns="18288">
+          <a:bodyPr wrap="square" lIns="27432" tIns="18288" rIns="27432" bIns="18288" anchor="t">
             <a:spAutoFit/>
           </a:bodyPr>
           <a:lstStyle/>
@@ -7778,7 +7796,7 @@
           </a:fontRef>
         </p:style>
         <p:txBody>
-          <a:bodyPr rtlCol="0" anchor="t" wrap="square" lIns="201168" rIns="201168" tIns="146304"/>
+          <a:bodyPr wrap="square" lIns="201168" tIns="146304" rIns="201168" rtlCol="0" anchor="t"/>
           <a:lstStyle/>
           <a:p>
             <a:pPr algn="l" latinLnBrk="0">
@@ -7854,7 +7872,7 @@
           </a:fontRef>
         </p:style>
         <p:txBody>
-          <a:bodyPr rtlCol="0" anchor="t" wrap="square" lIns="201168" rIns="201168" tIns="146304"/>
+          <a:bodyPr wrap="square" lIns="201168" tIns="146304" rIns="201168" rtlCol="0" anchor="t"/>
           <a:lstStyle/>
           <a:p>
             <a:pPr algn="l" latinLnBrk="0">
@@ -7930,7 +7948,7 @@
           </a:fontRef>
         </p:style>
         <p:txBody>
-          <a:bodyPr rtlCol="0" anchor="t" wrap="square" lIns="201168" rIns="201168" tIns="146304"/>
+          <a:bodyPr wrap="square" lIns="201168" tIns="146304" rIns="201168" rtlCol="0" anchor="t"/>
           <a:lstStyle/>
           <a:p>
             <a:pPr algn="l" latinLnBrk="0">
@@ -8006,7 +8024,7 @@
           </a:fontRef>
         </p:style>
         <p:txBody>
-          <a:bodyPr rtlCol="0" anchor="t" wrap="square" lIns="201168" rIns="201168" tIns="146304"/>
+          <a:bodyPr wrap="square" lIns="201168" tIns="146304" rIns="201168" rtlCol="0" anchor="t"/>
           <a:lstStyle/>
           <a:p>
             <a:pPr algn="l" latinLnBrk="0">
@@ -8082,7 +8100,7 @@
           </a:fontRef>
         </p:style>
         <p:txBody>
-          <a:bodyPr rtlCol="0" anchor="t" wrap="square" lIns="201168" rIns="201168" tIns="146304"/>
+          <a:bodyPr wrap="square" lIns="201168" tIns="146304" rIns="201168" rtlCol="0" anchor="t"/>
           <a:lstStyle/>
           <a:p>
             <a:pPr algn="l" latinLnBrk="0">
@@ -8127,7 +8145,7 @@
 </file>
 
 <file path=ppt/slides/slide2.xml><?xml version="1.0" encoding="utf-8"?>
-<p:sld xmlns:a="http://schemas.openxmlformats.org/drawingml/2006/main" xmlns:p="http://schemas.openxmlformats.org/presentationml/2006/main" xmlns:r="http://schemas.openxmlformats.org/officeDocument/2006/relationships">
+<p:sld xmlns:a="http://schemas.openxmlformats.org/drawingml/2006/main" xmlns:r="http://schemas.openxmlformats.org/officeDocument/2006/relationships" xmlns:p="http://schemas.openxmlformats.org/presentationml/2006/main">
   <p:cSld>
     <p:bg>
       <p:bgPr>
@@ -8143,7 +8161,14 @@
         <p:cNvGrpSpPr/>
         <p:nvPr/>
       </p:nvGrpSpPr>
-      <p:grpSpPr/>
+      <p:grpSpPr>
+        <a:xfrm>
+          <a:off x="0" y="0"/>
+          <a:ext cx="0" cy="0"/>
+          <a:chOff x="0" y="0"/>
+          <a:chExt cx="0" cy="0"/>
+        </a:xfrm>
+      </p:grpSpPr>
       <p:sp>
         <p:nvSpPr>
           <p:cNvPr id="2" name="TextBox 1"/>
@@ -8161,7 +8186,7 @@
           <a:noFill/>
         </p:spPr>
         <p:txBody>
-          <a:bodyPr wrap="square" anchor="t" lIns="27432" rIns="27432" tIns="18288" bIns="18288">
+          <a:bodyPr wrap="square" lIns="27432" tIns="18288" rIns="27432" bIns="18288" anchor="t">
             <a:spAutoFit/>
           </a:bodyPr>
           <a:lstStyle/>
@@ -8200,7 +8225,7 @@
           <a:noFill/>
         </p:spPr>
         <p:txBody>
-          <a:bodyPr wrap="square" anchor="t" lIns="27432" rIns="27432" tIns="18288" bIns="18288">
+          <a:bodyPr wrap="square" lIns="27432" tIns="18288" rIns="27432" bIns="18288" anchor="t">
             <a:spAutoFit/>
           </a:bodyPr>
           <a:lstStyle/>
@@ -8239,7 +8264,7 @@
           <a:noFill/>
         </p:spPr>
         <p:txBody>
-          <a:bodyPr wrap="square" anchor="t" lIns="27432" rIns="27432" tIns="18288" bIns="18288">
+          <a:bodyPr wrap="square" lIns="27432" tIns="18288" rIns="27432" bIns="18288" anchor="t">
             <a:spAutoFit/>
           </a:bodyPr>
           <a:lstStyle/>
@@ -8278,7 +8303,7 @@
           <a:noFill/>
         </p:spPr>
         <p:txBody>
-          <a:bodyPr wrap="square" anchor="t" lIns="27432" rIns="27432" tIns="18288" bIns="18288">
+          <a:bodyPr wrap="square" lIns="27432" tIns="18288" rIns="27432" bIns="18288" anchor="t">
             <a:spAutoFit/>
           </a:bodyPr>
           <a:lstStyle/>
@@ -8317,7 +8342,7 @@
           <a:noFill/>
         </p:spPr>
         <p:txBody>
-          <a:bodyPr wrap="square" anchor="t" lIns="27432" rIns="27432" tIns="18288" bIns="18288">
+          <a:bodyPr wrap="square" lIns="27432" tIns="18288" rIns="27432" bIns="18288" anchor="t">
             <a:spAutoFit/>
           </a:bodyPr>
           <a:lstStyle/>
@@ -8379,7 +8404,7 @@
           </a:fontRef>
         </p:style>
         <p:txBody>
-          <a:bodyPr rtlCol="0" anchor="t" wrap="square" lIns="201168" rIns="201168" tIns="146304"/>
+          <a:bodyPr wrap="square" lIns="201168" tIns="146304" rIns="201168" rtlCol="0" anchor="t"/>
           <a:lstStyle/>
           <a:p>
             <a:pPr algn="l" latinLnBrk="0">
@@ -8455,7 +8480,7 @@
           </a:fontRef>
         </p:style>
         <p:txBody>
-          <a:bodyPr rtlCol="0" anchor="t" wrap="square" lIns="201168" rIns="201168" tIns="146304"/>
+          <a:bodyPr wrap="square" lIns="201168" tIns="146304" rIns="201168" rtlCol="0" anchor="t"/>
           <a:lstStyle/>
           <a:p>
             <a:pPr algn="l" latinLnBrk="0">
@@ -8531,7 +8556,7 @@
           </a:fontRef>
         </p:style>
         <p:txBody>
-          <a:bodyPr rtlCol="0" anchor="t" wrap="square" lIns="201168" rIns="201168" tIns="146304"/>
+          <a:bodyPr wrap="square" lIns="201168" tIns="146304" rIns="201168" rtlCol="0" anchor="t"/>
           <a:lstStyle/>
           <a:p>
             <a:pPr algn="l" latinLnBrk="0">
@@ -8575,7 +8600,7 @@
         </p:nvSpPr>
         <p:spPr>
           <a:xfrm>
-            <a:off x="502920" y="6144768"/>
+            <a:off x="502920" y="5986018"/>
             <a:ext cx="11185855" cy="475488"/>
           </a:xfrm>
           <a:prstGeom prst="roundRect">
@@ -8605,7 +8630,7 @@
           </a:fontRef>
         </p:style>
         <p:txBody>
-          <a:bodyPr rtlCol="0" anchor="ctr" wrap="square"/>
+          <a:bodyPr wrap="square" rtlCol="0" anchor="ctr"/>
           <a:lstStyle/>
           <a:p>
             <a:pPr algn="ctr" latinLnBrk="0"/>
@@ -8630,7 +8655,7 @@
 </file>
 
 <file path=ppt/slides/slide3.xml><?xml version="1.0" encoding="utf-8"?>
-<p:sld xmlns:a="http://schemas.openxmlformats.org/drawingml/2006/main" xmlns:p="http://schemas.openxmlformats.org/presentationml/2006/main" xmlns:r="http://schemas.openxmlformats.org/officeDocument/2006/relationships">
+<p:sld xmlns:a="http://schemas.openxmlformats.org/drawingml/2006/main" xmlns:r="http://schemas.openxmlformats.org/officeDocument/2006/relationships" xmlns:p="http://schemas.openxmlformats.org/presentationml/2006/main">
   <p:cSld>
     <p:bg>
       <p:bgPr>
@@ -8646,7 +8671,14 @@
         <p:cNvGrpSpPr/>
         <p:nvPr/>
       </p:nvGrpSpPr>
-      <p:grpSpPr/>
+      <p:grpSpPr>
+        <a:xfrm>
+          <a:off x="0" y="0"/>
+          <a:ext cx="0" cy="0"/>
+          <a:chOff x="0" y="0"/>
+          <a:chExt cx="0" cy="0"/>
+        </a:xfrm>
+      </p:grpSpPr>
       <p:sp>
         <p:nvSpPr>
           <p:cNvPr id="2" name="TextBox 1"/>
@@ -8664,7 +8696,7 @@
           <a:noFill/>
         </p:spPr>
         <p:txBody>
-          <a:bodyPr wrap="square" anchor="t" lIns="27432" rIns="27432" tIns="18288" bIns="18288">
+          <a:bodyPr wrap="square" lIns="27432" tIns="18288" rIns="27432" bIns="18288" anchor="t">
             <a:spAutoFit/>
           </a:bodyPr>
           <a:lstStyle/>
@@ -8703,7 +8735,7 @@
           <a:noFill/>
         </p:spPr>
         <p:txBody>
-          <a:bodyPr wrap="square" anchor="t" lIns="27432" rIns="27432" tIns="18288" bIns="18288">
+          <a:bodyPr wrap="square" lIns="27432" tIns="18288" rIns="27432" bIns="18288" anchor="t">
             <a:spAutoFit/>
           </a:bodyPr>
           <a:lstStyle/>
@@ -8742,7 +8774,7 @@
           <a:noFill/>
         </p:spPr>
         <p:txBody>
-          <a:bodyPr wrap="square" anchor="t" lIns="27432" rIns="27432" tIns="18288" bIns="18288">
+          <a:bodyPr wrap="square" lIns="27432" tIns="18288" rIns="27432" bIns="18288" anchor="t">
             <a:spAutoFit/>
           </a:bodyPr>
           <a:lstStyle/>
@@ -8781,7 +8813,7 @@
           <a:noFill/>
         </p:spPr>
         <p:txBody>
-          <a:bodyPr wrap="square" anchor="t" lIns="27432" rIns="27432" tIns="18288" bIns="18288">
+          <a:bodyPr wrap="square" lIns="27432" tIns="18288" rIns="27432" bIns="18288" anchor="t">
             <a:spAutoFit/>
           </a:bodyPr>
           <a:lstStyle/>
@@ -8843,7 +8875,7 @@
           </a:fontRef>
         </p:style>
         <p:txBody>
-          <a:bodyPr rtlCol="0" anchor="t" wrap="square" lIns="201168" rIns="201168" tIns="146304"/>
+          <a:bodyPr wrap="square" lIns="201168" tIns="146304" rIns="201168" rtlCol="0" anchor="t"/>
           <a:lstStyle/>
           <a:p>
             <a:pPr algn="l" latinLnBrk="0">
@@ -8919,7 +8951,7 @@
           </a:fontRef>
         </p:style>
         <p:txBody>
-          <a:bodyPr rtlCol="0" anchor="t" wrap="square" lIns="201168" rIns="201168" tIns="146304"/>
+          <a:bodyPr wrap="square" lIns="201168" tIns="146304" rIns="201168" rtlCol="0" anchor="t"/>
           <a:lstStyle/>
           <a:p>
             <a:pPr algn="l" latinLnBrk="0">
@@ -8995,7 +9027,7 @@
           </a:fontRef>
         </p:style>
         <p:txBody>
-          <a:bodyPr rtlCol="0" anchor="t" wrap="square" lIns="201168" rIns="201168" tIns="146304"/>
+          <a:bodyPr wrap="square" lIns="201168" tIns="146304" rIns="201168" rtlCol="0" anchor="t"/>
           <a:lstStyle/>
           <a:p>
             <a:pPr algn="l" latinLnBrk="0">
@@ -9071,7 +9103,7 @@
           </a:fontRef>
         </p:style>
         <p:txBody>
-          <a:bodyPr rtlCol="0" anchor="t" wrap="square" lIns="201168" rIns="201168" tIns="146304"/>
+          <a:bodyPr wrap="square" lIns="201168" tIns="146304" rIns="201168" rtlCol="0" anchor="t"/>
           <a:lstStyle/>
           <a:p>
             <a:pPr algn="l" latinLnBrk="0">
@@ -9116,7 +9148,7 @@
 </file>
 
 <file path=ppt/slides/slide4.xml><?xml version="1.0" encoding="utf-8"?>
-<p:sld xmlns:a="http://schemas.openxmlformats.org/drawingml/2006/main" xmlns:p="http://schemas.openxmlformats.org/presentationml/2006/main" xmlns:r="http://schemas.openxmlformats.org/officeDocument/2006/relationships">
+<p:sld xmlns:a="http://schemas.openxmlformats.org/drawingml/2006/main" xmlns:r="http://schemas.openxmlformats.org/officeDocument/2006/relationships" xmlns:p="http://schemas.openxmlformats.org/presentationml/2006/main">
   <p:cSld>
     <p:bg>
       <p:bgPr>
@@ -9132,7 +9164,14 @@
         <p:cNvGrpSpPr/>
         <p:nvPr/>
       </p:nvGrpSpPr>
-      <p:grpSpPr/>
+      <p:grpSpPr>
+        <a:xfrm>
+          <a:off x="0" y="0"/>
+          <a:ext cx="0" cy="0"/>
+          <a:chOff x="0" y="0"/>
+          <a:chExt cx="0" cy="0"/>
+        </a:xfrm>
+      </p:grpSpPr>
       <p:sp>
         <p:nvSpPr>
           <p:cNvPr id="2" name="TextBox 1"/>
@@ -9150,7 +9189,7 @@
           <a:noFill/>
         </p:spPr>
         <p:txBody>
-          <a:bodyPr wrap="square" anchor="t" lIns="27432" rIns="27432" tIns="18288" bIns="18288">
+          <a:bodyPr wrap="square" lIns="27432" tIns="18288" rIns="27432" bIns="18288" anchor="t">
             <a:spAutoFit/>
           </a:bodyPr>
           <a:lstStyle/>
@@ -9189,7 +9228,7 @@
           <a:noFill/>
         </p:spPr>
         <p:txBody>
-          <a:bodyPr wrap="square" anchor="t" lIns="27432" rIns="27432" tIns="18288" bIns="18288">
+          <a:bodyPr wrap="square" lIns="27432" tIns="18288" rIns="27432" bIns="18288" anchor="t">
             <a:spAutoFit/>
           </a:bodyPr>
           <a:lstStyle/>
@@ -9228,7 +9267,7 @@
           <a:noFill/>
         </p:spPr>
         <p:txBody>
-          <a:bodyPr wrap="square" anchor="t" lIns="27432" rIns="27432" tIns="18288" bIns="18288">
+          <a:bodyPr wrap="square" lIns="27432" tIns="18288" rIns="27432" bIns="18288" anchor="t">
             <a:spAutoFit/>
           </a:bodyPr>
           <a:lstStyle/>
@@ -9267,7 +9306,7 @@
           <a:noFill/>
         </p:spPr>
         <p:txBody>
-          <a:bodyPr wrap="square" anchor="t" lIns="27432" rIns="27432" tIns="18288" bIns="18288">
+          <a:bodyPr wrap="square" lIns="27432" tIns="18288" rIns="27432" bIns="18288" anchor="t">
             <a:spAutoFit/>
           </a:bodyPr>
           <a:lstStyle/>
@@ -9321,7 +9360,7 @@
         </p:nvSpPr>
         <p:spPr>
           <a:xfrm>
-            <a:off x="502920" y="6144768"/>
+            <a:off x="502920" y="5922518"/>
             <a:ext cx="11185855" cy="475488"/>
           </a:xfrm>
           <a:prstGeom prst="roundRect">
@@ -9351,7 +9390,7 @@
           </a:fontRef>
         </p:style>
         <p:txBody>
-          <a:bodyPr rtlCol="0" anchor="ctr" wrap="square"/>
+          <a:bodyPr wrap="square" rtlCol="0" anchor="ctr"/>
           <a:lstStyle/>
           <a:p>
             <a:pPr algn="ctr" latinLnBrk="0"/>
@@ -9376,7 +9415,7 @@
 </file>
 
 <file path=ppt/slides/slide5.xml><?xml version="1.0" encoding="utf-8"?>
-<p:sld xmlns:a="http://schemas.openxmlformats.org/drawingml/2006/main" xmlns:p="http://schemas.openxmlformats.org/presentationml/2006/main" xmlns:r="http://schemas.openxmlformats.org/officeDocument/2006/relationships">
+<p:sld xmlns:a="http://schemas.openxmlformats.org/drawingml/2006/main" xmlns:r="http://schemas.openxmlformats.org/officeDocument/2006/relationships" xmlns:p="http://schemas.openxmlformats.org/presentationml/2006/main">
   <p:cSld>
     <p:bg>
       <p:bgPr>
@@ -9392,7 +9431,14 @@
         <p:cNvGrpSpPr/>
         <p:nvPr/>
       </p:nvGrpSpPr>
-      <p:grpSpPr/>
+      <p:grpSpPr>
+        <a:xfrm>
+          <a:off x="0" y="0"/>
+          <a:ext cx="0" cy="0"/>
+          <a:chOff x="0" y="0"/>
+          <a:chExt cx="0" cy="0"/>
+        </a:xfrm>
+      </p:grpSpPr>
       <p:sp>
         <p:nvSpPr>
           <p:cNvPr id="2" name="TextBox 1"/>
@@ -9410,7 +9456,7 @@
           <a:noFill/>
         </p:spPr>
         <p:txBody>
-          <a:bodyPr wrap="square" anchor="t" lIns="27432" rIns="27432" tIns="18288" bIns="18288">
+          <a:bodyPr wrap="square" lIns="27432" tIns="18288" rIns="27432" bIns="18288" anchor="t">
             <a:spAutoFit/>
           </a:bodyPr>
           <a:lstStyle/>
@@ -9449,7 +9495,7 @@
           <a:noFill/>
         </p:spPr>
         <p:txBody>
-          <a:bodyPr wrap="square" anchor="t" lIns="27432" rIns="27432" tIns="18288" bIns="18288">
+          <a:bodyPr wrap="square" lIns="27432" tIns="18288" rIns="27432" bIns="18288" anchor="t">
             <a:spAutoFit/>
           </a:bodyPr>
           <a:lstStyle/>
@@ -9488,7 +9534,7 @@
           <a:noFill/>
         </p:spPr>
         <p:txBody>
-          <a:bodyPr wrap="square" anchor="t" lIns="27432" rIns="27432" tIns="18288" bIns="18288">
+          <a:bodyPr wrap="square" lIns="27432" tIns="18288" rIns="27432" bIns="18288" anchor="t">
             <a:spAutoFit/>
           </a:bodyPr>
           <a:lstStyle/>
@@ -9527,7 +9573,7 @@
           <a:noFill/>
         </p:spPr>
         <p:txBody>
-          <a:bodyPr wrap="square" anchor="t" lIns="27432" rIns="27432" tIns="18288" bIns="18288">
+          <a:bodyPr wrap="square" lIns="27432" tIns="18288" rIns="27432" bIns="18288" anchor="t">
             <a:spAutoFit/>
           </a:bodyPr>
           <a:lstStyle/>
@@ -9589,7 +9635,7 @@
           </a:fontRef>
         </p:style>
         <p:txBody>
-          <a:bodyPr rtlCol="0" anchor="t" wrap="square" lIns="201168" rIns="201168" tIns="146304"/>
+          <a:bodyPr wrap="square" lIns="201168" tIns="146304" rIns="201168" rtlCol="0" anchor="t"/>
           <a:lstStyle/>
           <a:p>
             <a:pPr algn="l" latinLnBrk="0">
@@ -9665,7 +9711,7 @@
           </a:fontRef>
         </p:style>
         <p:txBody>
-          <a:bodyPr rtlCol="0" anchor="t" wrap="square" lIns="201168" rIns="201168" tIns="146304"/>
+          <a:bodyPr wrap="square" lIns="201168" tIns="146304" rIns="201168" rtlCol="0" anchor="t"/>
           <a:lstStyle/>
           <a:p>
             <a:pPr algn="l" latinLnBrk="0">
@@ -9741,7 +9787,7 @@
           </a:fontRef>
         </p:style>
         <p:txBody>
-          <a:bodyPr rtlCol="0" anchor="t" wrap="square" lIns="201168" rIns="201168" tIns="146304"/>
+          <a:bodyPr wrap="square" lIns="201168" tIns="146304" rIns="201168" rtlCol="0" anchor="t"/>
           <a:lstStyle/>
           <a:p>
             <a:pPr algn="l" latinLnBrk="0">
@@ -9794,7 +9840,7 @@
           <a:noFill/>
         </p:spPr>
         <p:txBody>
-          <a:bodyPr wrap="square" anchor="t" lIns="27432" rIns="27432" tIns="18288" bIns="18288">
+          <a:bodyPr wrap="square" lIns="27432" tIns="18288" rIns="27432" bIns="18288" anchor="t">
             <a:spAutoFit/>
           </a:bodyPr>
           <a:lstStyle/>
@@ -9824,7 +9870,7 @@
         </p:nvSpPr>
         <p:spPr>
           <a:xfrm>
-            <a:off x="502920" y="6144768"/>
+            <a:off x="502920" y="5992368"/>
             <a:ext cx="11185855" cy="475488"/>
           </a:xfrm>
           <a:prstGeom prst="roundRect">
@@ -9854,7 +9900,7 @@
           </a:fontRef>
         </p:style>
         <p:txBody>
-          <a:bodyPr rtlCol="0" anchor="ctr" wrap="square"/>
+          <a:bodyPr wrap="square" rtlCol="0" anchor="ctr"/>
           <a:lstStyle/>
           <a:p>
             <a:pPr algn="ctr" latinLnBrk="0"/>
@@ -9879,7 +9925,7 @@
 </file>
 
 <file path=ppt/slides/slide6.xml><?xml version="1.0" encoding="utf-8"?>
-<p:sld xmlns:a="http://schemas.openxmlformats.org/drawingml/2006/main" xmlns:p="http://schemas.openxmlformats.org/presentationml/2006/main" xmlns:r="http://schemas.openxmlformats.org/officeDocument/2006/relationships">
+<p:sld xmlns:a="http://schemas.openxmlformats.org/drawingml/2006/main" xmlns:r="http://schemas.openxmlformats.org/officeDocument/2006/relationships" xmlns:p="http://schemas.openxmlformats.org/presentationml/2006/main">
   <p:cSld>
     <p:bg>
       <p:bgPr>
@@ -9895,7 +9941,14 @@
         <p:cNvGrpSpPr/>
         <p:nvPr/>
       </p:nvGrpSpPr>
-      <p:grpSpPr/>
+      <p:grpSpPr>
+        <a:xfrm>
+          <a:off x="0" y="0"/>
+          <a:ext cx="0" cy="0"/>
+          <a:chOff x="0" y="0"/>
+          <a:chExt cx="0" cy="0"/>
+        </a:xfrm>
+      </p:grpSpPr>
       <p:sp>
         <p:nvSpPr>
           <p:cNvPr id="2" name="TextBox 1"/>
@@ -9913,7 +9966,7 @@
           <a:noFill/>
         </p:spPr>
         <p:txBody>
-          <a:bodyPr wrap="square" anchor="t" lIns="27432" rIns="27432" tIns="18288" bIns="18288">
+          <a:bodyPr wrap="square" lIns="27432" tIns="18288" rIns="27432" bIns="18288" anchor="t">
             <a:spAutoFit/>
           </a:bodyPr>
           <a:lstStyle/>
@@ -9952,7 +10005,7 @@
           <a:noFill/>
         </p:spPr>
         <p:txBody>
-          <a:bodyPr wrap="square" anchor="t" lIns="27432" rIns="27432" tIns="18288" bIns="18288">
+          <a:bodyPr wrap="square" lIns="27432" tIns="18288" rIns="27432" bIns="18288" anchor="t">
             <a:spAutoFit/>
           </a:bodyPr>
           <a:lstStyle/>
@@ -9991,7 +10044,7 @@
           <a:noFill/>
         </p:spPr>
         <p:txBody>
-          <a:bodyPr wrap="square" anchor="t" lIns="27432" rIns="27432" tIns="18288" bIns="18288">
+          <a:bodyPr wrap="square" lIns="27432" tIns="18288" rIns="27432" bIns="18288" anchor="t">
             <a:spAutoFit/>
           </a:bodyPr>
           <a:lstStyle/>
@@ -10030,7 +10083,7 @@
           <a:noFill/>
         </p:spPr>
         <p:txBody>
-          <a:bodyPr wrap="square" anchor="t" lIns="27432" rIns="27432" tIns="18288" bIns="18288">
+          <a:bodyPr wrap="square" lIns="27432" tIns="18288" rIns="27432" bIns="18288" anchor="t">
             <a:spAutoFit/>
           </a:bodyPr>
           <a:lstStyle/>
@@ -10069,7 +10122,7 @@
           <a:noFill/>
         </p:spPr>
         <p:txBody>
-          <a:bodyPr wrap="square" anchor="t" lIns="27432" rIns="27432" tIns="18288" bIns="18288">
+          <a:bodyPr wrap="square" lIns="27432" tIns="18288" rIns="27432" bIns="18288" anchor="t">
             <a:spAutoFit/>
           </a:bodyPr>
           <a:lstStyle/>
@@ -10131,7 +10184,7 @@
           </a:fontRef>
         </p:style>
         <p:txBody>
-          <a:bodyPr rtlCol="0" anchor="ctr" wrap="square"/>
+          <a:bodyPr wrap="square" rtlCol="0" anchor="ctr"/>
           <a:lstStyle/>
           <a:p>
             <a:pPr algn="ctr" latinLnBrk="0"/>
@@ -10199,7 +10252,7 @@
           </a:fontRef>
         </p:style>
         <p:txBody>
-          <a:bodyPr rtlCol="0" anchor="ctr" wrap="square"/>
+          <a:bodyPr wrap="square" rtlCol="0" anchor="ctr"/>
           <a:lstStyle/>
           <a:p>
             <a:pPr algn="ctr" latinLnBrk="0"/>
@@ -10267,7 +10320,7 @@
           </a:fontRef>
         </p:style>
         <p:txBody>
-          <a:bodyPr rtlCol="0" anchor="ctr" wrap="square"/>
+          <a:bodyPr wrap="square" rtlCol="0" anchor="ctr"/>
           <a:lstStyle/>
           <a:p>
             <a:pPr algn="ctr" latinLnBrk="0"/>
@@ -10335,7 +10388,7 @@
           </a:fontRef>
         </p:style>
         <p:txBody>
-          <a:bodyPr rtlCol="0" anchor="ctr" wrap="square"/>
+          <a:bodyPr wrap="square" rtlCol="0" anchor="ctr"/>
           <a:lstStyle/>
           <a:p>
             <a:pPr algn="ctr" latinLnBrk="0"/>
@@ -10403,7 +10456,7 @@
           </a:fontRef>
         </p:style>
         <p:txBody>
-          <a:bodyPr rtlCol="0" anchor="ctr" wrap="square"/>
+          <a:bodyPr wrap="square" rtlCol="0" anchor="ctr"/>
           <a:lstStyle/>
           <a:p>
             <a:pPr algn="ctr" latinLnBrk="0"/>
@@ -10448,7 +10501,7 @@
           <a:noFill/>
         </p:spPr>
         <p:txBody>
-          <a:bodyPr wrap="square" anchor="t" lIns="27432" rIns="27432" tIns="18288" bIns="18288">
+          <a:bodyPr wrap="square" lIns="27432" tIns="18288" rIns="27432" bIns="18288" anchor="t">
             <a:spAutoFit/>
           </a:bodyPr>
           <a:lstStyle/>
@@ -10510,7 +10563,7 @@
           </a:fontRef>
         </p:style>
         <p:txBody>
-          <a:bodyPr rtlCol="0" anchor="t" wrap="square" lIns="201168" rIns="201168" tIns="146304"/>
+          <a:bodyPr wrap="square" lIns="201168" tIns="146304" rIns="201168" rtlCol="0" anchor="t"/>
           <a:lstStyle/>
           <a:p>
             <a:pPr algn="l" latinLnBrk="0">
@@ -10554,7 +10607,7 @@
         </p:nvSpPr>
         <p:spPr>
           <a:xfrm>
-            <a:off x="502920" y="6144768"/>
+            <a:off x="502920" y="5992368"/>
             <a:ext cx="11185855" cy="475488"/>
           </a:xfrm>
           <a:prstGeom prst="roundRect">
@@ -10584,7 +10637,7 @@
           </a:fontRef>
         </p:style>
         <p:txBody>
-          <a:bodyPr rtlCol="0" anchor="ctr" wrap="square"/>
+          <a:bodyPr wrap="square" rtlCol="0" anchor="ctr"/>
           <a:lstStyle/>
           <a:p>
             <a:pPr algn="ctr" latinLnBrk="0"/>
@@ -10609,7 +10662,7 @@
 </file>
 
 <file path=ppt/slides/slide7.xml><?xml version="1.0" encoding="utf-8"?>
-<p:sld xmlns:a="http://schemas.openxmlformats.org/drawingml/2006/main" xmlns:p="http://schemas.openxmlformats.org/presentationml/2006/main" xmlns:r="http://schemas.openxmlformats.org/officeDocument/2006/relationships">
+<p:sld xmlns:a="http://schemas.openxmlformats.org/drawingml/2006/main" xmlns:r="http://schemas.openxmlformats.org/officeDocument/2006/relationships" xmlns:p="http://schemas.openxmlformats.org/presentationml/2006/main">
   <p:cSld>
     <p:bg>
       <p:bgPr>
@@ -10625,7 +10678,14 @@
         <p:cNvGrpSpPr/>
         <p:nvPr/>
       </p:nvGrpSpPr>
-      <p:grpSpPr/>
+      <p:grpSpPr>
+        <a:xfrm>
+          <a:off x="0" y="0"/>
+          <a:ext cx="0" cy="0"/>
+          <a:chOff x="0" y="0"/>
+          <a:chExt cx="0" cy="0"/>
+        </a:xfrm>
+      </p:grpSpPr>
       <p:sp>
         <p:nvSpPr>
           <p:cNvPr id="2" name="TextBox 1"/>
@@ -10643,7 +10703,7 @@
           <a:noFill/>
         </p:spPr>
         <p:txBody>
-          <a:bodyPr wrap="square" anchor="t" lIns="27432" rIns="27432" tIns="18288" bIns="18288">
+          <a:bodyPr wrap="square" lIns="27432" tIns="18288" rIns="27432" bIns="18288" anchor="t">
             <a:spAutoFit/>
           </a:bodyPr>
           <a:lstStyle/>
@@ -10682,7 +10742,7 @@
           <a:noFill/>
         </p:spPr>
         <p:txBody>
-          <a:bodyPr wrap="square" anchor="t" lIns="27432" rIns="27432" tIns="18288" bIns="18288">
+          <a:bodyPr wrap="square" lIns="27432" tIns="18288" rIns="27432" bIns="18288" anchor="t">
             <a:spAutoFit/>
           </a:bodyPr>
           <a:lstStyle/>
@@ -10721,7 +10781,7 @@
           <a:noFill/>
         </p:spPr>
         <p:txBody>
-          <a:bodyPr wrap="square" anchor="t" lIns="27432" rIns="27432" tIns="18288" bIns="18288">
+          <a:bodyPr wrap="square" lIns="27432" tIns="18288" rIns="27432" bIns="18288" anchor="t">
             <a:spAutoFit/>
           </a:bodyPr>
           <a:lstStyle/>
@@ -10760,7 +10820,7 @@
           <a:noFill/>
         </p:spPr>
         <p:txBody>
-          <a:bodyPr wrap="square" anchor="t" lIns="27432" rIns="27432" tIns="18288" bIns="18288">
+          <a:bodyPr wrap="square" lIns="27432" tIns="18288" rIns="27432" bIns="18288" anchor="t">
             <a:spAutoFit/>
           </a:bodyPr>
           <a:lstStyle/>
@@ -10822,7 +10882,7 @@
           </a:fontRef>
         </p:style>
         <p:txBody>
-          <a:bodyPr rtlCol="0" anchor="t" wrap="square" lIns="201168" rIns="201168" tIns="146304"/>
+          <a:bodyPr wrap="square" lIns="201168" tIns="146304" rIns="201168" rtlCol="0" anchor="t"/>
           <a:lstStyle/>
           <a:p>
             <a:pPr algn="l" latinLnBrk="0">
@@ -10898,7 +10958,7 @@
           </a:fontRef>
         </p:style>
         <p:txBody>
-          <a:bodyPr rtlCol="0" anchor="t" wrap="square" lIns="201168" rIns="201168" tIns="146304"/>
+          <a:bodyPr wrap="square" lIns="201168" tIns="146304" rIns="201168" rtlCol="0" anchor="t"/>
           <a:lstStyle/>
           <a:p>
             <a:pPr algn="l" latinLnBrk="0">
@@ -10974,7 +11034,7 @@
           </a:fontRef>
         </p:style>
         <p:txBody>
-          <a:bodyPr rtlCol="0" anchor="t" wrap="square" lIns="201168" rIns="201168" tIns="146304"/>
+          <a:bodyPr wrap="square" lIns="201168" tIns="146304" rIns="201168" rtlCol="0" anchor="t"/>
           <a:lstStyle/>
           <a:p>
             <a:pPr algn="l" latinLnBrk="0">
@@ -11050,7 +11110,7 @@
           </a:fontRef>
         </p:style>
         <p:txBody>
-          <a:bodyPr rtlCol="0" anchor="t" wrap="square" lIns="201168" rIns="201168" tIns="146304"/>
+          <a:bodyPr wrap="square" lIns="201168" tIns="146304" rIns="201168" rtlCol="0" anchor="t"/>
           <a:lstStyle/>
           <a:p>
             <a:pPr algn="l" latinLnBrk="0">
@@ -11095,7 +11155,7 @@
 </file>
 
 <file path=ppt/slides/slide8.xml><?xml version="1.0" encoding="utf-8"?>
-<p:sld xmlns:a="http://schemas.openxmlformats.org/drawingml/2006/main" xmlns:p="http://schemas.openxmlformats.org/presentationml/2006/main" xmlns:r="http://schemas.openxmlformats.org/officeDocument/2006/relationships">
+<p:sld xmlns:a="http://schemas.openxmlformats.org/drawingml/2006/main" xmlns:r="http://schemas.openxmlformats.org/officeDocument/2006/relationships" xmlns:p="http://schemas.openxmlformats.org/presentationml/2006/main">
   <p:cSld>
     <p:bg>
       <p:bgPr>
@@ -11111,7 +11171,14 @@
         <p:cNvGrpSpPr/>
         <p:nvPr/>
       </p:nvGrpSpPr>
-      <p:grpSpPr/>
+      <p:grpSpPr>
+        <a:xfrm>
+          <a:off x="0" y="0"/>
+          <a:ext cx="0" cy="0"/>
+          <a:chOff x="0" y="0"/>
+          <a:chExt cx="0" cy="0"/>
+        </a:xfrm>
+      </p:grpSpPr>
       <p:sp>
         <p:nvSpPr>
           <p:cNvPr id="2" name="TextBox 1"/>
@@ -11129,7 +11196,7 @@
           <a:noFill/>
         </p:spPr>
         <p:txBody>
-          <a:bodyPr wrap="square" anchor="t" lIns="27432" rIns="27432" tIns="18288" bIns="18288">
+          <a:bodyPr wrap="square" lIns="27432" tIns="18288" rIns="27432" bIns="18288" anchor="t">
             <a:spAutoFit/>
           </a:bodyPr>
           <a:lstStyle/>
@@ -11168,7 +11235,7 @@
           <a:noFill/>
         </p:spPr>
         <p:txBody>
-          <a:bodyPr wrap="square" anchor="t" lIns="27432" rIns="27432" tIns="18288" bIns="18288">
+          <a:bodyPr wrap="square" lIns="27432" tIns="18288" rIns="27432" bIns="18288" anchor="t">
             <a:spAutoFit/>
           </a:bodyPr>
           <a:lstStyle/>
@@ -11207,7 +11274,7 @@
           <a:noFill/>
         </p:spPr>
         <p:txBody>
-          <a:bodyPr wrap="square" anchor="t" lIns="27432" rIns="27432" tIns="18288" bIns="18288">
+          <a:bodyPr wrap="square" lIns="27432" tIns="18288" rIns="27432" bIns="18288" anchor="t">
             <a:spAutoFit/>
           </a:bodyPr>
           <a:lstStyle/>
@@ -11246,7 +11313,7 @@
           <a:noFill/>
         </p:spPr>
         <p:txBody>
-          <a:bodyPr wrap="square" anchor="t" lIns="27432" rIns="27432" tIns="18288" bIns="18288">
+          <a:bodyPr wrap="square" lIns="27432" tIns="18288" rIns="27432" bIns="18288" anchor="t">
             <a:spAutoFit/>
           </a:bodyPr>
           <a:lstStyle/>
@@ -11308,7 +11375,7 @@
           </a:fontRef>
         </p:style>
         <p:txBody>
-          <a:bodyPr rtlCol="0" anchor="t" wrap="square" lIns="201168" rIns="201168" tIns="146304"/>
+          <a:bodyPr wrap="square" lIns="201168" tIns="146304" rIns="201168" rtlCol="0" anchor="t"/>
           <a:lstStyle/>
           <a:p>
             <a:pPr algn="l" latinLnBrk="0">
@@ -11384,7 +11451,7 @@
           </a:fontRef>
         </p:style>
         <p:txBody>
-          <a:bodyPr rtlCol="0" anchor="t" wrap="square" lIns="201168" rIns="201168" tIns="146304"/>
+          <a:bodyPr wrap="square" lIns="201168" tIns="146304" rIns="201168" rtlCol="0" anchor="t"/>
           <a:lstStyle/>
           <a:p>
             <a:pPr algn="l" latinLnBrk="0">
@@ -11460,7 +11527,7 @@
           </a:fontRef>
         </p:style>
         <p:txBody>
-          <a:bodyPr rtlCol="0" anchor="t" wrap="square" lIns="201168" rIns="201168" tIns="146304"/>
+          <a:bodyPr wrap="square" lIns="201168" tIns="146304" rIns="201168" rtlCol="0" anchor="t"/>
           <a:lstStyle/>
           <a:p>
             <a:pPr algn="l" latinLnBrk="0">
@@ -11536,7 +11603,7 @@
           </a:fontRef>
         </p:style>
         <p:txBody>
-          <a:bodyPr rtlCol="0" anchor="t" wrap="square" lIns="201168" rIns="201168" tIns="146304"/>
+          <a:bodyPr wrap="square" lIns="201168" tIns="146304" rIns="201168" rtlCol="0" anchor="t"/>
           <a:lstStyle/>
           <a:p>
             <a:pPr algn="l" latinLnBrk="0">
@@ -11580,7 +11647,7 @@
         </p:nvSpPr>
         <p:spPr>
           <a:xfrm>
-            <a:off x="502920" y="6144768"/>
+            <a:off x="502920" y="5941568"/>
             <a:ext cx="11185855" cy="475488"/>
           </a:xfrm>
           <a:prstGeom prst="roundRect">
@@ -11610,7 +11677,7 @@
           </a:fontRef>
         </p:style>
         <p:txBody>
-          <a:bodyPr rtlCol="0" anchor="ctr" wrap="square"/>
+          <a:bodyPr wrap="square" rtlCol="0" anchor="ctr"/>
           <a:lstStyle/>
           <a:p>
             <a:pPr algn="ctr" latinLnBrk="0"/>
@@ -11635,7 +11702,7 @@
 </file>
 
 <file path=ppt/slides/slide9.xml><?xml version="1.0" encoding="utf-8"?>
-<p:sld xmlns:a="http://schemas.openxmlformats.org/drawingml/2006/main" xmlns:p="http://schemas.openxmlformats.org/presentationml/2006/main" xmlns:r="http://schemas.openxmlformats.org/officeDocument/2006/relationships">
+<p:sld xmlns:a="http://schemas.openxmlformats.org/drawingml/2006/main" xmlns:r="http://schemas.openxmlformats.org/officeDocument/2006/relationships" xmlns:p="http://schemas.openxmlformats.org/presentationml/2006/main">
   <p:cSld>
     <p:bg>
       <p:bgPr>
@@ -11651,7 +11718,14 @@
         <p:cNvGrpSpPr/>
         <p:nvPr/>
       </p:nvGrpSpPr>
-      <p:grpSpPr/>
+      <p:grpSpPr>
+        <a:xfrm>
+          <a:off x="0" y="0"/>
+          <a:ext cx="0" cy="0"/>
+          <a:chOff x="0" y="0"/>
+          <a:chExt cx="0" cy="0"/>
+        </a:xfrm>
+      </p:grpSpPr>
       <p:sp>
         <p:nvSpPr>
           <p:cNvPr id="2" name="TextBox 1"/>
@@ -11669,7 +11743,7 @@
           <a:noFill/>
         </p:spPr>
         <p:txBody>
-          <a:bodyPr wrap="square" anchor="t" lIns="27432" rIns="27432" tIns="18288" bIns="18288">
+          <a:bodyPr wrap="square" lIns="27432" tIns="18288" rIns="27432" bIns="18288" anchor="t">
             <a:spAutoFit/>
           </a:bodyPr>
           <a:lstStyle/>
@@ -11708,7 +11782,7 @@
           <a:noFill/>
         </p:spPr>
         <p:txBody>
-          <a:bodyPr wrap="square" anchor="t" lIns="27432" rIns="27432" tIns="18288" bIns="18288">
+          <a:bodyPr wrap="square" lIns="27432" tIns="18288" rIns="27432" bIns="18288" anchor="t">
             <a:spAutoFit/>
           </a:bodyPr>
           <a:lstStyle/>
@@ -11747,7 +11821,7 @@
           <a:noFill/>
         </p:spPr>
         <p:txBody>
-          <a:bodyPr wrap="square" anchor="t" lIns="27432" rIns="27432" tIns="18288" bIns="18288">
+          <a:bodyPr wrap="square" lIns="27432" tIns="18288" rIns="27432" bIns="18288" anchor="t">
             <a:spAutoFit/>
           </a:bodyPr>
           <a:lstStyle/>
@@ -11786,7 +11860,7 @@
           <a:noFill/>
         </p:spPr>
         <p:txBody>
-          <a:bodyPr wrap="square" anchor="t" lIns="27432" rIns="27432" tIns="18288" bIns="18288">
+          <a:bodyPr wrap="square" lIns="27432" tIns="18288" rIns="27432" bIns="18288" anchor="t">
             <a:spAutoFit/>
           </a:bodyPr>
           <a:lstStyle/>
@@ -11848,7 +11922,7 @@
           </a:fontRef>
         </p:style>
         <p:txBody>
-          <a:bodyPr rtlCol="0" anchor="ctr" wrap="square"/>
+          <a:bodyPr wrap="square" rtlCol="0" anchor="ctr"/>
           <a:lstStyle/>
           <a:p>
             <a:pPr algn="ctr" latinLnBrk="0"/>
@@ -11916,7 +11990,7 @@
           </a:fontRef>
         </p:style>
         <p:txBody>
-          <a:bodyPr rtlCol="0" anchor="ctr" wrap="square"/>
+          <a:bodyPr wrap="square" rtlCol="0" anchor="ctr"/>
           <a:lstStyle/>
           <a:p>
             <a:pPr algn="ctr" latinLnBrk="0"/>
@@ -11984,7 +12058,7 @@
           </a:fontRef>
         </p:style>
         <p:txBody>
-          <a:bodyPr rtlCol="0" anchor="ctr" wrap="square"/>
+          <a:bodyPr wrap="square" rtlCol="0" anchor="ctr"/>
           <a:lstStyle/>
           <a:p>
             <a:pPr algn="ctr" latinLnBrk="0"/>
@@ -12052,7 +12126,7 @@
           </a:fontRef>
         </p:style>
         <p:txBody>
-          <a:bodyPr rtlCol="0" anchor="ctr" wrap="square"/>
+          <a:bodyPr wrap="square" rtlCol="0" anchor="ctr"/>
           <a:lstStyle/>
           <a:p>
             <a:pPr algn="ctr" latinLnBrk="0"/>
@@ -12144,7 +12218,7 @@
           </a:fontRef>
         </p:style>
         <p:txBody>
-          <a:bodyPr rtlCol="0" anchor="t" wrap="square" lIns="201168" rIns="201168" tIns="146304"/>
+          <a:bodyPr wrap="square" lIns="201168" tIns="146304" rIns="201168" rtlCol="0" anchor="t"/>
           <a:lstStyle/>
           <a:p>
             <a:pPr algn="l" latinLnBrk="0">
@@ -12188,7 +12262,7 @@
         </p:nvSpPr>
         <p:spPr>
           <a:xfrm>
-            <a:off x="502920" y="6144768"/>
+            <a:off x="502920" y="5966968"/>
             <a:ext cx="11185855" cy="475488"/>
           </a:xfrm>
           <a:prstGeom prst="roundRect">
@@ -12218,7 +12292,7 @@
           </a:fontRef>
         </p:style>
         <p:txBody>
-          <a:bodyPr rtlCol="0" anchor="ctr" wrap="square"/>
+          <a:bodyPr wrap="square" rtlCol="0" anchor="ctr"/>
           <a:lstStyle/>
           <a:p>
             <a:pPr algn="ctr" latinLnBrk="0"/>
